--- a/San Joaquin/Alex Ulises/CAPSTONE_302V/Equipo 06/Fase 1/Evidencias Grupales/Presentación Proyecto.pptx
+++ b/San Joaquin/Alex Ulises/CAPSTONE_302V/Equipo 06/Fase 1/Evidencias Grupales/Presentación Proyecto.pptx
@@ -1,17 +1,35 @@
 
 <file path=ppt/presentation.xml><?xml version="1.0" encoding="utf-8"?>
-<p:presentation xmlns:a="http://schemas.openxmlformats.org/drawingml/2006/main" xmlns:r="http://schemas.openxmlformats.org/officeDocument/2006/relationships" xmlns:mc="http://schemas.openxmlformats.org/markup-compatibility/2006" xmlns:mv="urn:schemas-microsoft-com:mac:vml" xmlns:p="http://schemas.openxmlformats.org/presentationml/2006/main" xmlns:c="http://schemas.openxmlformats.org/drawingml/2006/chart" xmlns:dgm="http://schemas.openxmlformats.org/drawingml/2006/diagram" xmlns:o="urn:schemas-microsoft-com:office:office" xmlns:v="urn:schemas-microsoft-com:vml" xmlns:pvml="urn:schemas-microsoft-com:office:powerpoint" xmlns:com="http://schemas.openxmlformats.org/drawingml/2006/compatibility" xmlns:p14="http://schemas.microsoft.com/office/powerpoint/2010/main" xmlns:p15="http://schemas.microsoft.com/office/powerpoint/2012/main" xmlns:ahyp="http://schemas.microsoft.com/office/drawing/2018/hyperlinkcolor" autoCompressPictures="0" strictFirstAndLastChars="0" saveSubsetFonts="1">
+<p:presentation xmlns:a="http://schemas.openxmlformats.org/drawingml/2006/main" xmlns:r="http://schemas.openxmlformats.org/officeDocument/2006/relationships" xmlns:mc="http://schemas.openxmlformats.org/markup-compatibility/2006" xmlns:mv="urn:schemas-microsoft-com:mac:vml" xmlns:p="http://schemas.openxmlformats.org/presentationml/2006/main" xmlns:c="http://schemas.openxmlformats.org/drawingml/2006/chart" xmlns:dgm="http://schemas.openxmlformats.org/drawingml/2006/diagram" xmlns:o="urn:schemas-microsoft-com:office:office" xmlns:v="urn:schemas-microsoft-com:vml" xmlns:pvml="urn:schemas-microsoft-com:office:powerpoint" xmlns:com="http://schemas.openxmlformats.org/drawingml/2006/compatibility" xmlns:p14="http://schemas.microsoft.com/office/powerpoint/2010/main" xmlns:p15="http://schemas.microsoft.com/office/powerpoint/2012/main" xmlns:ahyp="http://schemas.microsoft.com/office/drawing/2018/hyperlinkcolor" autoCompressPictures="0" embedTrueTypeFonts="1" strictFirstAndLastChars="0" saveSubsetFonts="1">
   <p:sldMasterIdLst>
-    <p:sldMasterId id="2147483659" r:id="rId4"/>
+    <p:sldMasterId id="2147483659" r:id="rId5"/>
   </p:sldMasterIdLst>
   <p:notesMasterIdLst>
-    <p:notesMasterId r:id="rId5"/>
+    <p:notesMasterId r:id="rId6"/>
   </p:notesMasterIdLst>
   <p:sldIdLst>
-    <p:sldId id="256" r:id="rId6"/>
+    <p:sldId id="256" r:id="rId7"/>
+    <p:sldId id="257" r:id="rId8"/>
+    <p:sldId id="258" r:id="rId9"/>
+    <p:sldId id="259" r:id="rId10"/>
+    <p:sldId id="260" r:id="rId11"/>
+    <p:sldId id="261" r:id="rId12"/>
+    <p:sldId id="262" r:id="rId13"/>
+    <p:sldId id="263" r:id="rId14"/>
+    <p:sldId id="264" r:id="rId15"/>
+    <p:sldId id="265" r:id="rId16"/>
   </p:sldIdLst>
   <p:sldSz cy="5143500" cx="9144000"/>
   <p:notesSz cx="6858000" cy="9144000"/>
+  <p:embeddedFontLst>
+    <p:embeddedFont>
+      <p:font typeface="Roboto"/>
+      <p:regular r:id="rId17"/>
+      <p:bold r:id="rId18"/>
+      <p:italic r:id="rId19"/>
+      <p:boldItalic r:id="rId20"/>
+    </p:embeddedFont>
+  </p:embeddedFontLst>
   <p:defaultTextStyle>
     <a:defPPr lvl="0" marR="0" rtl="0" algn="l">
       <a:lnSpc>
@@ -691,7 +709,7 @@
   <p:cSld>
     <p:spTree>
       <p:nvGrpSpPr>
-        <p:cNvPr id="50" name="Shape 50"/>
+        <p:cNvPr id="81" name="Shape 81"/>
         <p:cNvGrpSpPr/>
         <p:nvPr/>
       </p:nvGrpSpPr>
@@ -705,7 +723,7 @@
       </p:grpSpPr>
       <p:sp>
         <p:nvSpPr>
-          <p:cNvPr id="51" name="Google Shape;51;p:notes"/>
+          <p:cNvPr id="82" name="Google Shape;82;p:notes"/>
           <p:cNvSpPr/>
           <p:nvPr>
             <p:ph idx="2" type="sldImg"/>
@@ -740,7 +758,7 @@
       </p:sp>
       <p:sp>
         <p:nvSpPr>
-          <p:cNvPr id="52" name="Google Shape;52;p:notes"/>
+          <p:cNvPr id="83" name="Google Shape;83;p:notes"/>
           <p:cNvSpPr txBox="1"/>
           <p:nvPr>
             <p:ph idx="1" type="body"/>
@@ -785,9 +803,933 @@
 </p:notes>
 </file>
 
+<file path=ppt/notesSlides/notesSlide10.xml><?xml version="1.0" encoding="utf-8"?>
+<p:notes xmlns:a="http://schemas.openxmlformats.org/drawingml/2006/main" xmlns:r="http://schemas.openxmlformats.org/officeDocument/2006/relationships" xmlns:mc="http://schemas.openxmlformats.org/markup-compatibility/2006" xmlns:mv="urn:schemas-microsoft-com:mac:vml" xmlns:p="http://schemas.openxmlformats.org/presentationml/2006/main" xmlns:c="http://schemas.openxmlformats.org/drawingml/2006/chart" xmlns:dgm="http://schemas.openxmlformats.org/drawingml/2006/diagram" xmlns:o="urn:schemas-microsoft-com:office:office" xmlns:v="urn:schemas-microsoft-com:vml" xmlns:pvml="urn:schemas-microsoft-com:office:powerpoint" xmlns:com="http://schemas.openxmlformats.org/drawingml/2006/compatibility" xmlns:p14="http://schemas.microsoft.com/office/powerpoint/2010/main" xmlns:p15="http://schemas.microsoft.com/office/powerpoint/2012/main" xmlns:ahyp="http://schemas.microsoft.com/office/drawing/2018/hyperlinkcolor" showMasterPhAnim="0" showMasterSp="0">
+  <p:cSld>
+    <p:spTree>
+      <p:nvGrpSpPr>
+        <p:cNvPr id="145" name="Shape 145"/>
+        <p:cNvGrpSpPr/>
+        <p:nvPr/>
+      </p:nvGrpSpPr>
+      <p:grpSpPr>
+        <a:xfrm>
+          <a:off x="0" y="0"/>
+          <a:ext cx="0" cy="0"/>
+          <a:chOff x="0" y="0"/>
+          <a:chExt cx="0" cy="0"/>
+        </a:xfrm>
+      </p:grpSpPr>
+      <p:sp>
+        <p:nvSpPr>
+          <p:cNvPr id="146" name="Google Shape;146;g3458ae9cbf8_0_160:notes"/>
+          <p:cNvSpPr/>
+          <p:nvPr>
+            <p:ph idx="2" type="sldImg"/>
+          </p:nvPr>
+        </p:nvSpPr>
+        <p:spPr>
+          <a:xfrm>
+            <a:off x="381300" y="685800"/>
+            <a:ext cx="6096000" cy="3429000"/>
+          </a:xfrm>
+          <a:custGeom>
+            <a:rect b="b" l="l" r="r" t="t"/>
+            <a:pathLst>
+              <a:path extrusionOk="0" h="120000" w="120000">
+                <a:moveTo>
+                  <a:pt x="0" y="0"/>
+                </a:moveTo>
+                <a:lnTo>
+                  <a:pt x="120000" y="0"/>
+                </a:lnTo>
+                <a:lnTo>
+                  <a:pt x="120000" y="120000"/>
+                </a:lnTo>
+                <a:lnTo>
+                  <a:pt x="0" y="120000"/>
+                </a:lnTo>
+                <a:close/>
+              </a:path>
+            </a:pathLst>
+          </a:custGeom>
+        </p:spPr>
+      </p:sp>
+      <p:sp>
+        <p:nvSpPr>
+          <p:cNvPr id="147" name="Google Shape;147;g3458ae9cbf8_0_160:notes"/>
+          <p:cNvSpPr txBox="1"/>
+          <p:nvPr>
+            <p:ph idx="1" type="body"/>
+          </p:nvPr>
+        </p:nvSpPr>
+        <p:spPr>
+          <a:xfrm>
+            <a:off x="685800" y="4343400"/>
+            <a:ext cx="5486400" cy="4114800"/>
+          </a:xfrm>
+          <a:prstGeom prst="rect">
+            <a:avLst/>
+          </a:prstGeom>
+        </p:spPr>
+        <p:txBody>
+          <a:bodyPr anchorCtr="0" anchor="t" bIns="91425" lIns="91425" spcFirstLastPara="1" rIns="91425" wrap="square" tIns="91425">
+            <a:noAutofit/>
+          </a:bodyPr>
+          <a:lstStyle/>
+          <a:p>
+            <a:pPr indent="0" lvl="0" marL="0" rtl="0" algn="l">
+              <a:spcBef>
+                <a:spcPts val="0"/>
+              </a:spcBef>
+              <a:spcAft>
+                <a:spcPts val="0"/>
+              </a:spcAft>
+              <a:buNone/>
+            </a:pPr>
+            <a:r>
+              <a:t/>
+            </a:r>
+            <a:endParaRPr/>
+          </a:p>
+        </p:txBody>
+      </p:sp>
+    </p:spTree>
+  </p:cSld>
+  <p:clrMapOvr>
+    <a:masterClrMapping/>
+  </p:clrMapOvr>
+</p:notes>
+</file>
+
+<file path=ppt/notesSlides/notesSlide2.xml><?xml version="1.0" encoding="utf-8"?>
+<p:notes xmlns:a="http://schemas.openxmlformats.org/drawingml/2006/main" xmlns:r="http://schemas.openxmlformats.org/officeDocument/2006/relationships" xmlns:mc="http://schemas.openxmlformats.org/markup-compatibility/2006" xmlns:mv="urn:schemas-microsoft-com:mac:vml" xmlns:p="http://schemas.openxmlformats.org/presentationml/2006/main" xmlns:c="http://schemas.openxmlformats.org/drawingml/2006/chart" xmlns:dgm="http://schemas.openxmlformats.org/drawingml/2006/diagram" xmlns:o="urn:schemas-microsoft-com:office:office" xmlns:v="urn:schemas-microsoft-com:vml" xmlns:pvml="urn:schemas-microsoft-com:office:powerpoint" xmlns:com="http://schemas.openxmlformats.org/drawingml/2006/compatibility" xmlns:p14="http://schemas.microsoft.com/office/powerpoint/2010/main" xmlns:p15="http://schemas.microsoft.com/office/powerpoint/2012/main" xmlns:ahyp="http://schemas.microsoft.com/office/drawing/2018/hyperlinkcolor" showMasterPhAnim="0" showMasterSp="0">
+  <p:cSld>
+    <p:spTree>
+      <p:nvGrpSpPr>
+        <p:cNvPr id="90" name="Shape 90"/>
+        <p:cNvGrpSpPr/>
+        <p:nvPr/>
+      </p:nvGrpSpPr>
+      <p:grpSpPr>
+        <a:xfrm>
+          <a:off x="0" y="0"/>
+          <a:ext cx="0" cy="0"/>
+          <a:chOff x="0" y="0"/>
+          <a:chExt cx="0" cy="0"/>
+        </a:xfrm>
+      </p:grpSpPr>
+      <p:sp>
+        <p:nvSpPr>
+          <p:cNvPr id="91" name="Google Shape;91;g3458ae9cbf8_0_83:notes"/>
+          <p:cNvSpPr/>
+          <p:nvPr>
+            <p:ph idx="2" type="sldImg"/>
+          </p:nvPr>
+        </p:nvSpPr>
+        <p:spPr>
+          <a:xfrm>
+            <a:off x="381300" y="685800"/>
+            <a:ext cx="6096000" cy="3429000"/>
+          </a:xfrm>
+          <a:custGeom>
+            <a:rect b="b" l="l" r="r" t="t"/>
+            <a:pathLst>
+              <a:path extrusionOk="0" h="120000" w="120000">
+                <a:moveTo>
+                  <a:pt x="0" y="0"/>
+                </a:moveTo>
+                <a:lnTo>
+                  <a:pt x="120000" y="0"/>
+                </a:lnTo>
+                <a:lnTo>
+                  <a:pt x="120000" y="120000"/>
+                </a:lnTo>
+                <a:lnTo>
+                  <a:pt x="0" y="120000"/>
+                </a:lnTo>
+                <a:close/>
+              </a:path>
+            </a:pathLst>
+          </a:custGeom>
+        </p:spPr>
+      </p:sp>
+      <p:sp>
+        <p:nvSpPr>
+          <p:cNvPr id="92" name="Google Shape;92;g3458ae9cbf8_0_83:notes"/>
+          <p:cNvSpPr txBox="1"/>
+          <p:nvPr>
+            <p:ph idx="1" type="body"/>
+          </p:nvPr>
+        </p:nvSpPr>
+        <p:spPr>
+          <a:xfrm>
+            <a:off x="685800" y="4343400"/>
+            <a:ext cx="5486400" cy="4114800"/>
+          </a:xfrm>
+          <a:prstGeom prst="rect">
+            <a:avLst/>
+          </a:prstGeom>
+        </p:spPr>
+        <p:txBody>
+          <a:bodyPr anchorCtr="0" anchor="t" bIns="91425" lIns="91425" spcFirstLastPara="1" rIns="91425" wrap="square" tIns="91425">
+            <a:noAutofit/>
+          </a:bodyPr>
+          <a:lstStyle/>
+          <a:p>
+            <a:pPr indent="0" lvl="0" marL="0" rtl="0" algn="l">
+              <a:spcBef>
+                <a:spcPts val="0"/>
+              </a:spcBef>
+              <a:spcAft>
+                <a:spcPts val="0"/>
+              </a:spcAft>
+              <a:buNone/>
+            </a:pPr>
+            <a:r>
+              <a:rPr lang="es"/>
+              <a:t>Explicar que este problema ocurre tanto en sistemas de salud privados como públicos en Chile.</a:t>
+            </a:r>
+            <a:endParaRPr/>
+          </a:p>
+        </p:txBody>
+      </p:sp>
+    </p:spTree>
+  </p:cSld>
+  <p:clrMapOvr>
+    <a:masterClrMapping/>
+  </p:clrMapOvr>
+</p:notes>
+</file>
+
+<file path=ppt/notesSlides/notesSlide3.xml><?xml version="1.0" encoding="utf-8"?>
+<p:notes xmlns:a="http://schemas.openxmlformats.org/drawingml/2006/main" xmlns:r="http://schemas.openxmlformats.org/officeDocument/2006/relationships" xmlns:mc="http://schemas.openxmlformats.org/markup-compatibility/2006" xmlns:mv="urn:schemas-microsoft-com:mac:vml" xmlns:p="http://schemas.openxmlformats.org/presentationml/2006/main" xmlns:c="http://schemas.openxmlformats.org/drawingml/2006/chart" xmlns:dgm="http://schemas.openxmlformats.org/drawingml/2006/diagram" xmlns:o="urn:schemas-microsoft-com:office:office" xmlns:v="urn:schemas-microsoft-com:vml" xmlns:pvml="urn:schemas-microsoft-com:office:powerpoint" xmlns:com="http://schemas.openxmlformats.org/drawingml/2006/compatibility" xmlns:p14="http://schemas.microsoft.com/office/powerpoint/2010/main" xmlns:p15="http://schemas.microsoft.com/office/powerpoint/2012/main" xmlns:ahyp="http://schemas.microsoft.com/office/drawing/2018/hyperlinkcolor" showMasterPhAnim="0" showMasterSp="0">
+  <p:cSld>
+    <p:spTree>
+      <p:nvGrpSpPr>
+        <p:cNvPr id="97" name="Shape 97"/>
+        <p:cNvGrpSpPr/>
+        <p:nvPr/>
+      </p:nvGrpSpPr>
+      <p:grpSpPr>
+        <a:xfrm>
+          <a:off x="0" y="0"/>
+          <a:ext cx="0" cy="0"/>
+          <a:chOff x="0" y="0"/>
+          <a:chExt cx="0" cy="0"/>
+        </a:xfrm>
+      </p:grpSpPr>
+      <p:sp>
+        <p:nvSpPr>
+          <p:cNvPr id="98" name="Google Shape;98;g3458ae9cbf8_0_92:notes"/>
+          <p:cNvSpPr/>
+          <p:nvPr>
+            <p:ph idx="2" type="sldImg"/>
+          </p:nvPr>
+        </p:nvSpPr>
+        <p:spPr>
+          <a:xfrm>
+            <a:off x="381300" y="685800"/>
+            <a:ext cx="6096000" cy="3429000"/>
+          </a:xfrm>
+          <a:custGeom>
+            <a:rect b="b" l="l" r="r" t="t"/>
+            <a:pathLst>
+              <a:path extrusionOk="0" h="120000" w="120000">
+                <a:moveTo>
+                  <a:pt x="0" y="0"/>
+                </a:moveTo>
+                <a:lnTo>
+                  <a:pt x="120000" y="0"/>
+                </a:lnTo>
+                <a:lnTo>
+                  <a:pt x="120000" y="120000"/>
+                </a:lnTo>
+                <a:lnTo>
+                  <a:pt x="0" y="120000"/>
+                </a:lnTo>
+                <a:close/>
+              </a:path>
+            </a:pathLst>
+          </a:custGeom>
+        </p:spPr>
+      </p:sp>
+      <p:sp>
+        <p:nvSpPr>
+          <p:cNvPr id="99" name="Google Shape;99;g3458ae9cbf8_0_92:notes"/>
+          <p:cNvSpPr txBox="1"/>
+          <p:nvPr>
+            <p:ph idx="1" type="body"/>
+          </p:nvPr>
+        </p:nvSpPr>
+        <p:spPr>
+          <a:xfrm>
+            <a:off x="685800" y="4343400"/>
+            <a:ext cx="5486400" cy="4114800"/>
+          </a:xfrm>
+          <a:prstGeom prst="rect">
+            <a:avLst/>
+          </a:prstGeom>
+        </p:spPr>
+        <p:txBody>
+          <a:bodyPr anchorCtr="0" anchor="t" bIns="91425" lIns="91425" spcFirstLastPara="1" rIns="91425" wrap="square" tIns="91425">
+            <a:noAutofit/>
+          </a:bodyPr>
+          <a:lstStyle/>
+          <a:p>
+            <a:pPr indent="0" lvl="0" marL="0" rtl="0" algn="l">
+              <a:spcBef>
+                <a:spcPts val="0"/>
+              </a:spcBef>
+              <a:spcAft>
+                <a:spcPts val="0"/>
+              </a:spcAft>
+              <a:buNone/>
+            </a:pPr>
+            <a:r>
+              <a:rPr lang="es">
+                <a:solidFill>
+                  <a:schemeClr val="dk1"/>
+                </a:solidFill>
+              </a:rPr>
+              <a:t>Enfatizar que el aporte es </a:t>
+            </a:r>
+            <a:r>
+              <a:rPr b="1" lang="es">
+                <a:solidFill>
+                  <a:schemeClr val="dk1"/>
+                </a:solidFill>
+              </a:rPr>
+              <a:t>real o simulado</a:t>
+            </a:r>
+            <a:r>
+              <a:rPr lang="es">
+                <a:solidFill>
+                  <a:schemeClr val="dk1"/>
+                </a:solidFill>
+              </a:rPr>
+              <a:t>, pero aplicable al mercado</a:t>
+            </a:r>
+            <a:endParaRPr/>
+          </a:p>
+        </p:txBody>
+      </p:sp>
+    </p:spTree>
+  </p:cSld>
+  <p:clrMapOvr>
+    <a:masterClrMapping/>
+  </p:clrMapOvr>
+</p:notes>
+</file>
+
+<file path=ppt/notesSlides/notesSlide4.xml><?xml version="1.0" encoding="utf-8"?>
+<p:notes xmlns:a="http://schemas.openxmlformats.org/drawingml/2006/main" xmlns:r="http://schemas.openxmlformats.org/officeDocument/2006/relationships" xmlns:mc="http://schemas.openxmlformats.org/markup-compatibility/2006" xmlns:mv="urn:schemas-microsoft-com:mac:vml" xmlns:p="http://schemas.openxmlformats.org/presentationml/2006/main" xmlns:c="http://schemas.openxmlformats.org/drawingml/2006/chart" xmlns:dgm="http://schemas.openxmlformats.org/drawingml/2006/diagram" xmlns:o="urn:schemas-microsoft-com:office:office" xmlns:v="urn:schemas-microsoft-com:vml" xmlns:pvml="urn:schemas-microsoft-com:office:powerpoint" xmlns:com="http://schemas.openxmlformats.org/drawingml/2006/compatibility" xmlns:p14="http://schemas.microsoft.com/office/powerpoint/2010/main" xmlns:p15="http://schemas.microsoft.com/office/powerpoint/2012/main" xmlns:ahyp="http://schemas.microsoft.com/office/drawing/2018/hyperlinkcolor" showMasterPhAnim="0" showMasterSp="0">
+  <p:cSld>
+    <p:spTree>
+      <p:nvGrpSpPr>
+        <p:cNvPr id="104" name="Shape 104"/>
+        <p:cNvGrpSpPr/>
+        <p:nvPr/>
+      </p:nvGrpSpPr>
+      <p:grpSpPr>
+        <a:xfrm>
+          <a:off x="0" y="0"/>
+          <a:ext cx="0" cy="0"/>
+          <a:chOff x="0" y="0"/>
+          <a:chExt cx="0" cy="0"/>
+        </a:xfrm>
+      </p:grpSpPr>
+      <p:sp>
+        <p:nvSpPr>
+          <p:cNvPr id="105" name="Google Shape;105;g3458ae9cbf8_0_100:notes"/>
+          <p:cNvSpPr/>
+          <p:nvPr>
+            <p:ph idx="2" type="sldImg"/>
+          </p:nvPr>
+        </p:nvSpPr>
+        <p:spPr>
+          <a:xfrm>
+            <a:off x="381300" y="685800"/>
+            <a:ext cx="6096000" cy="3429000"/>
+          </a:xfrm>
+          <a:custGeom>
+            <a:rect b="b" l="l" r="r" t="t"/>
+            <a:pathLst>
+              <a:path extrusionOk="0" h="120000" w="120000">
+                <a:moveTo>
+                  <a:pt x="0" y="0"/>
+                </a:moveTo>
+                <a:lnTo>
+                  <a:pt x="120000" y="0"/>
+                </a:lnTo>
+                <a:lnTo>
+                  <a:pt x="120000" y="120000"/>
+                </a:lnTo>
+                <a:lnTo>
+                  <a:pt x="0" y="120000"/>
+                </a:lnTo>
+                <a:close/>
+              </a:path>
+            </a:pathLst>
+          </a:custGeom>
+        </p:spPr>
+      </p:sp>
+      <p:sp>
+        <p:nvSpPr>
+          <p:cNvPr id="106" name="Google Shape;106;g3458ae9cbf8_0_100:notes"/>
+          <p:cNvSpPr txBox="1"/>
+          <p:nvPr>
+            <p:ph idx="1" type="body"/>
+          </p:nvPr>
+        </p:nvSpPr>
+        <p:spPr>
+          <a:xfrm>
+            <a:off x="685800" y="4343400"/>
+            <a:ext cx="5486400" cy="4114800"/>
+          </a:xfrm>
+          <a:prstGeom prst="rect">
+            <a:avLst/>
+          </a:prstGeom>
+        </p:spPr>
+        <p:txBody>
+          <a:bodyPr anchorCtr="0" anchor="t" bIns="91425" lIns="91425" spcFirstLastPara="1" rIns="91425" wrap="square" tIns="91425">
+            <a:noAutofit/>
+          </a:bodyPr>
+          <a:lstStyle/>
+          <a:p>
+            <a:pPr indent="0" lvl="0" marL="0" rtl="0" algn="l">
+              <a:spcBef>
+                <a:spcPts val="0"/>
+              </a:spcBef>
+              <a:spcAft>
+                <a:spcPts val="0"/>
+              </a:spcAft>
+              <a:buNone/>
+            </a:pPr>
+            <a:r>
+              <a:rPr lang="es"/>
+              <a:t>Explicar que el sistema actúa como apoyo, no reemplaza diagnóstico médico</a:t>
+            </a:r>
+            <a:endParaRPr/>
+          </a:p>
+        </p:txBody>
+      </p:sp>
+    </p:spTree>
+  </p:cSld>
+  <p:clrMapOvr>
+    <a:masterClrMapping/>
+  </p:clrMapOvr>
+</p:notes>
+</file>
+
+<file path=ppt/notesSlides/notesSlide5.xml><?xml version="1.0" encoding="utf-8"?>
+<p:notes xmlns:a="http://schemas.openxmlformats.org/drawingml/2006/main" xmlns:r="http://schemas.openxmlformats.org/officeDocument/2006/relationships" xmlns:mc="http://schemas.openxmlformats.org/markup-compatibility/2006" xmlns:mv="urn:schemas-microsoft-com:mac:vml" xmlns:p="http://schemas.openxmlformats.org/presentationml/2006/main" xmlns:c="http://schemas.openxmlformats.org/drawingml/2006/chart" xmlns:dgm="http://schemas.openxmlformats.org/drawingml/2006/diagram" xmlns:o="urn:schemas-microsoft-com:office:office" xmlns:v="urn:schemas-microsoft-com:vml" xmlns:pvml="urn:schemas-microsoft-com:office:powerpoint" xmlns:com="http://schemas.openxmlformats.org/drawingml/2006/compatibility" xmlns:p14="http://schemas.microsoft.com/office/powerpoint/2010/main" xmlns:p15="http://schemas.microsoft.com/office/powerpoint/2012/main" xmlns:ahyp="http://schemas.microsoft.com/office/drawing/2018/hyperlinkcolor" showMasterPhAnim="0" showMasterSp="0">
+  <p:cSld>
+    <p:spTree>
+      <p:nvGrpSpPr>
+        <p:cNvPr id="111" name="Shape 111"/>
+        <p:cNvGrpSpPr/>
+        <p:nvPr/>
+      </p:nvGrpSpPr>
+      <p:grpSpPr>
+        <a:xfrm>
+          <a:off x="0" y="0"/>
+          <a:ext cx="0" cy="0"/>
+          <a:chOff x="0" y="0"/>
+          <a:chExt cx="0" cy="0"/>
+        </a:xfrm>
+      </p:grpSpPr>
+      <p:sp>
+        <p:nvSpPr>
+          <p:cNvPr id="112" name="Google Shape;112;g3458ae9cbf8_0_109:notes"/>
+          <p:cNvSpPr/>
+          <p:nvPr>
+            <p:ph idx="2" type="sldImg"/>
+          </p:nvPr>
+        </p:nvSpPr>
+        <p:spPr>
+          <a:xfrm>
+            <a:off x="381300" y="685800"/>
+            <a:ext cx="6096000" cy="3429000"/>
+          </a:xfrm>
+          <a:custGeom>
+            <a:rect b="b" l="l" r="r" t="t"/>
+            <a:pathLst>
+              <a:path extrusionOk="0" h="120000" w="120000">
+                <a:moveTo>
+                  <a:pt x="0" y="0"/>
+                </a:moveTo>
+                <a:lnTo>
+                  <a:pt x="120000" y="0"/>
+                </a:lnTo>
+                <a:lnTo>
+                  <a:pt x="120000" y="120000"/>
+                </a:lnTo>
+                <a:lnTo>
+                  <a:pt x="0" y="120000"/>
+                </a:lnTo>
+                <a:close/>
+              </a:path>
+            </a:pathLst>
+          </a:custGeom>
+        </p:spPr>
+      </p:sp>
+      <p:sp>
+        <p:nvSpPr>
+          <p:cNvPr id="113" name="Google Shape;113;g3458ae9cbf8_0_109:notes"/>
+          <p:cNvSpPr txBox="1"/>
+          <p:nvPr>
+            <p:ph idx="1" type="body"/>
+          </p:nvPr>
+        </p:nvSpPr>
+        <p:spPr>
+          <a:xfrm>
+            <a:off x="685800" y="4343400"/>
+            <a:ext cx="5486400" cy="4114800"/>
+          </a:xfrm>
+          <a:prstGeom prst="rect">
+            <a:avLst/>
+          </a:prstGeom>
+        </p:spPr>
+        <p:txBody>
+          <a:bodyPr anchorCtr="0" anchor="t" bIns="91425" lIns="91425" spcFirstLastPara="1" rIns="91425" wrap="square" tIns="91425">
+            <a:noAutofit/>
+          </a:bodyPr>
+          <a:lstStyle/>
+          <a:p>
+            <a:pPr indent="0" lvl="0" marL="0" rtl="0" algn="l">
+              <a:spcBef>
+                <a:spcPts val="0"/>
+              </a:spcBef>
+              <a:spcAft>
+                <a:spcPts val="0"/>
+              </a:spcAft>
+              <a:buNone/>
+            </a:pPr>
+            <a:r>
+              <a:rPr lang="es"/>
+              <a:t>Mantener objetivos en infinitivo, breves y claros.</a:t>
+            </a:r>
+            <a:endParaRPr/>
+          </a:p>
+        </p:txBody>
+      </p:sp>
+    </p:spTree>
+  </p:cSld>
+  <p:clrMapOvr>
+    <a:masterClrMapping/>
+  </p:clrMapOvr>
+</p:notes>
+</file>
+
+<file path=ppt/notesSlides/notesSlide6.xml><?xml version="1.0" encoding="utf-8"?>
+<p:notes xmlns:a="http://schemas.openxmlformats.org/drawingml/2006/main" xmlns:r="http://schemas.openxmlformats.org/officeDocument/2006/relationships" xmlns:mc="http://schemas.openxmlformats.org/markup-compatibility/2006" xmlns:mv="urn:schemas-microsoft-com:mac:vml" xmlns:p="http://schemas.openxmlformats.org/presentationml/2006/main" xmlns:c="http://schemas.openxmlformats.org/drawingml/2006/chart" xmlns:dgm="http://schemas.openxmlformats.org/drawingml/2006/diagram" xmlns:o="urn:schemas-microsoft-com:office:office" xmlns:v="urn:schemas-microsoft-com:vml" xmlns:pvml="urn:schemas-microsoft-com:office:powerpoint" xmlns:com="http://schemas.openxmlformats.org/drawingml/2006/compatibility" xmlns:p14="http://schemas.microsoft.com/office/powerpoint/2010/main" xmlns:p15="http://schemas.microsoft.com/office/powerpoint/2012/main" xmlns:ahyp="http://schemas.microsoft.com/office/drawing/2018/hyperlinkcolor" showMasterPhAnim="0" showMasterSp="0">
+  <p:cSld>
+    <p:spTree>
+      <p:nvGrpSpPr>
+        <p:cNvPr id="118" name="Shape 118"/>
+        <p:cNvGrpSpPr/>
+        <p:nvPr/>
+      </p:nvGrpSpPr>
+      <p:grpSpPr>
+        <a:xfrm>
+          <a:off x="0" y="0"/>
+          <a:ext cx="0" cy="0"/>
+          <a:chOff x="0" y="0"/>
+          <a:chExt cx="0" cy="0"/>
+        </a:xfrm>
+      </p:grpSpPr>
+      <p:sp>
+        <p:nvSpPr>
+          <p:cNvPr id="119" name="Google Shape;119;g3458ae9cbf8_0_119:notes"/>
+          <p:cNvSpPr/>
+          <p:nvPr>
+            <p:ph idx="2" type="sldImg"/>
+          </p:nvPr>
+        </p:nvSpPr>
+        <p:spPr>
+          <a:xfrm>
+            <a:off x="381300" y="685800"/>
+            <a:ext cx="6096000" cy="3429000"/>
+          </a:xfrm>
+          <a:custGeom>
+            <a:rect b="b" l="l" r="r" t="t"/>
+            <a:pathLst>
+              <a:path extrusionOk="0" h="120000" w="120000">
+                <a:moveTo>
+                  <a:pt x="0" y="0"/>
+                </a:moveTo>
+                <a:lnTo>
+                  <a:pt x="120000" y="0"/>
+                </a:lnTo>
+                <a:lnTo>
+                  <a:pt x="120000" y="120000"/>
+                </a:lnTo>
+                <a:lnTo>
+                  <a:pt x="0" y="120000"/>
+                </a:lnTo>
+                <a:close/>
+              </a:path>
+            </a:pathLst>
+          </a:custGeom>
+        </p:spPr>
+      </p:sp>
+      <p:sp>
+        <p:nvSpPr>
+          <p:cNvPr id="120" name="Google Shape;120;g3458ae9cbf8_0_119:notes"/>
+          <p:cNvSpPr txBox="1"/>
+          <p:nvPr>
+            <p:ph idx="1" type="body"/>
+          </p:nvPr>
+        </p:nvSpPr>
+        <p:spPr>
+          <a:xfrm>
+            <a:off x="685800" y="4343400"/>
+            <a:ext cx="5486400" cy="4114800"/>
+          </a:xfrm>
+          <a:prstGeom prst="rect">
+            <a:avLst/>
+          </a:prstGeom>
+        </p:spPr>
+        <p:txBody>
+          <a:bodyPr anchorCtr="0" anchor="t" bIns="91425" lIns="91425" spcFirstLastPara="1" rIns="91425" wrap="square" tIns="91425">
+            <a:noAutofit/>
+          </a:bodyPr>
+          <a:lstStyle/>
+          <a:p>
+            <a:pPr indent="0" lvl="0" marL="0" rtl="0" algn="l">
+              <a:spcBef>
+                <a:spcPts val="0"/>
+              </a:spcBef>
+              <a:spcAft>
+                <a:spcPts val="0"/>
+              </a:spcAft>
+              <a:buNone/>
+            </a:pPr>
+            <a:r>
+              <a:rPr lang="es"/>
+              <a:t>Resaltar el trabajo colaborativo y roles claros</a:t>
+            </a:r>
+            <a:endParaRPr/>
+          </a:p>
+        </p:txBody>
+      </p:sp>
+    </p:spTree>
+  </p:cSld>
+  <p:clrMapOvr>
+    <a:masterClrMapping/>
+  </p:clrMapOvr>
+</p:notes>
+</file>
+
+<file path=ppt/notesSlides/notesSlide7.xml><?xml version="1.0" encoding="utf-8"?>
+<p:notes xmlns:a="http://schemas.openxmlformats.org/drawingml/2006/main" xmlns:r="http://schemas.openxmlformats.org/officeDocument/2006/relationships" xmlns:mc="http://schemas.openxmlformats.org/markup-compatibility/2006" xmlns:mv="urn:schemas-microsoft-com:mac:vml" xmlns:p="http://schemas.openxmlformats.org/presentationml/2006/main" xmlns:c="http://schemas.openxmlformats.org/drawingml/2006/chart" xmlns:dgm="http://schemas.openxmlformats.org/drawingml/2006/diagram" xmlns:o="urn:schemas-microsoft-com:office:office" xmlns:v="urn:schemas-microsoft-com:vml" xmlns:pvml="urn:schemas-microsoft-com:office:powerpoint" xmlns:com="http://schemas.openxmlformats.org/drawingml/2006/compatibility" xmlns:p14="http://schemas.microsoft.com/office/powerpoint/2010/main" xmlns:p15="http://schemas.microsoft.com/office/powerpoint/2012/main" xmlns:ahyp="http://schemas.microsoft.com/office/drawing/2018/hyperlinkcolor" showMasterPhAnim="0" showMasterSp="0">
+  <p:cSld>
+    <p:spTree>
+      <p:nvGrpSpPr>
+        <p:cNvPr id="125" name="Shape 125"/>
+        <p:cNvGrpSpPr/>
+        <p:nvPr/>
+      </p:nvGrpSpPr>
+      <p:grpSpPr>
+        <a:xfrm>
+          <a:off x="0" y="0"/>
+          <a:ext cx="0" cy="0"/>
+          <a:chOff x="0" y="0"/>
+          <a:chExt cx="0" cy="0"/>
+        </a:xfrm>
+      </p:grpSpPr>
+      <p:sp>
+        <p:nvSpPr>
+          <p:cNvPr id="126" name="Google Shape;126;g3458ae9cbf8_0_128:notes"/>
+          <p:cNvSpPr/>
+          <p:nvPr>
+            <p:ph idx="2" type="sldImg"/>
+          </p:nvPr>
+        </p:nvSpPr>
+        <p:spPr>
+          <a:xfrm>
+            <a:off x="381300" y="685800"/>
+            <a:ext cx="6096000" cy="3429000"/>
+          </a:xfrm>
+          <a:custGeom>
+            <a:rect b="b" l="l" r="r" t="t"/>
+            <a:pathLst>
+              <a:path extrusionOk="0" h="120000" w="120000">
+                <a:moveTo>
+                  <a:pt x="0" y="0"/>
+                </a:moveTo>
+                <a:lnTo>
+                  <a:pt x="120000" y="0"/>
+                </a:lnTo>
+                <a:lnTo>
+                  <a:pt x="120000" y="120000"/>
+                </a:lnTo>
+                <a:lnTo>
+                  <a:pt x="0" y="120000"/>
+                </a:lnTo>
+                <a:close/>
+              </a:path>
+            </a:pathLst>
+          </a:custGeom>
+        </p:spPr>
+      </p:sp>
+      <p:sp>
+        <p:nvSpPr>
+          <p:cNvPr id="127" name="Google Shape;127;g3458ae9cbf8_0_128:notes"/>
+          <p:cNvSpPr txBox="1"/>
+          <p:nvPr>
+            <p:ph idx="1" type="body"/>
+          </p:nvPr>
+        </p:nvSpPr>
+        <p:spPr>
+          <a:xfrm>
+            <a:off x="685800" y="4343400"/>
+            <a:ext cx="5486400" cy="4114800"/>
+          </a:xfrm>
+          <a:prstGeom prst="rect">
+            <a:avLst/>
+          </a:prstGeom>
+        </p:spPr>
+        <p:txBody>
+          <a:bodyPr anchorCtr="0" anchor="t" bIns="91425" lIns="91425" spcFirstLastPara="1" rIns="91425" wrap="square" tIns="91425">
+            <a:noAutofit/>
+          </a:bodyPr>
+          <a:lstStyle/>
+          <a:p>
+            <a:pPr indent="0" lvl="0" marL="0" rtl="0" algn="l">
+              <a:spcBef>
+                <a:spcPts val="0"/>
+              </a:spcBef>
+              <a:spcAft>
+                <a:spcPts val="0"/>
+              </a:spcAft>
+              <a:buNone/>
+            </a:pPr>
+            <a:r>
+              <a:t/>
+            </a:r>
+            <a:endParaRPr/>
+          </a:p>
+        </p:txBody>
+      </p:sp>
+    </p:spTree>
+  </p:cSld>
+  <p:clrMapOvr>
+    <a:masterClrMapping/>
+  </p:clrMapOvr>
+</p:notes>
+</file>
+
+<file path=ppt/notesSlides/notesSlide8.xml><?xml version="1.0" encoding="utf-8"?>
+<p:notes xmlns:a="http://schemas.openxmlformats.org/drawingml/2006/main" xmlns:r="http://schemas.openxmlformats.org/officeDocument/2006/relationships" xmlns:mc="http://schemas.openxmlformats.org/markup-compatibility/2006" xmlns:mv="urn:schemas-microsoft-com:mac:vml" xmlns:p="http://schemas.openxmlformats.org/presentationml/2006/main" xmlns:c="http://schemas.openxmlformats.org/drawingml/2006/chart" xmlns:dgm="http://schemas.openxmlformats.org/drawingml/2006/diagram" xmlns:o="urn:schemas-microsoft-com:office:office" xmlns:v="urn:schemas-microsoft-com:vml" xmlns:pvml="urn:schemas-microsoft-com:office:powerpoint" xmlns:com="http://schemas.openxmlformats.org/drawingml/2006/compatibility" xmlns:p14="http://schemas.microsoft.com/office/powerpoint/2010/main" xmlns:p15="http://schemas.microsoft.com/office/powerpoint/2012/main" xmlns:ahyp="http://schemas.microsoft.com/office/drawing/2018/hyperlinkcolor" showMasterPhAnim="0" showMasterSp="0">
+  <p:cSld>
+    <p:spTree>
+      <p:nvGrpSpPr>
+        <p:cNvPr id="131" name="Shape 131"/>
+        <p:cNvGrpSpPr/>
+        <p:nvPr/>
+      </p:nvGrpSpPr>
+      <p:grpSpPr>
+        <a:xfrm>
+          <a:off x="0" y="0"/>
+          <a:ext cx="0" cy="0"/>
+          <a:chOff x="0" y="0"/>
+          <a:chExt cx="0" cy="0"/>
+        </a:xfrm>
+      </p:grpSpPr>
+      <p:sp>
+        <p:nvSpPr>
+          <p:cNvPr id="132" name="Google Shape;132;g3458ae9cbf8_0_143:notes"/>
+          <p:cNvSpPr/>
+          <p:nvPr>
+            <p:ph idx="2" type="sldImg"/>
+          </p:nvPr>
+        </p:nvSpPr>
+        <p:spPr>
+          <a:xfrm>
+            <a:off x="381300" y="685800"/>
+            <a:ext cx="6096000" cy="3429000"/>
+          </a:xfrm>
+          <a:custGeom>
+            <a:rect b="b" l="l" r="r" t="t"/>
+            <a:pathLst>
+              <a:path extrusionOk="0" h="120000" w="120000">
+                <a:moveTo>
+                  <a:pt x="0" y="0"/>
+                </a:moveTo>
+                <a:lnTo>
+                  <a:pt x="120000" y="0"/>
+                </a:lnTo>
+                <a:lnTo>
+                  <a:pt x="120000" y="120000"/>
+                </a:lnTo>
+                <a:lnTo>
+                  <a:pt x="0" y="120000"/>
+                </a:lnTo>
+                <a:close/>
+              </a:path>
+            </a:pathLst>
+          </a:custGeom>
+        </p:spPr>
+      </p:sp>
+      <p:sp>
+        <p:nvSpPr>
+          <p:cNvPr id="133" name="Google Shape;133;g3458ae9cbf8_0_143:notes"/>
+          <p:cNvSpPr txBox="1"/>
+          <p:nvPr>
+            <p:ph idx="1" type="body"/>
+          </p:nvPr>
+        </p:nvSpPr>
+        <p:spPr>
+          <a:xfrm>
+            <a:off x="685800" y="4343400"/>
+            <a:ext cx="5486400" cy="4114800"/>
+          </a:xfrm>
+          <a:prstGeom prst="rect">
+            <a:avLst/>
+          </a:prstGeom>
+        </p:spPr>
+        <p:txBody>
+          <a:bodyPr anchorCtr="0" anchor="t" bIns="91425" lIns="91425" spcFirstLastPara="1" rIns="91425" wrap="square" tIns="91425">
+            <a:noAutofit/>
+          </a:bodyPr>
+          <a:lstStyle/>
+          <a:p>
+            <a:pPr indent="0" lvl="0" marL="0" rtl="0" algn="l">
+              <a:spcBef>
+                <a:spcPts val="0"/>
+              </a:spcBef>
+              <a:spcAft>
+                <a:spcPts val="0"/>
+              </a:spcAft>
+              <a:buNone/>
+            </a:pPr>
+            <a:r>
+              <a:rPr lang="es"/>
+              <a:t>Destacar que GitHub será el repositorio de evidencia viva.</a:t>
+            </a:r>
+            <a:endParaRPr/>
+          </a:p>
+        </p:txBody>
+      </p:sp>
+    </p:spTree>
+  </p:cSld>
+  <p:clrMapOvr>
+    <a:masterClrMapping/>
+  </p:clrMapOvr>
+</p:notes>
+</file>
+
+<file path=ppt/notesSlides/notesSlide9.xml><?xml version="1.0" encoding="utf-8"?>
+<p:notes xmlns:a="http://schemas.openxmlformats.org/drawingml/2006/main" xmlns:r="http://schemas.openxmlformats.org/officeDocument/2006/relationships" xmlns:mc="http://schemas.openxmlformats.org/markup-compatibility/2006" xmlns:mv="urn:schemas-microsoft-com:mac:vml" xmlns:p="http://schemas.openxmlformats.org/presentationml/2006/main" xmlns:c="http://schemas.openxmlformats.org/drawingml/2006/chart" xmlns:dgm="http://schemas.openxmlformats.org/drawingml/2006/diagram" xmlns:o="urn:schemas-microsoft-com:office:office" xmlns:v="urn:schemas-microsoft-com:vml" xmlns:pvml="urn:schemas-microsoft-com:office:powerpoint" xmlns:com="http://schemas.openxmlformats.org/drawingml/2006/compatibility" xmlns:p14="http://schemas.microsoft.com/office/powerpoint/2010/main" xmlns:p15="http://schemas.microsoft.com/office/powerpoint/2012/main" xmlns:ahyp="http://schemas.microsoft.com/office/drawing/2018/hyperlinkcolor" showMasterPhAnim="0" showMasterSp="0">
+  <p:cSld>
+    <p:spTree>
+      <p:nvGrpSpPr>
+        <p:cNvPr id="138" name="Shape 138"/>
+        <p:cNvGrpSpPr/>
+        <p:nvPr/>
+      </p:nvGrpSpPr>
+      <p:grpSpPr>
+        <a:xfrm>
+          <a:off x="0" y="0"/>
+          <a:ext cx="0" cy="0"/>
+          <a:chOff x="0" y="0"/>
+          <a:chExt cx="0" cy="0"/>
+        </a:xfrm>
+      </p:grpSpPr>
+      <p:sp>
+        <p:nvSpPr>
+          <p:cNvPr id="139" name="Google Shape;139;g3458ae9cbf8_0_151:notes"/>
+          <p:cNvSpPr/>
+          <p:nvPr>
+            <p:ph idx="2" type="sldImg"/>
+          </p:nvPr>
+        </p:nvSpPr>
+        <p:spPr>
+          <a:xfrm>
+            <a:off x="381300" y="685800"/>
+            <a:ext cx="6096000" cy="3429000"/>
+          </a:xfrm>
+          <a:custGeom>
+            <a:rect b="b" l="l" r="r" t="t"/>
+            <a:pathLst>
+              <a:path extrusionOk="0" h="120000" w="120000">
+                <a:moveTo>
+                  <a:pt x="0" y="0"/>
+                </a:moveTo>
+                <a:lnTo>
+                  <a:pt x="120000" y="0"/>
+                </a:lnTo>
+                <a:lnTo>
+                  <a:pt x="120000" y="120000"/>
+                </a:lnTo>
+                <a:lnTo>
+                  <a:pt x="0" y="120000"/>
+                </a:lnTo>
+                <a:close/>
+              </a:path>
+            </a:pathLst>
+          </a:custGeom>
+        </p:spPr>
+      </p:sp>
+      <p:sp>
+        <p:nvSpPr>
+          <p:cNvPr id="140" name="Google Shape;140;g3458ae9cbf8_0_151:notes"/>
+          <p:cNvSpPr txBox="1"/>
+          <p:nvPr>
+            <p:ph idx="1" type="body"/>
+          </p:nvPr>
+        </p:nvSpPr>
+        <p:spPr>
+          <a:xfrm>
+            <a:off x="685800" y="4343400"/>
+            <a:ext cx="5486400" cy="4114800"/>
+          </a:xfrm>
+          <a:prstGeom prst="rect">
+            <a:avLst/>
+          </a:prstGeom>
+        </p:spPr>
+        <p:txBody>
+          <a:bodyPr anchorCtr="0" anchor="t" bIns="91425" lIns="91425" spcFirstLastPara="1" rIns="91425" wrap="square" tIns="91425">
+            <a:noAutofit/>
+          </a:bodyPr>
+          <a:lstStyle/>
+          <a:p>
+            <a:pPr indent="0" lvl="0" marL="0" rtl="0" algn="l">
+              <a:spcBef>
+                <a:spcPts val="0"/>
+              </a:spcBef>
+              <a:spcAft>
+                <a:spcPts val="0"/>
+              </a:spcAft>
+              <a:buNone/>
+            </a:pPr>
+            <a:r>
+              <a:t/>
+            </a:r>
+            <a:endParaRPr/>
+          </a:p>
+        </p:txBody>
+      </p:sp>
+    </p:spTree>
+  </p:cSld>
+  <p:clrMapOvr>
+    <a:masterClrMapping/>
+  </p:clrMapOvr>
+</p:notes>
+</file>
+
 <file path=ppt/slideLayouts/slideLayout1.xml><?xml version="1.0" encoding="utf-8"?>
 <p:sldLayout xmlns:a="http://schemas.openxmlformats.org/drawingml/2006/main" xmlns:r="http://schemas.openxmlformats.org/officeDocument/2006/relationships" xmlns:mc="http://schemas.openxmlformats.org/markup-compatibility/2006" xmlns:mv="urn:schemas-microsoft-com:mac:vml" xmlns:p="http://schemas.openxmlformats.org/presentationml/2006/main" xmlns:c="http://schemas.openxmlformats.org/drawingml/2006/chart" xmlns:dgm="http://schemas.openxmlformats.org/drawingml/2006/diagram" xmlns:o="urn:schemas-microsoft-com:office:office" xmlns:v="urn:schemas-microsoft-com:vml" xmlns:pvml="urn:schemas-microsoft-com:office:powerpoint" xmlns:com="http://schemas.openxmlformats.org/drawingml/2006/compatibility" xmlns:p14="http://schemas.microsoft.com/office/powerpoint/2010/main" xmlns:p15="http://schemas.microsoft.com/office/powerpoint/2012/main" xmlns:ahyp="http://schemas.microsoft.com/office/drawing/2018/hyperlinkcolor" matchingName="Title slide" type="title">
   <p:cSld name="TITLE">
+    <p:bg>
+      <p:bgPr>
+        <a:solidFill>
+          <a:schemeClr val="dk1"/>
+        </a:solidFill>
+      </p:bgPr>
+    </p:bg>
     <p:spTree>
       <p:nvGrpSpPr>
         <p:cNvPr id="9" name="Shape 9"/>
@@ -802,9 +1744,239 @@
           <a:chExt cx="0" cy="0"/>
         </a:xfrm>
       </p:grpSpPr>
+      <p:grpSp>
+        <p:nvGrpSpPr>
+          <p:cNvPr id="10" name="Google Shape;10;p2"/>
+          <p:cNvGrpSpPr/>
+          <p:nvPr/>
+        </p:nvGrpSpPr>
+        <p:grpSpPr>
+          <a:xfrm>
+            <a:off x="6098378" y="5"/>
+            <a:ext cx="3045625" cy="2030570"/>
+            <a:chOff x="6098378" y="5"/>
+            <a:chExt cx="3045625" cy="2030570"/>
+          </a:xfrm>
+        </p:grpSpPr>
+        <p:sp>
+          <p:nvSpPr>
+            <p:cNvPr id="11" name="Google Shape;11;p2"/>
+            <p:cNvSpPr/>
+            <p:nvPr/>
+          </p:nvSpPr>
+          <p:spPr>
+            <a:xfrm>
+              <a:off x="8128803" y="16"/>
+              <a:ext cx="1015200" cy="1015200"/>
+            </a:xfrm>
+            <a:prstGeom prst="rect">
+              <a:avLst/>
+            </a:prstGeom>
+            <a:solidFill>
+              <a:schemeClr val="accent1"/>
+            </a:solidFill>
+            <a:ln>
+              <a:noFill/>
+            </a:ln>
+          </p:spPr>
+          <p:txBody>
+            <a:bodyPr anchorCtr="0" anchor="ctr" bIns="91425" lIns="91425" spcFirstLastPara="1" rIns="91425" wrap="square" tIns="91425">
+              <a:noAutofit/>
+            </a:bodyPr>
+            <a:lstStyle/>
+            <a:p>
+              <a:pPr indent="0" lvl="0" marL="0" rtl="0" algn="l">
+                <a:spcBef>
+                  <a:spcPts val="0"/>
+                </a:spcBef>
+                <a:spcAft>
+                  <a:spcPts val="0"/>
+                </a:spcAft>
+                <a:buNone/>
+              </a:pPr>
+              <a:r>
+                <a:t/>
+              </a:r>
+              <a:endParaRPr/>
+            </a:p>
+          </p:txBody>
+        </p:sp>
+        <p:sp>
+          <p:nvSpPr>
+            <p:cNvPr id="12" name="Google Shape;12;p2"/>
+            <p:cNvSpPr/>
+            <p:nvPr/>
+          </p:nvSpPr>
+          <p:spPr>
+            <a:xfrm flipH="1">
+              <a:off x="7113463" y="5"/>
+              <a:ext cx="1015200" cy="1015200"/>
+            </a:xfrm>
+            <a:prstGeom prst="rtTriangle">
+              <a:avLst/>
+            </a:prstGeom>
+            <a:solidFill>
+              <a:schemeClr val="accent2"/>
+            </a:solidFill>
+            <a:ln>
+              <a:noFill/>
+            </a:ln>
+          </p:spPr>
+          <p:txBody>
+            <a:bodyPr anchorCtr="0" anchor="ctr" bIns="91425" lIns="91425" spcFirstLastPara="1" rIns="91425" wrap="square" tIns="91425">
+              <a:noAutofit/>
+            </a:bodyPr>
+            <a:lstStyle/>
+            <a:p>
+              <a:pPr indent="0" lvl="0" marL="0" rtl="0" algn="l">
+                <a:spcBef>
+                  <a:spcPts val="0"/>
+                </a:spcBef>
+                <a:spcAft>
+                  <a:spcPts val="0"/>
+                </a:spcAft>
+                <a:buNone/>
+              </a:pPr>
+              <a:r>
+                <a:t/>
+              </a:r>
+              <a:endParaRPr/>
+            </a:p>
+          </p:txBody>
+        </p:sp>
+        <p:sp>
+          <p:nvSpPr>
+            <p:cNvPr id="13" name="Google Shape;13;p2"/>
+            <p:cNvSpPr/>
+            <p:nvPr/>
+          </p:nvSpPr>
+          <p:spPr>
+            <a:xfrm flipH="1" rot="10800000">
+              <a:off x="7113588" y="107"/>
+              <a:ext cx="1015200" cy="1015200"/>
+            </a:xfrm>
+            <a:prstGeom prst="rtTriangle">
+              <a:avLst/>
+            </a:prstGeom>
+            <a:solidFill>
+              <a:schemeClr val="accent6"/>
+            </a:solidFill>
+            <a:ln>
+              <a:noFill/>
+            </a:ln>
+          </p:spPr>
+          <p:txBody>
+            <a:bodyPr anchorCtr="0" anchor="ctr" bIns="91425" lIns="91425" spcFirstLastPara="1" rIns="91425" wrap="square" tIns="91425">
+              <a:noAutofit/>
+            </a:bodyPr>
+            <a:lstStyle/>
+            <a:p>
+              <a:pPr indent="0" lvl="0" marL="0" rtl="0" algn="l">
+                <a:spcBef>
+                  <a:spcPts val="0"/>
+                </a:spcBef>
+                <a:spcAft>
+                  <a:spcPts val="0"/>
+                </a:spcAft>
+                <a:buNone/>
+              </a:pPr>
+              <a:r>
+                <a:t/>
+              </a:r>
+              <a:endParaRPr/>
+            </a:p>
+          </p:txBody>
+        </p:sp>
+        <p:sp>
+          <p:nvSpPr>
+            <p:cNvPr id="14" name="Google Shape;14;p2"/>
+            <p:cNvSpPr/>
+            <p:nvPr/>
+          </p:nvSpPr>
+          <p:spPr>
+            <a:xfrm rot="10800000">
+              <a:off x="6098378" y="97"/>
+              <a:ext cx="1015200" cy="1015200"/>
+            </a:xfrm>
+            <a:prstGeom prst="rtTriangle">
+              <a:avLst/>
+            </a:prstGeom>
+            <a:solidFill>
+              <a:schemeClr val="accent1"/>
+            </a:solidFill>
+            <a:ln>
+              <a:noFill/>
+            </a:ln>
+          </p:spPr>
+          <p:txBody>
+            <a:bodyPr anchorCtr="0" anchor="ctr" bIns="91425" lIns="91425" spcFirstLastPara="1" rIns="91425" wrap="square" tIns="91425">
+              <a:noAutofit/>
+            </a:bodyPr>
+            <a:lstStyle/>
+            <a:p>
+              <a:pPr indent="0" lvl="0" marL="0" rtl="0" algn="l">
+                <a:spcBef>
+                  <a:spcPts val="0"/>
+                </a:spcBef>
+                <a:spcAft>
+                  <a:spcPts val="0"/>
+                </a:spcAft>
+                <a:buNone/>
+              </a:pPr>
+              <a:r>
+                <a:t/>
+              </a:r>
+              <a:endParaRPr/>
+            </a:p>
+          </p:txBody>
+        </p:sp>
+        <p:sp>
+          <p:nvSpPr>
+            <p:cNvPr id="15" name="Google Shape;15;p2"/>
+            <p:cNvSpPr/>
+            <p:nvPr/>
+          </p:nvSpPr>
+          <p:spPr>
+            <a:xfrm rot="10800000">
+              <a:off x="8128789" y="1015375"/>
+              <a:ext cx="1015200" cy="1015200"/>
+            </a:xfrm>
+            <a:prstGeom prst="rtTriangle">
+              <a:avLst/>
+            </a:prstGeom>
+            <a:solidFill>
+              <a:schemeClr val="accent6"/>
+            </a:solidFill>
+            <a:ln>
+              <a:noFill/>
+            </a:ln>
+          </p:spPr>
+          <p:txBody>
+            <a:bodyPr anchorCtr="0" anchor="ctr" bIns="91425" lIns="91425" spcFirstLastPara="1" rIns="91425" wrap="square" tIns="91425">
+              <a:noAutofit/>
+            </a:bodyPr>
+            <a:lstStyle/>
+            <a:p>
+              <a:pPr indent="0" lvl="0" marL="0" rtl="0" algn="l">
+                <a:spcBef>
+                  <a:spcPts val="0"/>
+                </a:spcBef>
+                <a:spcAft>
+                  <a:spcPts val="0"/>
+                </a:spcAft>
+                <a:buNone/>
+              </a:pPr>
+              <a:r>
+                <a:t/>
+              </a:r>
+              <a:endParaRPr/>
+            </a:p>
+          </p:txBody>
+        </p:sp>
+      </p:grpSp>
       <p:sp>
         <p:nvSpPr>
-          <p:cNvPr id="10" name="Google Shape;10;p2"/>
+          <p:cNvPr id="16" name="Google Shape;16;p2"/>
           <p:cNvSpPr txBox="1"/>
           <p:nvPr>
             <p:ph type="ctrTitle"/>
@@ -812,8 +1984,8 @@
         </p:nvSpPr>
         <p:spPr>
           <a:xfrm>
-            <a:off x="311708" y="744575"/>
-            <a:ext cx="8520600" cy="2052600"/>
+            <a:off x="598100" y="1775222"/>
+            <a:ext cx="8222100" cy="838800"/>
           </a:xfrm>
           <a:prstGeom prst="rect">
             <a:avLst/>
@@ -824,104 +1996,167 @@
             <a:normAutofit/>
           </a:bodyPr>
           <a:lstStyle>
-            <a:lvl1pPr lvl="0" algn="ctr">
-              <a:spcBef>
-                <a:spcPts val="0"/>
-              </a:spcBef>
-              <a:spcAft>
-                <a:spcPts val="0"/>
-              </a:spcAft>
-              <a:buSzPts val="5200"/>
-              <a:buNone/>
-              <a:defRPr sz="5200"/>
+            <a:lvl1pPr lvl="0">
+              <a:spcBef>
+                <a:spcPts val="0"/>
+              </a:spcBef>
+              <a:spcAft>
+                <a:spcPts val="0"/>
+              </a:spcAft>
+              <a:buClr>
+                <a:schemeClr val="lt1"/>
+              </a:buClr>
+              <a:buSzPts val="4200"/>
+              <a:buNone/>
+              <a:defRPr sz="4200">
+                <a:solidFill>
+                  <a:schemeClr val="lt1"/>
+                </a:solidFill>
+              </a:defRPr>
             </a:lvl1pPr>
-            <a:lvl2pPr lvl="1" algn="ctr">
-              <a:spcBef>
-                <a:spcPts val="0"/>
-              </a:spcBef>
-              <a:spcAft>
-                <a:spcPts val="0"/>
-              </a:spcAft>
-              <a:buSzPts val="5200"/>
-              <a:buNone/>
-              <a:defRPr sz="5200"/>
+            <a:lvl2pPr lvl="1">
+              <a:spcBef>
+                <a:spcPts val="0"/>
+              </a:spcBef>
+              <a:spcAft>
+                <a:spcPts val="0"/>
+              </a:spcAft>
+              <a:buClr>
+                <a:schemeClr val="lt1"/>
+              </a:buClr>
+              <a:buSzPts val="4200"/>
+              <a:buNone/>
+              <a:defRPr sz="4200">
+                <a:solidFill>
+                  <a:schemeClr val="lt1"/>
+                </a:solidFill>
+              </a:defRPr>
             </a:lvl2pPr>
-            <a:lvl3pPr lvl="2" algn="ctr">
-              <a:spcBef>
-                <a:spcPts val="0"/>
-              </a:spcBef>
-              <a:spcAft>
-                <a:spcPts val="0"/>
-              </a:spcAft>
-              <a:buSzPts val="5200"/>
-              <a:buNone/>
-              <a:defRPr sz="5200"/>
+            <a:lvl3pPr lvl="2">
+              <a:spcBef>
+                <a:spcPts val="0"/>
+              </a:spcBef>
+              <a:spcAft>
+                <a:spcPts val="0"/>
+              </a:spcAft>
+              <a:buClr>
+                <a:schemeClr val="lt1"/>
+              </a:buClr>
+              <a:buSzPts val="4200"/>
+              <a:buNone/>
+              <a:defRPr sz="4200">
+                <a:solidFill>
+                  <a:schemeClr val="lt1"/>
+                </a:solidFill>
+              </a:defRPr>
             </a:lvl3pPr>
-            <a:lvl4pPr lvl="3" algn="ctr">
-              <a:spcBef>
-                <a:spcPts val="0"/>
-              </a:spcBef>
-              <a:spcAft>
-                <a:spcPts val="0"/>
-              </a:spcAft>
-              <a:buSzPts val="5200"/>
-              <a:buNone/>
-              <a:defRPr sz="5200"/>
+            <a:lvl4pPr lvl="3">
+              <a:spcBef>
+                <a:spcPts val="0"/>
+              </a:spcBef>
+              <a:spcAft>
+                <a:spcPts val="0"/>
+              </a:spcAft>
+              <a:buClr>
+                <a:schemeClr val="lt1"/>
+              </a:buClr>
+              <a:buSzPts val="4200"/>
+              <a:buNone/>
+              <a:defRPr sz="4200">
+                <a:solidFill>
+                  <a:schemeClr val="lt1"/>
+                </a:solidFill>
+              </a:defRPr>
             </a:lvl4pPr>
-            <a:lvl5pPr lvl="4" algn="ctr">
-              <a:spcBef>
-                <a:spcPts val="0"/>
-              </a:spcBef>
-              <a:spcAft>
-                <a:spcPts val="0"/>
-              </a:spcAft>
-              <a:buSzPts val="5200"/>
-              <a:buNone/>
-              <a:defRPr sz="5200"/>
+            <a:lvl5pPr lvl="4">
+              <a:spcBef>
+                <a:spcPts val="0"/>
+              </a:spcBef>
+              <a:spcAft>
+                <a:spcPts val="0"/>
+              </a:spcAft>
+              <a:buClr>
+                <a:schemeClr val="lt1"/>
+              </a:buClr>
+              <a:buSzPts val="4200"/>
+              <a:buNone/>
+              <a:defRPr sz="4200">
+                <a:solidFill>
+                  <a:schemeClr val="lt1"/>
+                </a:solidFill>
+              </a:defRPr>
             </a:lvl5pPr>
-            <a:lvl6pPr lvl="5" algn="ctr">
-              <a:spcBef>
-                <a:spcPts val="0"/>
-              </a:spcBef>
-              <a:spcAft>
-                <a:spcPts val="0"/>
-              </a:spcAft>
-              <a:buSzPts val="5200"/>
-              <a:buNone/>
-              <a:defRPr sz="5200"/>
+            <a:lvl6pPr lvl="5">
+              <a:spcBef>
+                <a:spcPts val="0"/>
+              </a:spcBef>
+              <a:spcAft>
+                <a:spcPts val="0"/>
+              </a:spcAft>
+              <a:buClr>
+                <a:schemeClr val="lt1"/>
+              </a:buClr>
+              <a:buSzPts val="4200"/>
+              <a:buNone/>
+              <a:defRPr sz="4200">
+                <a:solidFill>
+                  <a:schemeClr val="lt1"/>
+                </a:solidFill>
+              </a:defRPr>
             </a:lvl6pPr>
-            <a:lvl7pPr lvl="6" algn="ctr">
-              <a:spcBef>
-                <a:spcPts val="0"/>
-              </a:spcBef>
-              <a:spcAft>
-                <a:spcPts val="0"/>
-              </a:spcAft>
-              <a:buSzPts val="5200"/>
-              <a:buNone/>
-              <a:defRPr sz="5200"/>
+            <a:lvl7pPr lvl="6">
+              <a:spcBef>
+                <a:spcPts val="0"/>
+              </a:spcBef>
+              <a:spcAft>
+                <a:spcPts val="0"/>
+              </a:spcAft>
+              <a:buClr>
+                <a:schemeClr val="lt1"/>
+              </a:buClr>
+              <a:buSzPts val="4200"/>
+              <a:buNone/>
+              <a:defRPr sz="4200">
+                <a:solidFill>
+                  <a:schemeClr val="lt1"/>
+                </a:solidFill>
+              </a:defRPr>
             </a:lvl7pPr>
-            <a:lvl8pPr lvl="7" algn="ctr">
-              <a:spcBef>
-                <a:spcPts val="0"/>
-              </a:spcBef>
-              <a:spcAft>
-                <a:spcPts val="0"/>
-              </a:spcAft>
-              <a:buSzPts val="5200"/>
-              <a:buNone/>
-              <a:defRPr sz="5200"/>
+            <a:lvl8pPr lvl="7">
+              <a:spcBef>
+                <a:spcPts val="0"/>
+              </a:spcBef>
+              <a:spcAft>
+                <a:spcPts val="0"/>
+              </a:spcAft>
+              <a:buClr>
+                <a:schemeClr val="lt1"/>
+              </a:buClr>
+              <a:buSzPts val="4200"/>
+              <a:buNone/>
+              <a:defRPr sz="4200">
+                <a:solidFill>
+                  <a:schemeClr val="lt1"/>
+                </a:solidFill>
+              </a:defRPr>
             </a:lvl8pPr>
-            <a:lvl9pPr lvl="8" algn="ctr">
-              <a:spcBef>
-                <a:spcPts val="0"/>
-              </a:spcBef>
-              <a:spcAft>
-                <a:spcPts val="0"/>
-              </a:spcAft>
-              <a:buSzPts val="5200"/>
-              <a:buNone/>
-              <a:defRPr sz="5200"/>
+            <a:lvl9pPr lvl="8">
+              <a:spcBef>
+                <a:spcPts val="0"/>
+              </a:spcBef>
+              <a:spcAft>
+                <a:spcPts val="0"/>
+              </a:spcAft>
+              <a:buClr>
+                <a:schemeClr val="lt1"/>
+              </a:buClr>
+              <a:buSzPts val="4200"/>
+              <a:buNone/>
+              <a:defRPr sz="4200">
+                <a:solidFill>
+                  <a:schemeClr val="lt1"/>
+                </a:solidFill>
+              </a:defRPr>
             </a:lvl9pPr>
           </a:lstStyle>
           <a:p/>
@@ -929,7 +2164,7 @@
       </p:sp>
       <p:sp>
         <p:nvSpPr>
-          <p:cNvPr id="11" name="Google Shape;11;p2"/>
+          <p:cNvPr id="17" name="Google Shape;17;p2"/>
           <p:cNvSpPr txBox="1"/>
           <p:nvPr>
             <p:ph idx="1" type="subTitle"/>
@@ -937,8 +2172,8 @@
         </p:nvSpPr>
         <p:spPr>
           <a:xfrm>
-            <a:off x="311700" y="2834125"/>
-            <a:ext cx="8520600" cy="792600"/>
+            <a:off x="598088" y="2715913"/>
+            <a:ext cx="8222100" cy="432900"/>
           </a:xfrm>
           <a:prstGeom prst="rect">
             <a:avLst/>
@@ -949,7 +2184,7 @@
             <a:normAutofit/>
           </a:bodyPr>
           <a:lstStyle>
-            <a:lvl1pPr lvl="0" algn="ctr">
+            <a:lvl1pPr lvl="0">
               <a:lnSpc>
                 <a:spcPct val="100000"/>
               </a:lnSpc>
@@ -959,11 +2194,18 @@
               <a:spcAft>
                 <a:spcPts val="0"/>
               </a:spcAft>
-              <a:buSzPts val="2800"/>
-              <a:buNone/>
-              <a:defRPr sz="2800"/>
+              <a:buClr>
+                <a:schemeClr val="lt1"/>
+              </a:buClr>
+              <a:buSzPts val="2100"/>
+              <a:buNone/>
+              <a:defRPr sz="2100">
+                <a:solidFill>
+                  <a:schemeClr val="lt1"/>
+                </a:solidFill>
+              </a:defRPr>
             </a:lvl1pPr>
-            <a:lvl2pPr lvl="1" algn="ctr">
+            <a:lvl2pPr lvl="1">
               <a:lnSpc>
                 <a:spcPct val="100000"/>
               </a:lnSpc>
@@ -973,11 +2215,18 @@
               <a:spcAft>
                 <a:spcPts val="0"/>
               </a:spcAft>
-              <a:buSzPts val="2800"/>
-              <a:buNone/>
-              <a:defRPr sz="2800"/>
+              <a:buClr>
+                <a:schemeClr val="lt1"/>
+              </a:buClr>
+              <a:buSzPts val="2100"/>
+              <a:buNone/>
+              <a:defRPr sz="2100">
+                <a:solidFill>
+                  <a:schemeClr val="lt1"/>
+                </a:solidFill>
+              </a:defRPr>
             </a:lvl2pPr>
-            <a:lvl3pPr lvl="2" algn="ctr">
+            <a:lvl3pPr lvl="2">
               <a:lnSpc>
                 <a:spcPct val="100000"/>
               </a:lnSpc>
@@ -987,11 +2236,18 @@
               <a:spcAft>
                 <a:spcPts val="0"/>
               </a:spcAft>
-              <a:buSzPts val="2800"/>
-              <a:buNone/>
-              <a:defRPr sz="2800"/>
+              <a:buClr>
+                <a:schemeClr val="lt1"/>
+              </a:buClr>
+              <a:buSzPts val="2100"/>
+              <a:buNone/>
+              <a:defRPr sz="2100">
+                <a:solidFill>
+                  <a:schemeClr val="lt1"/>
+                </a:solidFill>
+              </a:defRPr>
             </a:lvl3pPr>
-            <a:lvl4pPr lvl="3" algn="ctr">
+            <a:lvl4pPr lvl="3">
               <a:lnSpc>
                 <a:spcPct val="100000"/>
               </a:lnSpc>
@@ -1001,11 +2257,18 @@
               <a:spcAft>
                 <a:spcPts val="0"/>
               </a:spcAft>
-              <a:buSzPts val="2800"/>
-              <a:buNone/>
-              <a:defRPr sz="2800"/>
+              <a:buClr>
+                <a:schemeClr val="lt1"/>
+              </a:buClr>
+              <a:buSzPts val="2100"/>
+              <a:buNone/>
+              <a:defRPr sz="2100">
+                <a:solidFill>
+                  <a:schemeClr val="lt1"/>
+                </a:solidFill>
+              </a:defRPr>
             </a:lvl4pPr>
-            <a:lvl5pPr lvl="4" algn="ctr">
+            <a:lvl5pPr lvl="4">
               <a:lnSpc>
                 <a:spcPct val="100000"/>
               </a:lnSpc>
@@ -1015,11 +2278,18 @@
               <a:spcAft>
                 <a:spcPts val="0"/>
               </a:spcAft>
-              <a:buSzPts val="2800"/>
-              <a:buNone/>
-              <a:defRPr sz="2800"/>
+              <a:buClr>
+                <a:schemeClr val="lt1"/>
+              </a:buClr>
+              <a:buSzPts val="2100"/>
+              <a:buNone/>
+              <a:defRPr sz="2100">
+                <a:solidFill>
+                  <a:schemeClr val="lt1"/>
+                </a:solidFill>
+              </a:defRPr>
             </a:lvl5pPr>
-            <a:lvl6pPr lvl="5" algn="ctr">
+            <a:lvl6pPr lvl="5">
               <a:lnSpc>
                 <a:spcPct val="100000"/>
               </a:lnSpc>
@@ -1029,11 +2299,18 @@
               <a:spcAft>
                 <a:spcPts val="0"/>
               </a:spcAft>
-              <a:buSzPts val="2800"/>
-              <a:buNone/>
-              <a:defRPr sz="2800"/>
+              <a:buClr>
+                <a:schemeClr val="lt1"/>
+              </a:buClr>
+              <a:buSzPts val="2100"/>
+              <a:buNone/>
+              <a:defRPr sz="2100">
+                <a:solidFill>
+                  <a:schemeClr val="lt1"/>
+                </a:solidFill>
+              </a:defRPr>
             </a:lvl6pPr>
-            <a:lvl7pPr lvl="6" algn="ctr">
+            <a:lvl7pPr lvl="6">
               <a:lnSpc>
                 <a:spcPct val="100000"/>
               </a:lnSpc>
@@ -1043,11 +2320,18 @@
               <a:spcAft>
                 <a:spcPts val="0"/>
               </a:spcAft>
-              <a:buSzPts val="2800"/>
-              <a:buNone/>
-              <a:defRPr sz="2800"/>
+              <a:buClr>
+                <a:schemeClr val="lt1"/>
+              </a:buClr>
+              <a:buSzPts val="2100"/>
+              <a:buNone/>
+              <a:defRPr sz="2100">
+                <a:solidFill>
+                  <a:schemeClr val="lt1"/>
+                </a:solidFill>
+              </a:defRPr>
             </a:lvl7pPr>
-            <a:lvl8pPr lvl="7" algn="ctr">
+            <a:lvl8pPr lvl="7">
               <a:lnSpc>
                 <a:spcPct val="100000"/>
               </a:lnSpc>
@@ -1057,11 +2341,18 @@
               <a:spcAft>
                 <a:spcPts val="0"/>
               </a:spcAft>
-              <a:buSzPts val="2800"/>
-              <a:buNone/>
-              <a:defRPr sz="2800"/>
+              <a:buClr>
+                <a:schemeClr val="lt1"/>
+              </a:buClr>
+              <a:buSzPts val="2100"/>
+              <a:buNone/>
+              <a:defRPr sz="2100">
+                <a:solidFill>
+                  <a:schemeClr val="lt1"/>
+                </a:solidFill>
+              </a:defRPr>
             </a:lvl8pPr>
-            <a:lvl9pPr lvl="8" algn="ctr">
+            <a:lvl9pPr lvl="8">
               <a:lnSpc>
                 <a:spcPct val="100000"/>
               </a:lnSpc>
@@ -1071,9 +2362,16 @@
               <a:spcAft>
                 <a:spcPts val="0"/>
               </a:spcAft>
-              <a:buSzPts val="2800"/>
-              <a:buNone/>
-              <a:defRPr sz="2800"/>
+              <a:buClr>
+                <a:schemeClr val="lt1"/>
+              </a:buClr>
+              <a:buSzPts val="2100"/>
+              <a:buNone/>
+              <a:defRPr sz="2100">
+                <a:solidFill>
+                  <a:schemeClr val="lt1"/>
+                </a:solidFill>
+              </a:defRPr>
             </a:lvl9pPr>
           </a:lstStyle>
           <a:p/>
@@ -1081,7 +2379,7 @@
       </p:sp>
       <p:sp>
         <p:nvSpPr>
-          <p:cNvPr id="12" name="Google Shape;12;p2"/>
+          <p:cNvPr id="18" name="Google Shape;18;p2"/>
           <p:cNvSpPr txBox="1"/>
           <p:nvPr>
             <p:ph idx="12" type="sldNum"/>
@@ -1089,7 +2387,7 @@
         </p:nvSpPr>
         <p:spPr>
           <a:xfrm>
-            <a:off x="8472458" y="4663217"/>
+            <a:off x="8460431" y="4651190"/>
             <a:ext cx="548700" cy="393600"/>
           </a:xfrm>
           <a:prstGeom prst="rect">
@@ -1167,9 +2465,16 @@
 <file path=ppt/slideLayouts/slideLayout10.xml><?xml version="1.0" encoding="utf-8"?>
 <p:sldLayout xmlns:a="http://schemas.openxmlformats.org/drawingml/2006/main" xmlns:r="http://schemas.openxmlformats.org/officeDocument/2006/relationships" xmlns:mc="http://schemas.openxmlformats.org/markup-compatibility/2006" xmlns:mv="urn:schemas-microsoft-com:mac:vml" xmlns:p="http://schemas.openxmlformats.org/presentationml/2006/main" xmlns:c="http://schemas.openxmlformats.org/drawingml/2006/chart" xmlns:dgm="http://schemas.openxmlformats.org/drawingml/2006/diagram" xmlns:o="urn:schemas-microsoft-com:office:office" xmlns:v="urn:schemas-microsoft-com:vml" xmlns:pvml="urn:schemas-microsoft-com:office:powerpoint" xmlns:com="http://schemas.openxmlformats.org/drawingml/2006/compatibility" xmlns:p14="http://schemas.microsoft.com/office/powerpoint/2010/main" xmlns:p15="http://schemas.microsoft.com/office/powerpoint/2012/main" xmlns:ahyp="http://schemas.microsoft.com/office/drawing/2018/hyperlinkcolor" matchingName="Big number">
   <p:cSld name="BIG_NUMBER">
+    <p:bg>
+      <p:bgPr>
+        <a:solidFill>
+          <a:schemeClr val="dk1"/>
+        </a:solidFill>
+      </p:bgPr>
+    </p:bg>
     <p:spTree>
       <p:nvGrpSpPr>
-        <p:cNvPr id="44" name="Shape 44"/>
+        <p:cNvPr id="69" name="Shape 69"/>
         <p:cNvGrpSpPr/>
         <p:nvPr/>
       </p:nvGrpSpPr>
@@ -1181,9 +2486,239 @@
           <a:chExt cx="0" cy="0"/>
         </a:xfrm>
       </p:grpSpPr>
+      <p:grpSp>
+        <p:nvGrpSpPr>
+          <p:cNvPr id="70" name="Google Shape;70;p11"/>
+          <p:cNvGrpSpPr/>
+          <p:nvPr/>
+        </p:nvGrpSpPr>
+        <p:grpSpPr>
+          <a:xfrm>
+            <a:off x="6098378" y="5"/>
+            <a:ext cx="3045625" cy="2030570"/>
+            <a:chOff x="6098378" y="5"/>
+            <a:chExt cx="3045625" cy="2030570"/>
+          </a:xfrm>
+        </p:grpSpPr>
+        <p:sp>
+          <p:nvSpPr>
+            <p:cNvPr id="71" name="Google Shape;71;p11"/>
+            <p:cNvSpPr/>
+            <p:nvPr/>
+          </p:nvSpPr>
+          <p:spPr>
+            <a:xfrm>
+              <a:off x="8128803" y="16"/>
+              <a:ext cx="1015200" cy="1015200"/>
+            </a:xfrm>
+            <a:prstGeom prst="rect">
+              <a:avLst/>
+            </a:prstGeom>
+            <a:solidFill>
+              <a:schemeClr val="accent1"/>
+            </a:solidFill>
+            <a:ln>
+              <a:noFill/>
+            </a:ln>
+          </p:spPr>
+          <p:txBody>
+            <a:bodyPr anchorCtr="0" anchor="ctr" bIns="91425" lIns="91425" spcFirstLastPara="1" rIns="91425" wrap="square" tIns="91425">
+              <a:noAutofit/>
+            </a:bodyPr>
+            <a:lstStyle/>
+            <a:p>
+              <a:pPr indent="0" lvl="0" marL="0" rtl="0" algn="l">
+                <a:spcBef>
+                  <a:spcPts val="0"/>
+                </a:spcBef>
+                <a:spcAft>
+                  <a:spcPts val="0"/>
+                </a:spcAft>
+                <a:buNone/>
+              </a:pPr>
+              <a:r>
+                <a:t/>
+              </a:r>
+              <a:endParaRPr/>
+            </a:p>
+          </p:txBody>
+        </p:sp>
+        <p:sp>
+          <p:nvSpPr>
+            <p:cNvPr id="72" name="Google Shape;72;p11"/>
+            <p:cNvSpPr/>
+            <p:nvPr/>
+          </p:nvSpPr>
+          <p:spPr>
+            <a:xfrm flipH="1">
+              <a:off x="7113463" y="5"/>
+              <a:ext cx="1015200" cy="1015200"/>
+            </a:xfrm>
+            <a:prstGeom prst="rtTriangle">
+              <a:avLst/>
+            </a:prstGeom>
+            <a:solidFill>
+              <a:schemeClr val="accent2"/>
+            </a:solidFill>
+            <a:ln>
+              <a:noFill/>
+            </a:ln>
+          </p:spPr>
+          <p:txBody>
+            <a:bodyPr anchorCtr="0" anchor="ctr" bIns="91425" lIns="91425" spcFirstLastPara="1" rIns="91425" wrap="square" tIns="91425">
+              <a:noAutofit/>
+            </a:bodyPr>
+            <a:lstStyle/>
+            <a:p>
+              <a:pPr indent="0" lvl="0" marL="0" rtl="0" algn="l">
+                <a:spcBef>
+                  <a:spcPts val="0"/>
+                </a:spcBef>
+                <a:spcAft>
+                  <a:spcPts val="0"/>
+                </a:spcAft>
+                <a:buNone/>
+              </a:pPr>
+              <a:r>
+                <a:t/>
+              </a:r>
+              <a:endParaRPr/>
+            </a:p>
+          </p:txBody>
+        </p:sp>
+        <p:sp>
+          <p:nvSpPr>
+            <p:cNvPr id="73" name="Google Shape;73;p11"/>
+            <p:cNvSpPr/>
+            <p:nvPr/>
+          </p:nvSpPr>
+          <p:spPr>
+            <a:xfrm flipH="1" rot="10800000">
+              <a:off x="7113588" y="107"/>
+              <a:ext cx="1015200" cy="1015200"/>
+            </a:xfrm>
+            <a:prstGeom prst="rtTriangle">
+              <a:avLst/>
+            </a:prstGeom>
+            <a:solidFill>
+              <a:schemeClr val="accent6"/>
+            </a:solidFill>
+            <a:ln>
+              <a:noFill/>
+            </a:ln>
+          </p:spPr>
+          <p:txBody>
+            <a:bodyPr anchorCtr="0" anchor="ctr" bIns="91425" lIns="91425" spcFirstLastPara="1" rIns="91425" wrap="square" tIns="91425">
+              <a:noAutofit/>
+            </a:bodyPr>
+            <a:lstStyle/>
+            <a:p>
+              <a:pPr indent="0" lvl="0" marL="0" rtl="0" algn="l">
+                <a:spcBef>
+                  <a:spcPts val="0"/>
+                </a:spcBef>
+                <a:spcAft>
+                  <a:spcPts val="0"/>
+                </a:spcAft>
+                <a:buNone/>
+              </a:pPr>
+              <a:r>
+                <a:t/>
+              </a:r>
+              <a:endParaRPr/>
+            </a:p>
+          </p:txBody>
+        </p:sp>
+        <p:sp>
+          <p:nvSpPr>
+            <p:cNvPr id="74" name="Google Shape;74;p11"/>
+            <p:cNvSpPr/>
+            <p:nvPr/>
+          </p:nvSpPr>
+          <p:spPr>
+            <a:xfrm rot="10800000">
+              <a:off x="6098378" y="97"/>
+              <a:ext cx="1015200" cy="1015200"/>
+            </a:xfrm>
+            <a:prstGeom prst="rtTriangle">
+              <a:avLst/>
+            </a:prstGeom>
+            <a:solidFill>
+              <a:schemeClr val="accent1"/>
+            </a:solidFill>
+            <a:ln>
+              <a:noFill/>
+            </a:ln>
+          </p:spPr>
+          <p:txBody>
+            <a:bodyPr anchorCtr="0" anchor="ctr" bIns="91425" lIns="91425" spcFirstLastPara="1" rIns="91425" wrap="square" tIns="91425">
+              <a:noAutofit/>
+            </a:bodyPr>
+            <a:lstStyle/>
+            <a:p>
+              <a:pPr indent="0" lvl="0" marL="0" rtl="0" algn="l">
+                <a:spcBef>
+                  <a:spcPts val="0"/>
+                </a:spcBef>
+                <a:spcAft>
+                  <a:spcPts val="0"/>
+                </a:spcAft>
+                <a:buNone/>
+              </a:pPr>
+              <a:r>
+                <a:t/>
+              </a:r>
+              <a:endParaRPr/>
+            </a:p>
+          </p:txBody>
+        </p:sp>
+        <p:sp>
+          <p:nvSpPr>
+            <p:cNvPr id="75" name="Google Shape;75;p11"/>
+            <p:cNvSpPr/>
+            <p:nvPr/>
+          </p:nvSpPr>
+          <p:spPr>
+            <a:xfrm rot="10800000">
+              <a:off x="8128789" y="1015375"/>
+              <a:ext cx="1015200" cy="1015200"/>
+            </a:xfrm>
+            <a:prstGeom prst="rtTriangle">
+              <a:avLst/>
+            </a:prstGeom>
+            <a:solidFill>
+              <a:schemeClr val="accent6"/>
+            </a:solidFill>
+            <a:ln>
+              <a:noFill/>
+            </a:ln>
+          </p:spPr>
+          <p:txBody>
+            <a:bodyPr anchorCtr="0" anchor="ctr" bIns="91425" lIns="91425" spcFirstLastPara="1" rIns="91425" wrap="square" tIns="91425">
+              <a:noAutofit/>
+            </a:bodyPr>
+            <a:lstStyle/>
+            <a:p>
+              <a:pPr indent="0" lvl="0" marL="0" rtl="0" algn="l">
+                <a:spcBef>
+                  <a:spcPts val="0"/>
+                </a:spcBef>
+                <a:spcAft>
+                  <a:spcPts val="0"/>
+                </a:spcAft>
+                <a:buNone/>
+              </a:pPr>
+              <a:r>
+                <a:t/>
+              </a:r>
+              <a:endParaRPr/>
+            </a:p>
+          </p:txBody>
+        </p:sp>
+      </p:grpSp>
       <p:sp>
         <p:nvSpPr>
-          <p:cNvPr id="45" name="Google Shape;45;p11"/>
+          <p:cNvPr id="76" name="Google Shape;76;p11"/>
           <p:cNvSpPr txBox="1"/>
           <p:nvPr>
             <p:ph hasCustomPrompt="1" type="title"/>
@@ -1191,8 +2726,8 @@
         </p:nvSpPr>
         <p:spPr>
           <a:xfrm>
-            <a:off x="311700" y="1106125"/>
-            <a:ext cx="8520600" cy="1963500"/>
+            <a:off x="311700" y="1256050"/>
+            <a:ext cx="8520600" cy="2030700"/>
           </a:xfrm>
           <a:prstGeom prst="rect">
             <a:avLst/>
@@ -1210,9 +2745,16 @@
               <a:spcAft>
                 <a:spcPts val="0"/>
               </a:spcAft>
+              <a:buClr>
+                <a:schemeClr val="lt1"/>
+              </a:buClr>
               <a:buSzPts val="12000"/>
               <a:buNone/>
-              <a:defRPr sz="12000"/>
+              <a:defRPr sz="12000">
+                <a:solidFill>
+                  <a:schemeClr val="lt1"/>
+                </a:solidFill>
+              </a:defRPr>
             </a:lvl1pPr>
             <a:lvl2pPr lvl="1" algn="ctr">
               <a:spcBef>
@@ -1221,9 +2763,16 @@
               <a:spcAft>
                 <a:spcPts val="0"/>
               </a:spcAft>
+              <a:buClr>
+                <a:schemeClr val="lt1"/>
+              </a:buClr>
               <a:buSzPts val="12000"/>
               <a:buNone/>
-              <a:defRPr sz="12000"/>
+              <a:defRPr sz="12000">
+                <a:solidFill>
+                  <a:schemeClr val="lt1"/>
+                </a:solidFill>
+              </a:defRPr>
             </a:lvl2pPr>
             <a:lvl3pPr lvl="2" algn="ctr">
               <a:spcBef>
@@ -1232,9 +2781,16 @@
               <a:spcAft>
                 <a:spcPts val="0"/>
               </a:spcAft>
+              <a:buClr>
+                <a:schemeClr val="lt1"/>
+              </a:buClr>
               <a:buSzPts val="12000"/>
               <a:buNone/>
-              <a:defRPr sz="12000"/>
+              <a:defRPr sz="12000">
+                <a:solidFill>
+                  <a:schemeClr val="lt1"/>
+                </a:solidFill>
+              </a:defRPr>
             </a:lvl3pPr>
             <a:lvl4pPr lvl="3" algn="ctr">
               <a:spcBef>
@@ -1243,9 +2799,16 @@
               <a:spcAft>
                 <a:spcPts val="0"/>
               </a:spcAft>
+              <a:buClr>
+                <a:schemeClr val="lt1"/>
+              </a:buClr>
               <a:buSzPts val="12000"/>
               <a:buNone/>
-              <a:defRPr sz="12000"/>
+              <a:defRPr sz="12000">
+                <a:solidFill>
+                  <a:schemeClr val="lt1"/>
+                </a:solidFill>
+              </a:defRPr>
             </a:lvl4pPr>
             <a:lvl5pPr lvl="4" algn="ctr">
               <a:spcBef>
@@ -1254,9 +2817,16 @@
               <a:spcAft>
                 <a:spcPts val="0"/>
               </a:spcAft>
+              <a:buClr>
+                <a:schemeClr val="lt1"/>
+              </a:buClr>
               <a:buSzPts val="12000"/>
               <a:buNone/>
-              <a:defRPr sz="12000"/>
+              <a:defRPr sz="12000">
+                <a:solidFill>
+                  <a:schemeClr val="lt1"/>
+                </a:solidFill>
+              </a:defRPr>
             </a:lvl5pPr>
             <a:lvl6pPr lvl="5" algn="ctr">
               <a:spcBef>
@@ -1265,9 +2835,16 @@
               <a:spcAft>
                 <a:spcPts val="0"/>
               </a:spcAft>
+              <a:buClr>
+                <a:schemeClr val="lt1"/>
+              </a:buClr>
               <a:buSzPts val="12000"/>
               <a:buNone/>
-              <a:defRPr sz="12000"/>
+              <a:defRPr sz="12000">
+                <a:solidFill>
+                  <a:schemeClr val="lt1"/>
+                </a:solidFill>
+              </a:defRPr>
             </a:lvl6pPr>
             <a:lvl7pPr lvl="6" algn="ctr">
               <a:spcBef>
@@ -1276,9 +2853,16 @@
               <a:spcAft>
                 <a:spcPts val="0"/>
               </a:spcAft>
+              <a:buClr>
+                <a:schemeClr val="lt1"/>
+              </a:buClr>
               <a:buSzPts val="12000"/>
               <a:buNone/>
-              <a:defRPr sz="12000"/>
+              <a:defRPr sz="12000">
+                <a:solidFill>
+                  <a:schemeClr val="lt1"/>
+                </a:solidFill>
+              </a:defRPr>
             </a:lvl7pPr>
             <a:lvl8pPr lvl="7" algn="ctr">
               <a:spcBef>
@@ -1287,9 +2871,16 @@
               <a:spcAft>
                 <a:spcPts val="0"/>
               </a:spcAft>
+              <a:buClr>
+                <a:schemeClr val="lt1"/>
+              </a:buClr>
               <a:buSzPts val="12000"/>
               <a:buNone/>
-              <a:defRPr sz="12000"/>
+              <a:defRPr sz="12000">
+                <a:solidFill>
+                  <a:schemeClr val="lt1"/>
+                </a:solidFill>
+              </a:defRPr>
             </a:lvl8pPr>
             <a:lvl9pPr lvl="8" algn="ctr">
               <a:spcBef>
@@ -1298,9 +2889,16 @@
               <a:spcAft>
                 <a:spcPts val="0"/>
               </a:spcAft>
+              <a:buClr>
+                <a:schemeClr val="lt1"/>
+              </a:buClr>
               <a:buSzPts val="12000"/>
               <a:buNone/>
-              <a:defRPr sz="12000"/>
+              <a:defRPr sz="12000">
+                <a:solidFill>
+                  <a:schemeClr val="lt1"/>
+                </a:solidFill>
+              </a:defRPr>
             </a:lvl9pPr>
           </a:lstStyle>
           <a:p>
@@ -1312,7 +2910,7 @@
       </p:sp>
       <p:sp>
         <p:nvSpPr>
-          <p:cNvPr id="46" name="Google Shape;46;p11"/>
+          <p:cNvPr id="77" name="Google Shape;77;p11"/>
           <p:cNvSpPr txBox="1"/>
           <p:nvPr>
             <p:ph idx="1" type="body"/>
@@ -1320,8 +2918,8 @@
         </p:nvSpPr>
         <p:spPr>
           <a:xfrm>
-            <a:off x="311700" y="3152225"/>
-            <a:ext cx="8520600" cy="1300800"/>
+            <a:off x="311700" y="3369225"/>
+            <a:ext cx="8520600" cy="1281900"/>
           </a:xfrm>
           <a:prstGeom prst="rect">
             <a:avLst/>
@@ -1339,9 +2937,16 @@
               <a:spcAft>
                 <a:spcPts val="0"/>
               </a:spcAft>
+              <a:buClr>
+                <a:schemeClr val="lt1"/>
+              </a:buClr>
               <a:buSzPts val="1800"/>
               <a:buChar char="●"/>
-              <a:defRPr/>
+              <a:defRPr>
+                <a:solidFill>
+                  <a:schemeClr val="lt1"/>
+                </a:solidFill>
+              </a:defRPr>
             </a:lvl1pPr>
             <a:lvl2pPr indent="-317500" lvl="1" marL="914400" algn="ctr">
               <a:spcBef>
@@ -1350,9 +2955,16 @@
               <a:spcAft>
                 <a:spcPts val="0"/>
               </a:spcAft>
+              <a:buClr>
+                <a:schemeClr val="lt1"/>
+              </a:buClr>
               <a:buSzPts val="1400"/>
               <a:buChar char="○"/>
-              <a:defRPr/>
+              <a:defRPr>
+                <a:solidFill>
+                  <a:schemeClr val="lt1"/>
+                </a:solidFill>
+              </a:defRPr>
             </a:lvl2pPr>
             <a:lvl3pPr indent="-317500" lvl="2" marL="1371600" algn="ctr">
               <a:spcBef>
@@ -1361,9 +2973,16 @@
               <a:spcAft>
                 <a:spcPts val="0"/>
               </a:spcAft>
+              <a:buClr>
+                <a:schemeClr val="lt1"/>
+              </a:buClr>
               <a:buSzPts val="1400"/>
               <a:buChar char="■"/>
-              <a:defRPr/>
+              <a:defRPr>
+                <a:solidFill>
+                  <a:schemeClr val="lt1"/>
+                </a:solidFill>
+              </a:defRPr>
             </a:lvl3pPr>
             <a:lvl4pPr indent="-317500" lvl="3" marL="1828800" algn="ctr">
               <a:spcBef>
@@ -1372,9 +2991,16 @@
               <a:spcAft>
                 <a:spcPts val="0"/>
               </a:spcAft>
+              <a:buClr>
+                <a:schemeClr val="lt1"/>
+              </a:buClr>
               <a:buSzPts val="1400"/>
               <a:buChar char="●"/>
-              <a:defRPr/>
+              <a:defRPr>
+                <a:solidFill>
+                  <a:schemeClr val="lt1"/>
+                </a:solidFill>
+              </a:defRPr>
             </a:lvl4pPr>
             <a:lvl5pPr indent="-317500" lvl="4" marL="2286000" algn="ctr">
               <a:spcBef>
@@ -1383,9 +3009,16 @@
               <a:spcAft>
                 <a:spcPts val="0"/>
               </a:spcAft>
+              <a:buClr>
+                <a:schemeClr val="lt1"/>
+              </a:buClr>
               <a:buSzPts val="1400"/>
               <a:buChar char="○"/>
-              <a:defRPr/>
+              <a:defRPr>
+                <a:solidFill>
+                  <a:schemeClr val="lt1"/>
+                </a:solidFill>
+              </a:defRPr>
             </a:lvl5pPr>
             <a:lvl6pPr indent="-317500" lvl="5" marL="2743200" algn="ctr">
               <a:spcBef>
@@ -1394,9 +3027,16 @@
               <a:spcAft>
                 <a:spcPts val="0"/>
               </a:spcAft>
+              <a:buClr>
+                <a:schemeClr val="lt1"/>
+              </a:buClr>
               <a:buSzPts val="1400"/>
               <a:buChar char="■"/>
-              <a:defRPr/>
+              <a:defRPr>
+                <a:solidFill>
+                  <a:schemeClr val="lt1"/>
+                </a:solidFill>
+              </a:defRPr>
             </a:lvl6pPr>
             <a:lvl7pPr indent="-317500" lvl="6" marL="3200400" algn="ctr">
               <a:spcBef>
@@ -1405,9 +3045,16 @@
               <a:spcAft>
                 <a:spcPts val="0"/>
               </a:spcAft>
+              <a:buClr>
+                <a:schemeClr val="lt1"/>
+              </a:buClr>
               <a:buSzPts val="1400"/>
               <a:buChar char="●"/>
-              <a:defRPr/>
+              <a:defRPr>
+                <a:solidFill>
+                  <a:schemeClr val="lt1"/>
+                </a:solidFill>
+              </a:defRPr>
             </a:lvl7pPr>
             <a:lvl8pPr indent="-317500" lvl="7" marL="3657600" algn="ctr">
               <a:spcBef>
@@ -1416,9 +3063,16 @@
               <a:spcAft>
                 <a:spcPts val="0"/>
               </a:spcAft>
+              <a:buClr>
+                <a:schemeClr val="lt1"/>
+              </a:buClr>
               <a:buSzPts val="1400"/>
               <a:buChar char="○"/>
-              <a:defRPr/>
+              <a:defRPr>
+                <a:solidFill>
+                  <a:schemeClr val="lt1"/>
+                </a:solidFill>
+              </a:defRPr>
             </a:lvl8pPr>
             <a:lvl9pPr indent="-317500" lvl="8" marL="4114800" algn="ctr">
               <a:spcBef>
@@ -1427,9 +3081,16 @@
               <a:spcAft>
                 <a:spcPts val="0"/>
               </a:spcAft>
+              <a:buClr>
+                <a:schemeClr val="lt1"/>
+              </a:buClr>
               <a:buSzPts val="1400"/>
               <a:buChar char="■"/>
-              <a:defRPr/>
+              <a:defRPr>
+                <a:solidFill>
+                  <a:schemeClr val="lt1"/>
+                </a:solidFill>
+              </a:defRPr>
             </a:lvl9pPr>
           </a:lstStyle>
           <a:p/>
@@ -1437,7 +3098,7 @@
       </p:sp>
       <p:sp>
         <p:nvSpPr>
-          <p:cNvPr id="47" name="Google Shape;47;p11"/>
+          <p:cNvPr id="78" name="Google Shape;78;p11"/>
           <p:cNvSpPr txBox="1"/>
           <p:nvPr>
             <p:ph idx="12" type="sldNum"/>
@@ -1445,7 +3106,7 @@
         </p:nvSpPr>
         <p:spPr>
           <a:xfrm>
-            <a:off x="8472458" y="4663217"/>
+            <a:off x="8460431" y="4651190"/>
             <a:ext cx="548700" cy="393600"/>
           </a:xfrm>
           <a:prstGeom prst="rect">
@@ -1525,7 +3186,7 @@
   <p:cSld name="BLANK">
     <p:spTree>
       <p:nvGrpSpPr>
-        <p:cNvPr id="48" name="Shape 48"/>
+        <p:cNvPr id="79" name="Shape 79"/>
         <p:cNvGrpSpPr/>
         <p:nvPr/>
       </p:nvGrpSpPr>
@@ -1539,7 +3200,7 @@
       </p:grpSpPr>
       <p:sp>
         <p:nvSpPr>
-          <p:cNvPr id="49" name="Google Shape;49;p12"/>
+          <p:cNvPr id="80" name="Google Shape;80;p12"/>
           <p:cNvSpPr txBox="1"/>
           <p:nvPr>
             <p:ph idx="12" type="sldNum"/>
@@ -1547,7 +3208,7 @@
         </p:nvSpPr>
         <p:spPr>
           <a:xfrm>
-            <a:off x="8472458" y="4663217"/>
+            <a:off x="8460431" y="4651190"/>
             <a:ext cx="548700" cy="393600"/>
           </a:xfrm>
           <a:prstGeom prst="rect">
@@ -1561,39 +3222,75 @@
           <a:lstStyle>
             <a:lvl1pPr lvl="0">
               <a:buNone/>
-              <a:defRPr/>
+              <a:defRPr>
+                <a:solidFill>
+                  <a:schemeClr val="dk2"/>
+                </a:solidFill>
+              </a:defRPr>
             </a:lvl1pPr>
             <a:lvl2pPr lvl="1">
               <a:buNone/>
-              <a:defRPr/>
+              <a:defRPr>
+                <a:solidFill>
+                  <a:schemeClr val="dk2"/>
+                </a:solidFill>
+              </a:defRPr>
             </a:lvl2pPr>
             <a:lvl3pPr lvl="2">
               <a:buNone/>
-              <a:defRPr/>
+              <a:defRPr>
+                <a:solidFill>
+                  <a:schemeClr val="dk2"/>
+                </a:solidFill>
+              </a:defRPr>
             </a:lvl3pPr>
             <a:lvl4pPr lvl="3">
               <a:buNone/>
-              <a:defRPr/>
+              <a:defRPr>
+                <a:solidFill>
+                  <a:schemeClr val="dk2"/>
+                </a:solidFill>
+              </a:defRPr>
             </a:lvl4pPr>
             <a:lvl5pPr lvl="4">
               <a:buNone/>
-              <a:defRPr/>
+              <a:defRPr>
+                <a:solidFill>
+                  <a:schemeClr val="dk2"/>
+                </a:solidFill>
+              </a:defRPr>
             </a:lvl5pPr>
             <a:lvl6pPr lvl="5">
               <a:buNone/>
-              <a:defRPr/>
+              <a:defRPr>
+                <a:solidFill>
+                  <a:schemeClr val="dk2"/>
+                </a:solidFill>
+              </a:defRPr>
             </a:lvl6pPr>
             <a:lvl7pPr lvl="6">
               <a:buNone/>
-              <a:defRPr/>
+              <a:defRPr>
+                <a:solidFill>
+                  <a:schemeClr val="dk2"/>
+                </a:solidFill>
+              </a:defRPr>
             </a:lvl7pPr>
             <a:lvl8pPr lvl="7">
               <a:buNone/>
-              <a:defRPr/>
+              <a:defRPr>
+                <a:solidFill>
+                  <a:schemeClr val="dk2"/>
+                </a:solidFill>
+              </a:defRPr>
             </a:lvl8pPr>
             <a:lvl9pPr lvl="8">
               <a:buNone/>
-              <a:defRPr/>
+              <a:defRPr>
+                <a:solidFill>
+                  <a:schemeClr val="dk2"/>
+                </a:solidFill>
+              </a:defRPr>
             </a:lvl9pPr>
           </a:lstStyle>
           <a:p>
@@ -1625,9 +3322,16 @@
 <file path=ppt/slideLayouts/slideLayout2.xml><?xml version="1.0" encoding="utf-8"?>
 <p:sldLayout xmlns:a="http://schemas.openxmlformats.org/drawingml/2006/main" xmlns:r="http://schemas.openxmlformats.org/officeDocument/2006/relationships" xmlns:mc="http://schemas.openxmlformats.org/markup-compatibility/2006" xmlns:mv="urn:schemas-microsoft-com:mac:vml" xmlns:p="http://schemas.openxmlformats.org/presentationml/2006/main" xmlns:c="http://schemas.openxmlformats.org/drawingml/2006/chart" xmlns:dgm="http://schemas.openxmlformats.org/drawingml/2006/diagram" xmlns:o="urn:schemas-microsoft-com:office:office" xmlns:v="urn:schemas-microsoft-com:vml" xmlns:pvml="urn:schemas-microsoft-com:office:powerpoint" xmlns:com="http://schemas.openxmlformats.org/drawingml/2006/compatibility" xmlns:p14="http://schemas.microsoft.com/office/powerpoint/2010/main" xmlns:p15="http://schemas.microsoft.com/office/powerpoint/2012/main" xmlns:ahyp="http://schemas.microsoft.com/office/drawing/2018/hyperlinkcolor" matchingName="Section header" type="secHead">
   <p:cSld name="SECTION_HEADER">
+    <p:bg>
+      <p:bgPr>
+        <a:solidFill>
+          <a:schemeClr val="dk1"/>
+        </a:solidFill>
+      </p:bgPr>
+    </p:bg>
     <p:spTree>
       <p:nvGrpSpPr>
-        <p:cNvPr id="13" name="Shape 13"/>
+        <p:cNvPr id="19" name="Shape 19"/>
         <p:cNvGrpSpPr/>
         <p:nvPr/>
       </p:nvGrpSpPr>
@@ -1639,9 +3343,239 @@
           <a:chExt cx="0" cy="0"/>
         </a:xfrm>
       </p:grpSpPr>
+      <p:grpSp>
+        <p:nvGrpSpPr>
+          <p:cNvPr id="20" name="Google Shape;20;p3"/>
+          <p:cNvGrpSpPr/>
+          <p:nvPr/>
+        </p:nvGrpSpPr>
+        <p:grpSpPr>
+          <a:xfrm>
+            <a:off x="6098378" y="5"/>
+            <a:ext cx="3045625" cy="2030570"/>
+            <a:chOff x="6098378" y="5"/>
+            <a:chExt cx="3045625" cy="2030570"/>
+          </a:xfrm>
+        </p:grpSpPr>
+        <p:sp>
+          <p:nvSpPr>
+            <p:cNvPr id="21" name="Google Shape;21;p3"/>
+            <p:cNvSpPr/>
+            <p:nvPr/>
+          </p:nvSpPr>
+          <p:spPr>
+            <a:xfrm>
+              <a:off x="8128803" y="16"/>
+              <a:ext cx="1015200" cy="1015200"/>
+            </a:xfrm>
+            <a:prstGeom prst="rect">
+              <a:avLst/>
+            </a:prstGeom>
+            <a:solidFill>
+              <a:schemeClr val="accent1"/>
+            </a:solidFill>
+            <a:ln>
+              <a:noFill/>
+            </a:ln>
+          </p:spPr>
+          <p:txBody>
+            <a:bodyPr anchorCtr="0" anchor="ctr" bIns="91425" lIns="91425" spcFirstLastPara="1" rIns="91425" wrap="square" tIns="91425">
+              <a:noAutofit/>
+            </a:bodyPr>
+            <a:lstStyle/>
+            <a:p>
+              <a:pPr indent="0" lvl="0" marL="0" rtl="0" algn="l">
+                <a:spcBef>
+                  <a:spcPts val="0"/>
+                </a:spcBef>
+                <a:spcAft>
+                  <a:spcPts val="0"/>
+                </a:spcAft>
+                <a:buNone/>
+              </a:pPr>
+              <a:r>
+                <a:t/>
+              </a:r>
+              <a:endParaRPr/>
+            </a:p>
+          </p:txBody>
+        </p:sp>
+        <p:sp>
+          <p:nvSpPr>
+            <p:cNvPr id="22" name="Google Shape;22;p3"/>
+            <p:cNvSpPr/>
+            <p:nvPr/>
+          </p:nvSpPr>
+          <p:spPr>
+            <a:xfrm flipH="1">
+              <a:off x="7113463" y="5"/>
+              <a:ext cx="1015200" cy="1015200"/>
+            </a:xfrm>
+            <a:prstGeom prst="rtTriangle">
+              <a:avLst/>
+            </a:prstGeom>
+            <a:solidFill>
+              <a:schemeClr val="accent2"/>
+            </a:solidFill>
+            <a:ln>
+              <a:noFill/>
+            </a:ln>
+          </p:spPr>
+          <p:txBody>
+            <a:bodyPr anchorCtr="0" anchor="ctr" bIns="91425" lIns="91425" spcFirstLastPara="1" rIns="91425" wrap="square" tIns="91425">
+              <a:noAutofit/>
+            </a:bodyPr>
+            <a:lstStyle/>
+            <a:p>
+              <a:pPr indent="0" lvl="0" marL="0" rtl="0" algn="l">
+                <a:spcBef>
+                  <a:spcPts val="0"/>
+                </a:spcBef>
+                <a:spcAft>
+                  <a:spcPts val="0"/>
+                </a:spcAft>
+                <a:buNone/>
+              </a:pPr>
+              <a:r>
+                <a:t/>
+              </a:r>
+              <a:endParaRPr/>
+            </a:p>
+          </p:txBody>
+        </p:sp>
+        <p:sp>
+          <p:nvSpPr>
+            <p:cNvPr id="23" name="Google Shape;23;p3"/>
+            <p:cNvSpPr/>
+            <p:nvPr/>
+          </p:nvSpPr>
+          <p:spPr>
+            <a:xfrm flipH="1" rot="10800000">
+              <a:off x="7113588" y="107"/>
+              <a:ext cx="1015200" cy="1015200"/>
+            </a:xfrm>
+            <a:prstGeom prst="rtTriangle">
+              <a:avLst/>
+            </a:prstGeom>
+            <a:solidFill>
+              <a:schemeClr val="accent6"/>
+            </a:solidFill>
+            <a:ln>
+              <a:noFill/>
+            </a:ln>
+          </p:spPr>
+          <p:txBody>
+            <a:bodyPr anchorCtr="0" anchor="ctr" bIns="91425" lIns="91425" spcFirstLastPara="1" rIns="91425" wrap="square" tIns="91425">
+              <a:noAutofit/>
+            </a:bodyPr>
+            <a:lstStyle/>
+            <a:p>
+              <a:pPr indent="0" lvl="0" marL="0" rtl="0" algn="l">
+                <a:spcBef>
+                  <a:spcPts val="0"/>
+                </a:spcBef>
+                <a:spcAft>
+                  <a:spcPts val="0"/>
+                </a:spcAft>
+                <a:buNone/>
+              </a:pPr>
+              <a:r>
+                <a:t/>
+              </a:r>
+              <a:endParaRPr/>
+            </a:p>
+          </p:txBody>
+        </p:sp>
+        <p:sp>
+          <p:nvSpPr>
+            <p:cNvPr id="24" name="Google Shape;24;p3"/>
+            <p:cNvSpPr/>
+            <p:nvPr/>
+          </p:nvSpPr>
+          <p:spPr>
+            <a:xfrm rot="10800000">
+              <a:off x="6098378" y="97"/>
+              <a:ext cx="1015200" cy="1015200"/>
+            </a:xfrm>
+            <a:prstGeom prst="rtTriangle">
+              <a:avLst/>
+            </a:prstGeom>
+            <a:solidFill>
+              <a:schemeClr val="accent1"/>
+            </a:solidFill>
+            <a:ln>
+              <a:noFill/>
+            </a:ln>
+          </p:spPr>
+          <p:txBody>
+            <a:bodyPr anchorCtr="0" anchor="ctr" bIns="91425" lIns="91425" spcFirstLastPara="1" rIns="91425" wrap="square" tIns="91425">
+              <a:noAutofit/>
+            </a:bodyPr>
+            <a:lstStyle/>
+            <a:p>
+              <a:pPr indent="0" lvl="0" marL="0" rtl="0" algn="l">
+                <a:spcBef>
+                  <a:spcPts val="0"/>
+                </a:spcBef>
+                <a:spcAft>
+                  <a:spcPts val="0"/>
+                </a:spcAft>
+                <a:buNone/>
+              </a:pPr>
+              <a:r>
+                <a:t/>
+              </a:r>
+              <a:endParaRPr/>
+            </a:p>
+          </p:txBody>
+        </p:sp>
+        <p:sp>
+          <p:nvSpPr>
+            <p:cNvPr id="25" name="Google Shape;25;p3"/>
+            <p:cNvSpPr/>
+            <p:nvPr/>
+          </p:nvSpPr>
+          <p:spPr>
+            <a:xfrm rot="10800000">
+              <a:off x="8128789" y="1015375"/>
+              <a:ext cx="1015200" cy="1015200"/>
+            </a:xfrm>
+            <a:prstGeom prst="rtTriangle">
+              <a:avLst/>
+            </a:prstGeom>
+            <a:solidFill>
+              <a:schemeClr val="accent6"/>
+            </a:solidFill>
+            <a:ln>
+              <a:noFill/>
+            </a:ln>
+          </p:spPr>
+          <p:txBody>
+            <a:bodyPr anchorCtr="0" anchor="ctr" bIns="91425" lIns="91425" spcFirstLastPara="1" rIns="91425" wrap="square" tIns="91425">
+              <a:noAutofit/>
+            </a:bodyPr>
+            <a:lstStyle/>
+            <a:p>
+              <a:pPr indent="0" lvl="0" marL="0" rtl="0" algn="l">
+                <a:spcBef>
+                  <a:spcPts val="0"/>
+                </a:spcBef>
+                <a:spcAft>
+                  <a:spcPts val="0"/>
+                </a:spcAft>
+                <a:buNone/>
+              </a:pPr>
+              <a:r>
+                <a:t/>
+              </a:r>
+              <a:endParaRPr/>
+            </a:p>
+          </p:txBody>
+        </p:sp>
+      </p:grpSp>
       <p:sp>
         <p:nvSpPr>
-          <p:cNvPr id="14" name="Google Shape;14;p3"/>
+          <p:cNvPr id="26" name="Google Shape;26;p3"/>
           <p:cNvSpPr txBox="1"/>
           <p:nvPr>
             <p:ph type="title"/>
@@ -1649,8 +3583,8 @@
         </p:nvSpPr>
         <p:spPr>
           <a:xfrm>
-            <a:off x="311700" y="2150850"/>
-            <a:ext cx="8520600" cy="841800"/>
+            <a:off x="598100" y="2152347"/>
+            <a:ext cx="8222100" cy="838800"/>
           </a:xfrm>
           <a:prstGeom prst="rect">
             <a:avLst/>
@@ -1661,104 +3595,167 @@
             <a:normAutofit/>
           </a:bodyPr>
           <a:lstStyle>
-            <a:lvl1pPr lvl="0" algn="ctr">
-              <a:spcBef>
-                <a:spcPts val="0"/>
-              </a:spcBef>
-              <a:spcAft>
-                <a:spcPts val="0"/>
-              </a:spcAft>
-              <a:buSzPts val="3600"/>
-              <a:buNone/>
-              <a:defRPr sz="3600"/>
+            <a:lvl1pPr lvl="0">
+              <a:spcBef>
+                <a:spcPts val="0"/>
+              </a:spcBef>
+              <a:spcAft>
+                <a:spcPts val="0"/>
+              </a:spcAft>
+              <a:buClr>
+                <a:schemeClr val="lt1"/>
+              </a:buClr>
+              <a:buSzPts val="4200"/>
+              <a:buNone/>
+              <a:defRPr sz="4200">
+                <a:solidFill>
+                  <a:schemeClr val="lt1"/>
+                </a:solidFill>
+              </a:defRPr>
             </a:lvl1pPr>
-            <a:lvl2pPr lvl="1" algn="ctr">
-              <a:spcBef>
-                <a:spcPts val="0"/>
-              </a:spcBef>
-              <a:spcAft>
-                <a:spcPts val="0"/>
-              </a:spcAft>
-              <a:buSzPts val="3600"/>
-              <a:buNone/>
-              <a:defRPr sz="3600"/>
+            <a:lvl2pPr lvl="1">
+              <a:spcBef>
+                <a:spcPts val="0"/>
+              </a:spcBef>
+              <a:spcAft>
+                <a:spcPts val="0"/>
+              </a:spcAft>
+              <a:buClr>
+                <a:schemeClr val="lt1"/>
+              </a:buClr>
+              <a:buSzPts val="4200"/>
+              <a:buNone/>
+              <a:defRPr sz="4200">
+                <a:solidFill>
+                  <a:schemeClr val="lt1"/>
+                </a:solidFill>
+              </a:defRPr>
             </a:lvl2pPr>
-            <a:lvl3pPr lvl="2" algn="ctr">
-              <a:spcBef>
-                <a:spcPts val="0"/>
-              </a:spcBef>
-              <a:spcAft>
-                <a:spcPts val="0"/>
-              </a:spcAft>
-              <a:buSzPts val="3600"/>
-              <a:buNone/>
-              <a:defRPr sz="3600"/>
+            <a:lvl3pPr lvl="2">
+              <a:spcBef>
+                <a:spcPts val="0"/>
+              </a:spcBef>
+              <a:spcAft>
+                <a:spcPts val="0"/>
+              </a:spcAft>
+              <a:buClr>
+                <a:schemeClr val="lt1"/>
+              </a:buClr>
+              <a:buSzPts val="4200"/>
+              <a:buNone/>
+              <a:defRPr sz="4200">
+                <a:solidFill>
+                  <a:schemeClr val="lt1"/>
+                </a:solidFill>
+              </a:defRPr>
             </a:lvl3pPr>
-            <a:lvl4pPr lvl="3" algn="ctr">
-              <a:spcBef>
-                <a:spcPts val="0"/>
-              </a:spcBef>
-              <a:spcAft>
-                <a:spcPts val="0"/>
-              </a:spcAft>
-              <a:buSzPts val="3600"/>
-              <a:buNone/>
-              <a:defRPr sz="3600"/>
+            <a:lvl4pPr lvl="3">
+              <a:spcBef>
+                <a:spcPts val="0"/>
+              </a:spcBef>
+              <a:spcAft>
+                <a:spcPts val="0"/>
+              </a:spcAft>
+              <a:buClr>
+                <a:schemeClr val="lt1"/>
+              </a:buClr>
+              <a:buSzPts val="4200"/>
+              <a:buNone/>
+              <a:defRPr sz="4200">
+                <a:solidFill>
+                  <a:schemeClr val="lt1"/>
+                </a:solidFill>
+              </a:defRPr>
             </a:lvl4pPr>
-            <a:lvl5pPr lvl="4" algn="ctr">
-              <a:spcBef>
-                <a:spcPts val="0"/>
-              </a:spcBef>
-              <a:spcAft>
-                <a:spcPts val="0"/>
-              </a:spcAft>
-              <a:buSzPts val="3600"/>
-              <a:buNone/>
-              <a:defRPr sz="3600"/>
+            <a:lvl5pPr lvl="4">
+              <a:spcBef>
+                <a:spcPts val="0"/>
+              </a:spcBef>
+              <a:spcAft>
+                <a:spcPts val="0"/>
+              </a:spcAft>
+              <a:buClr>
+                <a:schemeClr val="lt1"/>
+              </a:buClr>
+              <a:buSzPts val="4200"/>
+              <a:buNone/>
+              <a:defRPr sz="4200">
+                <a:solidFill>
+                  <a:schemeClr val="lt1"/>
+                </a:solidFill>
+              </a:defRPr>
             </a:lvl5pPr>
-            <a:lvl6pPr lvl="5" algn="ctr">
-              <a:spcBef>
-                <a:spcPts val="0"/>
-              </a:spcBef>
-              <a:spcAft>
-                <a:spcPts val="0"/>
-              </a:spcAft>
-              <a:buSzPts val="3600"/>
-              <a:buNone/>
-              <a:defRPr sz="3600"/>
+            <a:lvl6pPr lvl="5">
+              <a:spcBef>
+                <a:spcPts val="0"/>
+              </a:spcBef>
+              <a:spcAft>
+                <a:spcPts val="0"/>
+              </a:spcAft>
+              <a:buClr>
+                <a:schemeClr val="lt1"/>
+              </a:buClr>
+              <a:buSzPts val="4200"/>
+              <a:buNone/>
+              <a:defRPr sz="4200">
+                <a:solidFill>
+                  <a:schemeClr val="lt1"/>
+                </a:solidFill>
+              </a:defRPr>
             </a:lvl6pPr>
-            <a:lvl7pPr lvl="6" algn="ctr">
-              <a:spcBef>
-                <a:spcPts val="0"/>
-              </a:spcBef>
-              <a:spcAft>
-                <a:spcPts val="0"/>
-              </a:spcAft>
-              <a:buSzPts val="3600"/>
-              <a:buNone/>
-              <a:defRPr sz="3600"/>
+            <a:lvl7pPr lvl="6">
+              <a:spcBef>
+                <a:spcPts val="0"/>
+              </a:spcBef>
+              <a:spcAft>
+                <a:spcPts val="0"/>
+              </a:spcAft>
+              <a:buClr>
+                <a:schemeClr val="lt1"/>
+              </a:buClr>
+              <a:buSzPts val="4200"/>
+              <a:buNone/>
+              <a:defRPr sz="4200">
+                <a:solidFill>
+                  <a:schemeClr val="lt1"/>
+                </a:solidFill>
+              </a:defRPr>
             </a:lvl7pPr>
-            <a:lvl8pPr lvl="7" algn="ctr">
-              <a:spcBef>
-                <a:spcPts val="0"/>
-              </a:spcBef>
-              <a:spcAft>
-                <a:spcPts val="0"/>
-              </a:spcAft>
-              <a:buSzPts val="3600"/>
-              <a:buNone/>
-              <a:defRPr sz="3600"/>
+            <a:lvl8pPr lvl="7">
+              <a:spcBef>
+                <a:spcPts val="0"/>
+              </a:spcBef>
+              <a:spcAft>
+                <a:spcPts val="0"/>
+              </a:spcAft>
+              <a:buClr>
+                <a:schemeClr val="lt1"/>
+              </a:buClr>
+              <a:buSzPts val="4200"/>
+              <a:buNone/>
+              <a:defRPr sz="4200">
+                <a:solidFill>
+                  <a:schemeClr val="lt1"/>
+                </a:solidFill>
+              </a:defRPr>
             </a:lvl8pPr>
-            <a:lvl9pPr lvl="8" algn="ctr">
-              <a:spcBef>
-                <a:spcPts val="0"/>
-              </a:spcBef>
-              <a:spcAft>
-                <a:spcPts val="0"/>
-              </a:spcAft>
-              <a:buSzPts val="3600"/>
-              <a:buNone/>
-              <a:defRPr sz="3600"/>
+            <a:lvl9pPr lvl="8">
+              <a:spcBef>
+                <a:spcPts val="0"/>
+              </a:spcBef>
+              <a:spcAft>
+                <a:spcPts val="0"/>
+              </a:spcAft>
+              <a:buClr>
+                <a:schemeClr val="lt1"/>
+              </a:buClr>
+              <a:buSzPts val="4200"/>
+              <a:buNone/>
+              <a:defRPr sz="4200">
+                <a:solidFill>
+                  <a:schemeClr val="lt1"/>
+                </a:solidFill>
+              </a:defRPr>
             </a:lvl9pPr>
           </a:lstStyle>
           <a:p/>
@@ -1766,7 +3763,7 @@
       </p:sp>
       <p:sp>
         <p:nvSpPr>
-          <p:cNvPr id="15" name="Google Shape;15;p3"/>
+          <p:cNvPr id="27" name="Google Shape;27;p3"/>
           <p:cNvSpPr txBox="1"/>
           <p:nvPr>
             <p:ph idx="12" type="sldNum"/>
@@ -1774,7 +3771,7 @@
         </p:nvSpPr>
         <p:spPr>
           <a:xfrm>
-            <a:off x="8472458" y="4663217"/>
+            <a:off x="8460431" y="4651190"/>
             <a:ext cx="548700" cy="393600"/>
           </a:xfrm>
           <a:prstGeom prst="rect">
@@ -1854,7 +3851,7 @@
   <p:cSld name="TITLE_AND_BODY">
     <p:spTree>
       <p:nvGrpSpPr>
-        <p:cNvPr id="16" name="Shape 16"/>
+        <p:cNvPr id="28" name="Shape 28"/>
         <p:cNvGrpSpPr/>
         <p:nvPr/>
       </p:nvGrpSpPr>
@@ -1866,9 +3863,239 @@
           <a:chExt cx="0" cy="0"/>
         </a:xfrm>
       </p:grpSpPr>
+      <p:grpSp>
+        <p:nvGrpSpPr>
+          <p:cNvPr id="29" name="Google Shape;29;p4"/>
+          <p:cNvGrpSpPr/>
+          <p:nvPr/>
+        </p:nvGrpSpPr>
+        <p:grpSpPr>
+          <a:xfrm>
+            <a:off x="0" y="3903669"/>
+            <a:ext cx="9144000" cy="1239925"/>
+            <a:chOff x="0" y="3903669"/>
+            <a:chExt cx="9144000" cy="1239925"/>
+          </a:xfrm>
+        </p:grpSpPr>
+        <p:sp>
+          <p:nvSpPr>
+            <p:cNvPr id="30" name="Google Shape;30;p4"/>
+            <p:cNvSpPr/>
+            <p:nvPr/>
+          </p:nvSpPr>
+          <p:spPr>
+            <a:xfrm>
+              <a:off x="8154895" y="3903669"/>
+              <a:ext cx="989100" cy="987900"/>
+            </a:xfrm>
+            <a:prstGeom prst="rtTriangle">
+              <a:avLst/>
+            </a:prstGeom>
+            <a:solidFill>
+              <a:schemeClr val="accent5"/>
+            </a:solidFill>
+            <a:ln>
+              <a:noFill/>
+            </a:ln>
+          </p:spPr>
+          <p:txBody>
+            <a:bodyPr anchorCtr="0" anchor="ctr" bIns="91425" lIns="91425" spcFirstLastPara="1" rIns="91425" wrap="square" tIns="91425">
+              <a:noAutofit/>
+            </a:bodyPr>
+            <a:lstStyle/>
+            <a:p>
+              <a:pPr indent="0" lvl="0" marL="0" rtl="0" algn="l">
+                <a:spcBef>
+                  <a:spcPts val="0"/>
+                </a:spcBef>
+                <a:spcAft>
+                  <a:spcPts val="0"/>
+                </a:spcAft>
+                <a:buNone/>
+              </a:pPr>
+              <a:r>
+                <a:t/>
+              </a:r>
+              <a:endParaRPr/>
+            </a:p>
+          </p:txBody>
+        </p:sp>
+        <p:sp>
+          <p:nvSpPr>
+            <p:cNvPr id="31" name="Google Shape;31;p4"/>
+            <p:cNvSpPr/>
+            <p:nvPr/>
+          </p:nvSpPr>
+          <p:spPr>
+            <a:xfrm flipH="1">
+              <a:off x="6181163" y="3903669"/>
+              <a:ext cx="989100" cy="987900"/>
+            </a:xfrm>
+            <a:prstGeom prst="rtTriangle">
+              <a:avLst/>
+            </a:prstGeom>
+            <a:solidFill>
+              <a:schemeClr val="accent5"/>
+            </a:solidFill>
+            <a:ln>
+              <a:noFill/>
+            </a:ln>
+          </p:spPr>
+          <p:txBody>
+            <a:bodyPr anchorCtr="0" anchor="ctr" bIns="91425" lIns="91425" spcFirstLastPara="1" rIns="91425" wrap="square" tIns="91425">
+              <a:noAutofit/>
+            </a:bodyPr>
+            <a:lstStyle/>
+            <a:p>
+              <a:pPr indent="0" lvl="0" marL="0" rtl="0" algn="l">
+                <a:spcBef>
+                  <a:spcPts val="0"/>
+                </a:spcBef>
+                <a:spcAft>
+                  <a:spcPts val="0"/>
+                </a:spcAft>
+                <a:buNone/>
+              </a:pPr>
+              <a:r>
+                <a:t/>
+              </a:r>
+              <a:endParaRPr/>
+            </a:p>
+          </p:txBody>
+        </p:sp>
+        <p:sp>
+          <p:nvSpPr>
+            <p:cNvPr id="32" name="Google Shape;32;p4"/>
+            <p:cNvSpPr/>
+            <p:nvPr/>
+          </p:nvSpPr>
+          <p:spPr>
+            <a:xfrm>
+              <a:off x="7170274" y="3903669"/>
+              <a:ext cx="989100" cy="987900"/>
+            </a:xfrm>
+            <a:prstGeom prst="rect">
+              <a:avLst/>
+            </a:prstGeom>
+            <a:solidFill>
+              <a:schemeClr val="accent4"/>
+            </a:solidFill>
+            <a:ln>
+              <a:noFill/>
+            </a:ln>
+          </p:spPr>
+          <p:txBody>
+            <a:bodyPr anchorCtr="0" anchor="ctr" bIns="91425" lIns="91425" spcFirstLastPara="1" rIns="91425" wrap="square" tIns="91425">
+              <a:noAutofit/>
+            </a:bodyPr>
+            <a:lstStyle/>
+            <a:p>
+              <a:pPr indent="0" lvl="0" marL="0" rtl="0" algn="l">
+                <a:spcBef>
+                  <a:spcPts val="0"/>
+                </a:spcBef>
+                <a:spcAft>
+                  <a:spcPts val="0"/>
+                </a:spcAft>
+                <a:buNone/>
+              </a:pPr>
+              <a:r>
+                <a:t/>
+              </a:r>
+              <a:endParaRPr/>
+            </a:p>
+          </p:txBody>
+        </p:sp>
+        <p:sp>
+          <p:nvSpPr>
+            <p:cNvPr id="33" name="Google Shape;33;p4"/>
+            <p:cNvSpPr/>
+            <p:nvPr/>
+          </p:nvSpPr>
+          <p:spPr>
+            <a:xfrm rot="10800000">
+              <a:off x="8154757" y="3903682"/>
+              <a:ext cx="989100" cy="987900"/>
+            </a:xfrm>
+            <a:prstGeom prst="rtTriangle">
+              <a:avLst/>
+            </a:prstGeom>
+            <a:solidFill>
+              <a:schemeClr val="accent3"/>
+            </a:solidFill>
+            <a:ln>
+              <a:noFill/>
+            </a:ln>
+          </p:spPr>
+          <p:txBody>
+            <a:bodyPr anchorCtr="0" anchor="ctr" bIns="91425" lIns="91425" spcFirstLastPara="1" rIns="91425" wrap="square" tIns="91425">
+              <a:noAutofit/>
+            </a:bodyPr>
+            <a:lstStyle/>
+            <a:p>
+              <a:pPr indent="0" lvl="0" marL="0" rtl="0" algn="l">
+                <a:spcBef>
+                  <a:spcPts val="0"/>
+                </a:spcBef>
+                <a:spcAft>
+                  <a:spcPts val="0"/>
+                </a:spcAft>
+                <a:buNone/>
+              </a:pPr>
+              <a:r>
+                <a:t/>
+              </a:r>
+              <a:endParaRPr/>
+            </a:p>
+          </p:txBody>
+        </p:sp>
+        <p:sp>
+          <p:nvSpPr>
+            <p:cNvPr id="34" name="Google Shape;34;p4"/>
+            <p:cNvSpPr/>
+            <p:nvPr/>
+          </p:nvSpPr>
+          <p:spPr>
+            <a:xfrm>
+              <a:off x="0" y="4891594"/>
+              <a:ext cx="9144000" cy="252000"/>
+            </a:xfrm>
+            <a:prstGeom prst="rect">
+              <a:avLst/>
+            </a:prstGeom>
+            <a:solidFill>
+              <a:schemeClr val="dk1"/>
+            </a:solidFill>
+            <a:ln>
+              <a:noFill/>
+            </a:ln>
+          </p:spPr>
+          <p:txBody>
+            <a:bodyPr anchorCtr="0" anchor="ctr" bIns="91425" lIns="91425" spcFirstLastPara="1" rIns="91425" wrap="square" tIns="91425">
+              <a:noAutofit/>
+            </a:bodyPr>
+            <a:lstStyle/>
+            <a:p>
+              <a:pPr indent="0" lvl="0" marL="0" rtl="0" algn="l">
+                <a:spcBef>
+                  <a:spcPts val="0"/>
+                </a:spcBef>
+                <a:spcAft>
+                  <a:spcPts val="0"/>
+                </a:spcAft>
+                <a:buNone/>
+              </a:pPr>
+              <a:r>
+                <a:t/>
+              </a:r>
+              <a:endParaRPr/>
+            </a:p>
+          </p:txBody>
+        </p:sp>
+      </p:grpSp>
       <p:sp>
         <p:nvSpPr>
-          <p:cNvPr id="17" name="Google Shape;17;p4"/>
+          <p:cNvPr id="35" name="Google Shape;35;p4"/>
           <p:cNvSpPr txBox="1"/>
           <p:nvPr>
             <p:ph type="title"/>
@@ -1876,8 +4103,8 @@
         </p:nvSpPr>
         <p:spPr>
           <a:xfrm>
-            <a:off x="311700" y="445025"/>
-            <a:ext cx="8520600" cy="572700"/>
+            <a:off x="311700" y="410000"/>
+            <a:ext cx="8520600" cy="607800"/>
           </a:xfrm>
           <a:prstGeom prst="rect">
             <a:avLst/>
@@ -1895,7 +4122,7 @@
               <a:spcAft>
                 <a:spcPts val="0"/>
               </a:spcAft>
-              <a:buSzPts val="2800"/>
+              <a:buSzPts val="3000"/>
               <a:buNone/>
               <a:defRPr/>
             </a:lvl1pPr>
@@ -1906,7 +4133,7 @@
               <a:spcAft>
                 <a:spcPts val="0"/>
               </a:spcAft>
-              <a:buSzPts val="2800"/>
+              <a:buSzPts val="3000"/>
               <a:buNone/>
               <a:defRPr/>
             </a:lvl2pPr>
@@ -1917,7 +4144,7 @@
               <a:spcAft>
                 <a:spcPts val="0"/>
               </a:spcAft>
-              <a:buSzPts val="2800"/>
+              <a:buSzPts val="3000"/>
               <a:buNone/>
               <a:defRPr/>
             </a:lvl3pPr>
@@ -1928,7 +4155,7 @@
               <a:spcAft>
                 <a:spcPts val="0"/>
               </a:spcAft>
-              <a:buSzPts val="2800"/>
+              <a:buSzPts val="3000"/>
               <a:buNone/>
               <a:defRPr/>
             </a:lvl4pPr>
@@ -1939,7 +4166,7 @@
               <a:spcAft>
                 <a:spcPts val="0"/>
               </a:spcAft>
-              <a:buSzPts val="2800"/>
+              <a:buSzPts val="3000"/>
               <a:buNone/>
               <a:defRPr/>
             </a:lvl5pPr>
@@ -1950,7 +4177,7 @@
               <a:spcAft>
                 <a:spcPts val="0"/>
               </a:spcAft>
-              <a:buSzPts val="2800"/>
+              <a:buSzPts val="3000"/>
               <a:buNone/>
               <a:defRPr/>
             </a:lvl6pPr>
@@ -1961,7 +4188,7 @@
               <a:spcAft>
                 <a:spcPts val="0"/>
               </a:spcAft>
-              <a:buSzPts val="2800"/>
+              <a:buSzPts val="3000"/>
               <a:buNone/>
               <a:defRPr/>
             </a:lvl7pPr>
@@ -1972,7 +4199,7 @@
               <a:spcAft>
                 <a:spcPts val="0"/>
               </a:spcAft>
-              <a:buSzPts val="2800"/>
+              <a:buSzPts val="3000"/>
               <a:buNone/>
               <a:defRPr/>
             </a:lvl8pPr>
@@ -1983,7 +4210,7 @@
               <a:spcAft>
                 <a:spcPts val="0"/>
               </a:spcAft>
-              <a:buSzPts val="2800"/>
+              <a:buSzPts val="3000"/>
               <a:buNone/>
               <a:defRPr/>
             </a:lvl9pPr>
@@ -1993,7 +4220,7 @@
       </p:sp>
       <p:sp>
         <p:nvSpPr>
-          <p:cNvPr id="18" name="Google Shape;18;p4"/>
+          <p:cNvPr id="36" name="Google Shape;36;p4"/>
           <p:cNvSpPr txBox="1"/>
           <p:nvPr>
             <p:ph idx="1" type="body"/>
@@ -2001,8 +4228,8 @@
         </p:nvSpPr>
         <p:spPr>
           <a:xfrm>
-            <a:off x="311700" y="1152475"/>
-            <a:ext cx="8520600" cy="3416400"/>
+            <a:off x="311700" y="1229875"/>
+            <a:ext cx="8520600" cy="3339000"/>
           </a:xfrm>
           <a:prstGeom prst="rect">
             <a:avLst/>
@@ -2118,7 +4345,7 @@
       </p:sp>
       <p:sp>
         <p:nvSpPr>
-          <p:cNvPr id="19" name="Google Shape;19;p4"/>
+          <p:cNvPr id="37" name="Google Shape;37;p4"/>
           <p:cNvSpPr txBox="1"/>
           <p:nvPr>
             <p:ph idx="12" type="sldNum"/>
@@ -2126,7 +4353,7 @@
         </p:nvSpPr>
         <p:spPr>
           <a:xfrm>
-            <a:off x="8472458" y="4663217"/>
+            <a:off x="8460431" y="4651190"/>
             <a:ext cx="548700" cy="393600"/>
           </a:xfrm>
           <a:prstGeom prst="rect">
@@ -2206,7 +4433,7 @@
   <p:cSld name="TITLE_AND_TWO_COLUMNS">
     <p:spTree>
       <p:nvGrpSpPr>
-        <p:cNvPr id="20" name="Shape 20"/>
+        <p:cNvPr id="38" name="Shape 38"/>
         <p:cNvGrpSpPr/>
         <p:nvPr/>
       </p:nvGrpSpPr>
@@ -2220,7 +4447,7 @@
       </p:grpSpPr>
       <p:sp>
         <p:nvSpPr>
-          <p:cNvPr id="21" name="Google Shape;21;p5"/>
+          <p:cNvPr id="39" name="Google Shape;39;p5"/>
           <p:cNvSpPr txBox="1"/>
           <p:nvPr>
             <p:ph type="title"/>
@@ -2228,8 +4455,8 @@
         </p:nvSpPr>
         <p:spPr>
           <a:xfrm>
-            <a:off x="311700" y="445025"/>
-            <a:ext cx="8520600" cy="572700"/>
+            <a:off x="311700" y="410000"/>
+            <a:ext cx="8520600" cy="607800"/>
           </a:xfrm>
           <a:prstGeom prst="rect">
             <a:avLst/>
@@ -2247,7 +4474,7 @@
               <a:spcAft>
                 <a:spcPts val="0"/>
               </a:spcAft>
-              <a:buSzPts val="2800"/>
+              <a:buSzPts val="3000"/>
               <a:buNone/>
               <a:defRPr/>
             </a:lvl1pPr>
@@ -2258,7 +4485,7 @@
               <a:spcAft>
                 <a:spcPts val="0"/>
               </a:spcAft>
-              <a:buSzPts val="2800"/>
+              <a:buSzPts val="3000"/>
               <a:buNone/>
               <a:defRPr/>
             </a:lvl2pPr>
@@ -2269,7 +4496,7 @@
               <a:spcAft>
                 <a:spcPts val="0"/>
               </a:spcAft>
-              <a:buSzPts val="2800"/>
+              <a:buSzPts val="3000"/>
               <a:buNone/>
               <a:defRPr/>
             </a:lvl3pPr>
@@ -2280,7 +4507,7 @@
               <a:spcAft>
                 <a:spcPts val="0"/>
               </a:spcAft>
-              <a:buSzPts val="2800"/>
+              <a:buSzPts val="3000"/>
               <a:buNone/>
               <a:defRPr/>
             </a:lvl4pPr>
@@ -2291,7 +4518,7 @@
               <a:spcAft>
                 <a:spcPts val="0"/>
               </a:spcAft>
-              <a:buSzPts val="2800"/>
+              <a:buSzPts val="3000"/>
               <a:buNone/>
               <a:defRPr/>
             </a:lvl5pPr>
@@ -2302,7 +4529,7 @@
               <a:spcAft>
                 <a:spcPts val="0"/>
               </a:spcAft>
-              <a:buSzPts val="2800"/>
+              <a:buSzPts val="3000"/>
               <a:buNone/>
               <a:defRPr/>
             </a:lvl6pPr>
@@ -2313,7 +4540,7 @@
               <a:spcAft>
                 <a:spcPts val="0"/>
               </a:spcAft>
-              <a:buSzPts val="2800"/>
+              <a:buSzPts val="3000"/>
               <a:buNone/>
               <a:defRPr/>
             </a:lvl7pPr>
@@ -2324,7 +4551,7 @@
               <a:spcAft>
                 <a:spcPts val="0"/>
               </a:spcAft>
-              <a:buSzPts val="2800"/>
+              <a:buSzPts val="3000"/>
               <a:buNone/>
               <a:defRPr/>
             </a:lvl8pPr>
@@ -2335,7 +4562,7 @@
               <a:spcAft>
                 <a:spcPts val="0"/>
               </a:spcAft>
-              <a:buSzPts val="2800"/>
+              <a:buSzPts val="3000"/>
               <a:buNone/>
               <a:defRPr/>
             </a:lvl9pPr>
@@ -2345,7 +4572,7 @@
       </p:sp>
       <p:sp>
         <p:nvSpPr>
-          <p:cNvPr id="22" name="Google Shape;22;p5"/>
+          <p:cNvPr id="40" name="Google Shape;40;p5"/>
           <p:cNvSpPr txBox="1"/>
           <p:nvPr>
             <p:ph idx="1" type="body"/>
@@ -2353,8 +4580,8 @@
         </p:nvSpPr>
         <p:spPr>
           <a:xfrm>
-            <a:off x="311700" y="1152475"/>
-            <a:ext cx="3999900" cy="3416400"/>
+            <a:off x="311700" y="1229975"/>
+            <a:ext cx="3999900" cy="3339000"/>
           </a:xfrm>
           <a:prstGeom prst="rect">
             <a:avLst/>
@@ -2470,7 +4697,7 @@
       </p:sp>
       <p:sp>
         <p:nvSpPr>
-          <p:cNvPr id="23" name="Google Shape;23;p5"/>
+          <p:cNvPr id="41" name="Google Shape;41;p5"/>
           <p:cNvSpPr txBox="1"/>
           <p:nvPr>
             <p:ph idx="2" type="body"/>
@@ -2478,8 +4705,8 @@
         </p:nvSpPr>
         <p:spPr>
           <a:xfrm>
-            <a:off x="4832400" y="1152475"/>
-            <a:ext cx="3999900" cy="3416400"/>
+            <a:off x="4832400" y="1229975"/>
+            <a:ext cx="3999900" cy="3339000"/>
           </a:xfrm>
           <a:prstGeom prst="rect">
             <a:avLst/>
@@ -2595,7 +4822,7 @@
       </p:sp>
       <p:sp>
         <p:nvSpPr>
-          <p:cNvPr id="24" name="Google Shape;24;p5"/>
+          <p:cNvPr id="42" name="Google Shape;42;p5"/>
           <p:cNvSpPr txBox="1"/>
           <p:nvPr>
             <p:ph idx="12" type="sldNum"/>
@@ -2603,7 +4830,7 @@
         </p:nvSpPr>
         <p:spPr>
           <a:xfrm>
-            <a:off x="8472458" y="4663217"/>
+            <a:off x="8460431" y="4651190"/>
             <a:ext cx="548700" cy="393600"/>
           </a:xfrm>
           <a:prstGeom prst="rect">
@@ -2617,39 +4844,75 @@
           <a:lstStyle>
             <a:lvl1pPr lvl="0">
               <a:buNone/>
-              <a:defRPr/>
+              <a:defRPr>
+                <a:solidFill>
+                  <a:schemeClr val="dk2"/>
+                </a:solidFill>
+              </a:defRPr>
             </a:lvl1pPr>
             <a:lvl2pPr lvl="1">
               <a:buNone/>
-              <a:defRPr/>
+              <a:defRPr>
+                <a:solidFill>
+                  <a:schemeClr val="dk2"/>
+                </a:solidFill>
+              </a:defRPr>
             </a:lvl2pPr>
             <a:lvl3pPr lvl="2">
               <a:buNone/>
-              <a:defRPr/>
+              <a:defRPr>
+                <a:solidFill>
+                  <a:schemeClr val="dk2"/>
+                </a:solidFill>
+              </a:defRPr>
             </a:lvl3pPr>
             <a:lvl4pPr lvl="3">
               <a:buNone/>
-              <a:defRPr/>
+              <a:defRPr>
+                <a:solidFill>
+                  <a:schemeClr val="dk2"/>
+                </a:solidFill>
+              </a:defRPr>
             </a:lvl4pPr>
             <a:lvl5pPr lvl="4">
               <a:buNone/>
-              <a:defRPr/>
+              <a:defRPr>
+                <a:solidFill>
+                  <a:schemeClr val="dk2"/>
+                </a:solidFill>
+              </a:defRPr>
             </a:lvl5pPr>
             <a:lvl6pPr lvl="5">
               <a:buNone/>
-              <a:defRPr/>
+              <a:defRPr>
+                <a:solidFill>
+                  <a:schemeClr val="dk2"/>
+                </a:solidFill>
+              </a:defRPr>
             </a:lvl6pPr>
             <a:lvl7pPr lvl="6">
               <a:buNone/>
-              <a:defRPr/>
+              <a:defRPr>
+                <a:solidFill>
+                  <a:schemeClr val="dk2"/>
+                </a:solidFill>
+              </a:defRPr>
             </a:lvl7pPr>
             <a:lvl8pPr lvl="7">
               <a:buNone/>
-              <a:defRPr/>
+              <a:defRPr>
+                <a:solidFill>
+                  <a:schemeClr val="dk2"/>
+                </a:solidFill>
+              </a:defRPr>
             </a:lvl8pPr>
             <a:lvl9pPr lvl="8">
               <a:buNone/>
-              <a:defRPr/>
+              <a:defRPr>
+                <a:solidFill>
+                  <a:schemeClr val="dk2"/>
+                </a:solidFill>
+              </a:defRPr>
             </a:lvl9pPr>
           </a:lstStyle>
           <a:p>
@@ -2683,7 +4946,7 @@
   <p:cSld name="TITLE_ONLY">
     <p:spTree>
       <p:nvGrpSpPr>
-        <p:cNvPr id="25" name="Shape 25"/>
+        <p:cNvPr id="43" name="Shape 43"/>
         <p:cNvGrpSpPr/>
         <p:nvPr/>
       </p:nvGrpSpPr>
@@ -2697,7 +4960,7 @@
       </p:grpSpPr>
       <p:sp>
         <p:nvSpPr>
-          <p:cNvPr id="26" name="Google Shape;26;p6"/>
+          <p:cNvPr id="44" name="Google Shape;44;p6"/>
           <p:cNvSpPr txBox="1"/>
           <p:nvPr>
             <p:ph type="title"/>
@@ -2705,8 +4968,8 @@
         </p:nvSpPr>
         <p:spPr>
           <a:xfrm>
-            <a:off x="311700" y="445025"/>
-            <a:ext cx="8520600" cy="572700"/>
+            <a:off x="311700" y="410000"/>
+            <a:ext cx="8520600" cy="607800"/>
           </a:xfrm>
           <a:prstGeom prst="rect">
             <a:avLst/>
@@ -2724,7 +4987,7 @@
               <a:spcAft>
                 <a:spcPts val="0"/>
               </a:spcAft>
-              <a:buSzPts val="2800"/>
+              <a:buSzPts val="3000"/>
               <a:buNone/>
               <a:defRPr/>
             </a:lvl1pPr>
@@ -2735,7 +4998,7 @@
               <a:spcAft>
                 <a:spcPts val="0"/>
               </a:spcAft>
-              <a:buSzPts val="2800"/>
+              <a:buSzPts val="3000"/>
               <a:buNone/>
               <a:defRPr/>
             </a:lvl2pPr>
@@ -2746,7 +5009,7 @@
               <a:spcAft>
                 <a:spcPts val="0"/>
               </a:spcAft>
-              <a:buSzPts val="2800"/>
+              <a:buSzPts val="3000"/>
               <a:buNone/>
               <a:defRPr/>
             </a:lvl3pPr>
@@ -2757,7 +5020,7 @@
               <a:spcAft>
                 <a:spcPts val="0"/>
               </a:spcAft>
-              <a:buSzPts val="2800"/>
+              <a:buSzPts val="3000"/>
               <a:buNone/>
               <a:defRPr/>
             </a:lvl4pPr>
@@ -2768,7 +5031,7 @@
               <a:spcAft>
                 <a:spcPts val="0"/>
               </a:spcAft>
-              <a:buSzPts val="2800"/>
+              <a:buSzPts val="3000"/>
               <a:buNone/>
               <a:defRPr/>
             </a:lvl5pPr>
@@ -2779,7 +5042,7 @@
               <a:spcAft>
                 <a:spcPts val="0"/>
               </a:spcAft>
-              <a:buSzPts val="2800"/>
+              <a:buSzPts val="3000"/>
               <a:buNone/>
               <a:defRPr/>
             </a:lvl6pPr>
@@ -2790,7 +5053,7 @@
               <a:spcAft>
                 <a:spcPts val="0"/>
               </a:spcAft>
-              <a:buSzPts val="2800"/>
+              <a:buSzPts val="3000"/>
               <a:buNone/>
               <a:defRPr/>
             </a:lvl7pPr>
@@ -2801,7 +5064,7 @@
               <a:spcAft>
                 <a:spcPts val="0"/>
               </a:spcAft>
-              <a:buSzPts val="2800"/>
+              <a:buSzPts val="3000"/>
               <a:buNone/>
               <a:defRPr/>
             </a:lvl8pPr>
@@ -2812,7 +5075,7 @@
               <a:spcAft>
                 <a:spcPts val="0"/>
               </a:spcAft>
-              <a:buSzPts val="2800"/>
+              <a:buSzPts val="3000"/>
               <a:buNone/>
               <a:defRPr/>
             </a:lvl9pPr>
@@ -2822,7 +5085,7 @@
       </p:sp>
       <p:sp>
         <p:nvSpPr>
-          <p:cNvPr id="27" name="Google Shape;27;p6"/>
+          <p:cNvPr id="45" name="Google Shape;45;p6"/>
           <p:cNvSpPr txBox="1"/>
           <p:nvPr>
             <p:ph idx="12" type="sldNum"/>
@@ -2830,7 +5093,7 @@
         </p:nvSpPr>
         <p:spPr>
           <a:xfrm>
-            <a:off x="8472458" y="4663217"/>
+            <a:off x="8460431" y="4651190"/>
             <a:ext cx="548700" cy="393600"/>
           </a:xfrm>
           <a:prstGeom prst="rect">
@@ -2844,39 +5107,75 @@
           <a:lstStyle>
             <a:lvl1pPr lvl="0">
               <a:buNone/>
-              <a:defRPr/>
+              <a:defRPr>
+                <a:solidFill>
+                  <a:schemeClr val="dk2"/>
+                </a:solidFill>
+              </a:defRPr>
             </a:lvl1pPr>
             <a:lvl2pPr lvl="1">
               <a:buNone/>
-              <a:defRPr/>
+              <a:defRPr>
+                <a:solidFill>
+                  <a:schemeClr val="dk2"/>
+                </a:solidFill>
+              </a:defRPr>
             </a:lvl2pPr>
             <a:lvl3pPr lvl="2">
               <a:buNone/>
-              <a:defRPr/>
+              <a:defRPr>
+                <a:solidFill>
+                  <a:schemeClr val="dk2"/>
+                </a:solidFill>
+              </a:defRPr>
             </a:lvl3pPr>
             <a:lvl4pPr lvl="3">
               <a:buNone/>
-              <a:defRPr/>
+              <a:defRPr>
+                <a:solidFill>
+                  <a:schemeClr val="dk2"/>
+                </a:solidFill>
+              </a:defRPr>
             </a:lvl4pPr>
             <a:lvl5pPr lvl="4">
               <a:buNone/>
-              <a:defRPr/>
+              <a:defRPr>
+                <a:solidFill>
+                  <a:schemeClr val="dk2"/>
+                </a:solidFill>
+              </a:defRPr>
             </a:lvl5pPr>
             <a:lvl6pPr lvl="5">
               <a:buNone/>
-              <a:defRPr/>
+              <a:defRPr>
+                <a:solidFill>
+                  <a:schemeClr val="dk2"/>
+                </a:solidFill>
+              </a:defRPr>
             </a:lvl6pPr>
             <a:lvl7pPr lvl="6">
               <a:buNone/>
-              <a:defRPr/>
+              <a:defRPr>
+                <a:solidFill>
+                  <a:schemeClr val="dk2"/>
+                </a:solidFill>
+              </a:defRPr>
             </a:lvl7pPr>
             <a:lvl8pPr lvl="7">
               <a:buNone/>
-              <a:defRPr/>
+              <a:defRPr>
+                <a:solidFill>
+                  <a:schemeClr val="dk2"/>
+                </a:solidFill>
+              </a:defRPr>
             </a:lvl8pPr>
             <a:lvl9pPr lvl="8">
               <a:buNone/>
-              <a:defRPr/>
+              <a:defRPr>
+                <a:solidFill>
+                  <a:schemeClr val="dk2"/>
+                </a:solidFill>
+              </a:defRPr>
             </a:lvl9pPr>
           </a:lstStyle>
           <a:p>
@@ -2910,7 +5209,7 @@
   <p:cSld name="ONE_COLUMN_TEXT">
     <p:spTree>
       <p:nvGrpSpPr>
-        <p:cNvPr id="28" name="Shape 28"/>
+        <p:cNvPr id="46" name="Shape 46"/>
         <p:cNvGrpSpPr/>
         <p:nvPr/>
       </p:nvGrpSpPr>
@@ -2924,7 +5223,7 @@
       </p:grpSpPr>
       <p:sp>
         <p:nvSpPr>
-          <p:cNvPr id="29" name="Google Shape;29;p7"/>
+          <p:cNvPr id="47" name="Google Shape;47;p7"/>
           <p:cNvSpPr txBox="1"/>
           <p:nvPr>
             <p:ph type="title"/>
@@ -3049,7 +5348,7 @@
       </p:sp>
       <p:sp>
         <p:nvSpPr>
-          <p:cNvPr id="30" name="Google Shape;30;p7"/>
+          <p:cNvPr id="48" name="Google Shape;48;p7"/>
           <p:cNvSpPr txBox="1"/>
           <p:nvPr>
             <p:ph idx="1" type="body"/>
@@ -3057,8 +5356,8 @@
         </p:nvSpPr>
         <p:spPr>
           <a:xfrm>
-            <a:off x="311700" y="1389600"/>
-            <a:ext cx="2808000" cy="3179400"/>
+            <a:off x="311700" y="1465804"/>
+            <a:ext cx="2808000" cy="3103200"/>
           </a:xfrm>
           <a:prstGeom prst="rect">
             <a:avLst/>
@@ -3174,7 +5473,7 @@
       </p:sp>
       <p:sp>
         <p:nvSpPr>
-          <p:cNvPr id="31" name="Google Shape;31;p7"/>
+          <p:cNvPr id="49" name="Google Shape;49;p7"/>
           <p:cNvSpPr txBox="1"/>
           <p:nvPr>
             <p:ph idx="12" type="sldNum"/>
@@ -3182,7 +5481,7 @@
         </p:nvSpPr>
         <p:spPr>
           <a:xfrm>
-            <a:off x="8472458" y="4663217"/>
+            <a:off x="8460431" y="4651190"/>
             <a:ext cx="548700" cy="393600"/>
           </a:xfrm>
           <a:prstGeom prst="rect">
@@ -3196,39 +5495,75 @@
           <a:lstStyle>
             <a:lvl1pPr lvl="0">
               <a:buNone/>
-              <a:defRPr/>
+              <a:defRPr>
+                <a:solidFill>
+                  <a:schemeClr val="dk2"/>
+                </a:solidFill>
+              </a:defRPr>
             </a:lvl1pPr>
             <a:lvl2pPr lvl="1">
               <a:buNone/>
-              <a:defRPr/>
+              <a:defRPr>
+                <a:solidFill>
+                  <a:schemeClr val="dk2"/>
+                </a:solidFill>
+              </a:defRPr>
             </a:lvl2pPr>
             <a:lvl3pPr lvl="2">
               <a:buNone/>
-              <a:defRPr/>
+              <a:defRPr>
+                <a:solidFill>
+                  <a:schemeClr val="dk2"/>
+                </a:solidFill>
+              </a:defRPr>
             </a:lvl3pPr>
             <a:lvl4pPr lvl="3">
               <a:buNone/>
-              <a:defRPr/>
+              <a:defRPr>
+                <a:solidFill>
+                  <a:schemeClr val="dk2"/>
+                </a:solidFill>
+              </a:defRPr>
             </a:lvl4pPr>
             <a:lvl5pPr lvl="4">
               <a:buNone/>
-              <a:defRPr/>
+              <a:defRPr>
+                <a:solidFill>
+                  <a:schemeClr val="dk2"/>
+                </a:solidFill>
+              </a:defRPr>
             </a:lvl5pPr>
             <a:lvl6pPr lvl="5">
               <a:buNone/>
-              <a:defRPr/>
+              <a:defRPr>
+                <a:solidFill>
+                  <a:schemeClr val="dk2"/>
+                </a:solidFill>
+              </a:defRPr>
             </a:lvl6pPr>
             <a:lvl7pPr lvl="6">
               <a:buNone/>
-              <a:defRPr/>
+              <a:defRPr>
+                <a:solidFill>
+                  <a:schemeClr val="dk2"/>
+                </a:solidFill>
+              </a:defRPr>
             </a:lvl7pPr>
             <a:lvl8pPr lvl="7">
               <a:buNone/>
-              <a:defRPr/>
+              <a:defRPr>
+                <a:solidFill>
+                  <a:schemeClr val="dk2"/>
+                </a:solidFill>
+              </a:defRPr>
             </a:lvl8pPr>
             <a:lvl9pPr lvl="8">
               <a:buNone/>
-              <a:defRPr/>
+              <a:defRPr>
+                <a:solidFill>
+                  <a:schemeClr val="dk2"/>
+                </a:solidFill>
+              </a:defRPr>
             </a:lvl9pPr>
           </a:lstStyle>
           <a:p>
@@ -3260,9 +5595,16 @@
 <file path=ppt/slideLayouts/slideLayout7.xml><?xml version="1.0" encoding="utf-8"?>
 <p:sldLayout xmlns:a="http://schemas.openxmlformats.org/drawingml/2006/main" xmlns:r="http://schemas.openxmlformats.org/officeDocument/2006/relationships" xmlns:mc="http://schemas.openxmlformats.org/markup-compatibility/2006" xmlns:mv="urn:schemas-microsoft-com:mac:vml" xmlns:p="http://schemas.openxmlformats.org/presentationml/2006/main" xmlns:c="http://schemas.openxmlformats.org/drawingml/2006/chart" xmlns:dgm="http://schemas.openxmlformats.org/drawingml/2006/diagram" xmlns:o="urn:schemas-microsoft-com:office:office" xmlns:v="urn:schemas-microsoft-com:vml" xmlns:pvml="urn:schemas-microsoft-com:office:powerpoint" xmlns:com="http://schemas.openxmlformats.org/drawingml/2006/compatibility" xmlns:p14="http://schemas.microsoft.com/office/powerpoint/2010/main" xmlns:p15="http://schemas.microsoft.com/office/powerpoint/2012/main" xmlns:ahyp="http://schemas.microsoft.com/office/drawing/2018/hyperlinkcolor" matchingName="Main point">
   <p:cSld name="MAIN_POINT">
+    <p:bg>
+      <p:bgPr>
+        <a:solidFill>
+          <a:schemeClr val="accent4"/>
+        </a:solidFill>
+      </p:bgPr>
+    </p:bg>
     <p:spTree>
       <p:nvGrpSpPr>
-        <p:cNvPr id="32" name="Shape 32"/>
+        <p:cNvPr id="50" name="Shape 50"/>
         <p:cNvGrpSpPr/>
         <p:nvPr/>
       </p:nvGrpSpPr>
@@ -3274,9 +5616,239 @@
           <a:chExt cx="0" cy="0"/>
         </a:xfrm>
       </p:grpSpPr>
+      <p:grpSp>
+        <p:nvGrpSpPr>
+          <p:cNvPr id="51" name="Google Shape;51;p8"/>
+          <p:cNvGrpSpPr/>
+          <p:nvPr/>
+        </p:nvGrpSpPr>
+        <p:grpSpPr>
+          <a:xfrm>
+            <a:off x="6098378" y="5"/>
+            <a:ext cx="3045625" cy="2030570"/>
+            <a:chOff x="6098378" y="5"/>
+            <a:chExt cx="3045625" cy="2030570"/>
+          </a:xfrm>
+        </p:grpSpPr>
+        <p:sp>
+          <p:nvSpPr>
+            <p:cNvPr id="52" name="Google Shape;52;p8"/>
+            <p:cNvSpPr/>
+            <p:nvPr/>
+          </p:nvSpPr>
+          <p:spPr>
+            <a:xfrm>
+              <a:off x="8128803" y="16"/>
+              <a:ext cx="1015200" cy="1015200"/>
+            </a:xfrm>
+            <a:prstGeom prst="rect">
+              <a:avLst/>
+            </a:prstGeom>
+            <a:solidFill>
+              <a:schemeClr val="accent3"/>
+            </a:solidFill>
+            <a:ln>
+              <a:noFill/>
+            </a:ln>
+          </p:spPr>
+          <p:txBody>
+            <a:bodyPr anchorCtr="0" anchor="ctr" bIns="91425" lIns="91425" spcFirstLastPara="1" rIns="91425" wrap="square" tIns="91425">
+              <a:noAutofit/>
+            </a:bodyPr>
+            <a:lstStyle/>
+            <a:p>
+              <a:pPr indent="0" lvl="0" marL="0" rtl="0" algn="l">
+                <a:spcBef>
+                  <a:spcPts val="0"/>
+                </a:spcBef>
+                <a:spcAft>
+                  <a:spcPts val="0"/>
+                </a:spcAft>
+                <a:buNone/>
+              </a:pPr>
+              <a:r>
+                <a:t/>
+              </a:r>
+              <a:endParaRPr/>
+            </a:p>
+          </p:txBody>
+        </p:sp>
+        <p:sp>
+          <p:nvSpPr>
+            <p:cNvPr id="53" name="Google Shape;53;p8"/>
+            <p:cNvSpPr/>
+            <p:nvPr/>
+          </p:nvSpPr>
+          <p:spPr>
+            <a:xfrm flipH="1">
+              <a:off x="7113463" y="5"/>
+              <a:ext cx="1015200" cy="1015200"/>
+            </a:xfrm>
+            <a:prstGeom prst="rtTriangle">
+              <a:avLst/>
+            </a:prstGeom>
+            <a:solidFill>
+              <a:schemeClr val="accent5"/>
+            </a:solidFill>
+            <a:ln>
+              <a:noFill/>
+            </a:ln>
+          </p:spPr>
+          <p:txBody>
+            <a:bodyPr anchorCtr="0" anchor="ctr" bIns="91425" lIns="91425" spcFirstLastPara="1" rIns="91425" wrap="square" tIns="91425">
+              <a:noAutofit/>
+            </a:bodyPr>
+            <a:lstStyle/>
+            <a:p>
+              <a:pPr indent="0" lvl="0" marL="0" rtl="0" algn="l">
+                <a:spcBef>
+                  <a:spcPts val="0"/>
+                </a:spcBef>
+                <a:spcAft>
+                  <a:spcPts val="0"/>
+                </a:spcAft>
+                <a:buNone/>
+              </a:pPr>
+              <a:r>
+                <a:t/>
+              </a:r>
+              <a:endParaRPr/>
+            </a:p>
+          </p:txBody>
+        </p:sp>
+        <p:sp>
+          <p:nvSpPr>
+            <p:cNvPr id="54" name="Google Shape;54;p8"/>
+            <p:cNvSpPr/>
+            <p:nvPr/>
+          </p:nvSpPr>
+          <p:spPr>
+            <a:xfrm flipH="1" rot="10800000">
+              <a:off x="7113588" y="107"/>
+              <a:ext cx="1015200" cy="1015200"/>
+            </a:xfrm>
+            <a:prstGeom prst="rtTriangle">
+              <a:avLst/>
+            </a:prstGeom>
+            <a:solidFill>
+              <a:schemeClr val="accent3"/>
+            </a:solidFill>
+            <a:ln>
+              <a:noFill/>
+            </a:ln>
+          </p:spPr>
+          <p:txBody>
+            <a:bodyPr anchorCtr="0" anchor="ctr" bIns="91425" lIns="91425" spcFirstLastPara="1" rIns="91425" wrap="square" tIns="91425">
+              <a:noAutofit/>
+            </a:bodyPr>
+            <a:lstStyle/>
+            <a:p>
+              <a:pPr indent="0" lvl="0" marL="0" rtl="0" algn="l">
+                <a:spcBef>
+                  <a:spcPts val="0"/>
+                </a:spcBef>
+                <a:spcAft>
+                  <a:spcPts val="0"/>
+                </a:spcAft>
+                <a:buNone/>
+              </a:pPr>
+              <a:r>
+                <a:t/>
+              </a:r>
+              <a:endParaRPr/>
+            </a:p>
+          </p:txBody>
+        </p:sp>
+        <p:sp>
+          <p:nvSpPr>
+            <p:cNvPr id="55" name="Google Shape;55;p8"/>
+            <p:cNvSpPr/>
+            <p:nvPr/>
+          </p:nvSpPr>
+          <p:spPr>
+            <a:xfrm rot="10800000">
+              <a:off x="6098378" y="97"/>
+              <a:ext cx="1015200" cy="1015200"/>
+            </a:xfrm>
+            <a:prstGeom prst="rtTriangle">
+              <a:avLst/>
+            </a:prstGeom>
+            <a:solidFill>
+              <a:schemeClr val="accent5"/>
+            </a:solidFill>
+            <a:ln>
+              <a:noFill/>
+            </a:ln>
+          </p:spPr>
+          <p:txBody>
+            <a:bodyPr anchorCtr="0" anchor="ctr" bIns="91425" lIns="91425" spcFirstLastPara="1" rIns="91425" wrap="square" tIns="91425">
+              <a:noAutofit/>
+            </a:bodyPr>
+            <a:lstStyle/>
+            <a:p>
+              <a:pPr indent="0" lvl="0" marL="0" rtl="0" algn="l">
+                <a:spcBef>
+                  <a:spcPts val="0"/>
+                </a:spcBef>
+                <a:spcAft>
+                  <a:spcPts val="0"/>
+                </a:spcAft>
+                <a:buNone/>
+              </a:pPr>
+              <a:r>
+                <a:t/>
+              </a:r>
+              <a:endParaRPr/>
+            </a:p>
+          </p:txBody>
+        </p:sp>
+        <p:sp>
+          <p:nvSpPr>
+            <p:cNvPr id="56" name="Google Shape;56;p8"/>
+            <p:cNvSpPr/>
+            <p:nvPr/>
+          </p:nvSpPr>
+          <p:spPr>
+            <a:xfrm rot="10800000">
+              <a:off x="8128789" y="1015375"/>
+              <a:ext cx="1015200" cy="1015200"/>
+            </a:xfrm>
+            <a:prstGeom prst="rtTriangle">
+              <a:avLst/>
+            </a:prstGeom>
+            <a:solidFill>
+              <a:schemeClr val="accent5"/>
+            </a:solidFill>
+            <a:ln>
+              <a:noFill/>
+            </a:ln>
+          </p:spPr>
+          <p:txBody>
+            <a:bodyPr anchorCtr="0" anchor="ctr" bIns="91425" lIns="91425" spcFirstLastPara="1" rIns="91425" wrap="square" tIns="91425">
+              <a:noAutofit/>
+            </a:bodyPr>
+            <a:lstStyle/>
+            <a:p>
+              <a:pPr indent="0" lvl="0" marL="0" rtl="0" algn="l">
+                <a:spcBef>
+                  <a:spcPts val="0"/>
+                </a:spcBef>
+                <a:spcAft>
+                  <a:spcPts val="0"/>
+                </a:spcAft>
+                <a:buNone/>
+              </a:pPr>
+              <a:r>
+                <a:t/>
+              </a:r>
+              <a:endParaRPr/>
+            </a:p>
+          </p:txBody>
+        </p:sp>
+      </p:grpSp>
       <p:sp>
         <p:nvSpPr>
-          <p:cNvPr id="33" name="Google Shape;33;p8"/>
+          <p:cNvPr id="57" name="Google Shape;57;p8"/>
           <p:cNvSpPr txBox="1"/>
           <p:nvPr>
             <p:ph type="title"/>
@@ -3284,8 +5856,8 @@
         </p:nvSpPr>
         <p:spPr>
           <a:xfrm>
-            <a:off x="490250" y="450150"/>
-            <a:ext cx="6367800" cy="4090800"/>
+            <a:off x="490250" y="526350"/>
+            <a:ext cx="5618700" cy="4090800"/>
           </a:xfrm>
           <a:prstGeom prst="rect">
             <a:avLst/>
@@ -3303,9 +5875,16 @@
               <a:spcAft>
                 <a:spcPts val="0"/>
               </a:spcAft>
+              <a:buClr>
+                <a:schemeClr val="lt1"/>
+              </a:buClr>
               <a:buSzPts val="4800"/>
               <a:buNone/>
-              <a:defRPr sz="4800"/>
+              <a:defRPr sz="4800">
+                <a:solidFill>
+                  <a:schemeClr val="lt1"/>
+                </a:solidFill>
+              </a:defRPr>
             </a:lvl1pPr>
             <a:lvl2pPr lvl="1">
               <a:spcBef>
@@ -3314,9 +5893,16 @@
               <a:spcAft>
                 <a:spcPts val="0"/>
               </a:spcAft>
+              <a:buClr>
+                <a:schemeClr val="lt1"/>
+              </a:buClr>
               <a:buSzPts val="4800"/>
               <a:buNone/>
-              <a:defRPr sz="4800"/>
+              <a:defRPr sz="4800">
+                <a:solidFill>
+                  <a:schemeClr val="lt1"/>
+                </a:solidFill>
+              </a:defRPr>
             </a:lvl2pPr>
             <a:lvl3pPr lvl="2">
               <a:spcBef>
@@ -3325,9 +5911,16 @@
               <a:spcAft>
                 <a:spcPts val="0"/>
               </a:spcAft>
+              <a:buClr>
+                <a:schemeClr val="lt1"/>
+              </a:buClr>
               <a:buSzPts val="4800"/>
               <a:buNone/>
-              <a:defRPr sz="4800"/>
+              <a:defRPr sz="4800">
+                <a:solidFill>
+                  <a:schemeClr val="lt1"/>
+                </a:solidFill>
+              </a:defRPr>
             </a:lvl3pPr>
             <a:lvl4pPr lvl="3">
               <a:spcBef>
@@ -3336,9 +5929,16 @@
               <a:spcAft>
                 <a:spcPts val="0"/>
               </a:spcAft>
+              <a:buClr>
+                <a:schemeClr val="lt1"/>
+              </a:buClr>
               <a:buSzPts val="4800"/>
               <a:buNone/>
-              <a:defRPr sz="4800"/>
+              <a:defRPr sz="4800">
+                <a:solidFill>
+                  <a:schemeClr val="lt1"/>
+                </a:solidFill>
+              </a:defRPr>
             </a:lvl4pPr>
             <a:lvl5pPr lvl="4">
               <a:spcBef>
@@ -3347,9 +5947,16 @@
               <a:spcAft>
                 <a:spcPts val="0"/>
               </a:spcAft>
+              <a:buClr>
+                <a:schemeClr val="lt1"/>
+              </a:buClr>
               <a:buSzPts val="4800"/>
               <a:buNone/>
-              <a:defRPr sz="4800"/>
+              <a:defRPr sz="4800">
+                <a:solidFill>
+                  <a:schemeClr val="lt1"/>
+                </a:solidFill>
+              </a:defRPr>
             </a:lvl5pPr>
             <a:lvl6pPr lvl="5">
               <a:spcBef>
@@ -3358,9 +5965,16 @@
               <a:spcAft>
                 <a:spcPts val="0"/>
               </a:spcAft>
+              <a:buClr>
+                <a:schemeClr val="lt1"/>
+              </a:buClr>
               <a:buSzPts val="4800"/>
               <a:buNone/>
-              <a:defRPr sz="4800"/>
+              <a:defRPr sz="4800">
+                <a:solidFill>
+                  <a:schemeClr val="lt1"/>
+                </a:solidFill>
+              </a:defRPr>
             </a:lvl6pPr>
             <a:lvl7pPr lvl="6">
               <a:spcBef>
@@ -3369,9 +5983,16 @@
               <a:spcAft>
                 <a:spcPts val="0"/>
               </a:spcAft>
+              <a:buClr>
+                <a:schemeClr val="lt1"/>
+              </a:buClr>
               <a:buSzPts val="4800"/>
               <a:buNone/>
-              <a:defRPr sz="4800"/>
+              <a:defRPr sz="4800">
+                <a:solidFill>
+                  <a:schemeClr val="lt1"/>
+                </a:solidFill>
+              </a:defRPr>
             </a:lvl7pPr>
             <a:lvl8pPr lvl="7">
               <a:spcBef>
@@ -3380,9 +6001,16 @@
               <a:spcAft>
                 <a:spcPts val="0"/>
               </a:spcAft>
+              <a:buClr>
+                <a:schemeClr val="lt1"/>
+              </a:buClr>
               <a:buSzPts val="4800"/>
               <a:buNone/>
-              <a:defRPr sz="4800"/>
+              <a:defRPr sz="4800">
+                <a:solidFill>
+                  <a:schemeClr val="lt1"/>
+                </a:solidFill>
+              </a:defRPr>
             </a:lvl8pPr>
             <a:lvl9pPr lvl="8">
               <a:spcBef>
@@ -3391,9 +6019,16 @@
               <a:spcAft>
                 <a:spcPts val="0"/>
               </a:spcAft>
+              <a:buClr>
+                <a:schemeClr val="lt1"/>
+              </a:buClr>
               <a:buSzPts val="4800"/>
               <a:buNone/>
-              <a:defRPr sz="4800"/>
+              <a:defRPr sz="4800">
+                <a:solidFill>
+                  <a:schemeClr val="lt1"/>
+                </a:solidFill>
+              </a:defRPr>
             </a:lvl9pPr>
           </a:lstStyle>
           <a:p/>
@@ -3401,7 +6036,7 @@
       </p:sp>
       <p:sp>
         <p:nvSpPr>
-          <p:cNvPr id="34" name="Google Shape;34;p8"/>
+          <p:cNvPr id="58" name="Google Shape;58;p8"/>
           <p:cNvSpPr txBox="1"/>
           <p:nvPr>
             <p:ph idx="12" type="sldNum"/>
@@ -3409,7 +6044,7 @@
         </p:nvSpPr>
         <p:spPr>
           <a:xfrm>
-            <a:off x="8472458" y="4663217"/>
+            <a:off x="8460431" y="4651190"/>
             <a:ext cx="548700" cy="393600"/>
           </a:xfrm>
           <a:prstGeom prst="rect">
@@ -3489,7 +6124,7 @@
   <p:cSld name="SECTION_TITLE_AND_DESCRIPTION">
     <p:spTree>
       <p:nvGrpSpPr>
-        <p:cNvPr id="35" name="Shape 35"/>
+        <p:cNvPr id="59" name="Shape 59"/>
         <p:cNvGrpSpPr/>
         <p:nvPr/>
       </p:nvGrpSpPr>
@@ -3503,20 +6138,20 @@
       </p:grpSpPr>
       <p:sp>
         <p:nvSpPr>
-          <p:cNvPr id="36" name="Google Shape;36;p9"/>
+          <p:cNvPr id="60" name="Google Shape;60;p9"/>
           <p:cNvSpPr/>
           <p:nvPr/>
         </p:nvSpPr>
         <p:spPr>
           <a:xfrm>
-            <a:off x="4572000" y="-125"/>
+            <a:off x="4572000" y="-175"/>
             <a:ext cx="4572000" cy="5143500"/>
           </a:xfrm>
           <a:prstGeom prst="rect">
             <a:avLst/>
           </a:prstGeom>
           <a:solidFill>
-            <a:schemeClr val="lt2"/>
+            <a:schemeClr val="dk1"/>
           </a:solidFill>
           <a:ln>
             <a:noFill/>
@@ -3544,9 +6179,35 @@
           </a:p>
         </p:txBody>
       </p:sp>
+      <p:cxnSp>
+        <p:nvCxnSpPr>
+          <p:cNvPr id="61" name="Google Shape;61;p9"/>
+          <p:cNvCxnSpPr/>
+          <p:nvPr/>
+        </p:nvCxnSpPr>
+        <p:spPr>
+          <a:xfrm>
+            <a:off x="5029675" y="4495500"/>
+            <a:ext cx="468300" cy="0"/>
+          </a:xfrm>
+          <a:prstGeom prst="straightConnector1">
+            <a:avLst/>
+          </a:prstGeom>
+          <a:noFill/>
+          <a:ln cap="flat" cmpd="sng" w="19050">
+            <a:solidFill>
+              <a:schemeClr val="lt1"/>
+            </a:solidFill>
+            <a:prstDash val="solid"/>
+            <a:round/>
+            <a:headEnd len="sm" w="sm" type="none"/>
+            <a:tailEnd len="sm" w="sm" type="none"/>
+          </a:ln>
+        </p:spPr>
+      </p:cxnSp>
       <p:sp>
         <p:nvSpPr>
-          <p:cNvPr id="37" name="Google Shape;37;p9"/>
+          <p:cNvPr id="62" name="Google Shape;62;p9"/>
           <p:cNvSpPr txBox="1"/>
           <p:nvPr>
             <p:ph type="title"/>
@@ -3554,8 +6215,8 @@
         </p:nvSpPr>
         <p:spPr>
           <a:xfrm>
-            <a:off x="265500" y="1233175"/>
-            <a:ext cx="4045200" cy="1482300"/>
+            <a:off x="265500" y="1151100"/>
+            <a:ext cx="4045200" cy="1564500"/>
           </a:xfrm>
           <a:prstGeom prst="rect">
             <a:avLst/>
@@ -3671,7 +6332,7 @@
       </p:sp>
       <p:sp>
         <p:nvSpPr>
-          <p:cNvPr id="38" name="Google Shape;38;p9"/>
+          <p:cNvPr id="63" name="Google Shape;63;p9"/>
           <p:cNvSpPr txBox="1"/>
           <p:nvPr>
             <p:ph idx="1" type="subTitle"/>
@@ -3679,8 +6340,8 @@
         </p:nvSpPr>
         <p:spPr>
           <a:xfrm>
-            <a:off x="265500" y="2803075"/>
-            <a:ext cx="4045200" cy="1235100"/>
+            <a:off x="265500" y="2769001"/>
+            <a:ext cx="4045200" cy="1269300"/>
           </a:xfrm>
           <a:prstGeom prst="rect">
             <a:avLst/>
@@ -3823,7 +6484,7 @@
       </p:sp>
       <p:sp>
         <p:nvSpPr>
-          <p:cNvPr id="39" name="Google Shape;39;p9"/>
+          <p:cNvPr id="64" name="Google Shape;64;p9"/>
           <p:cNvSpPr txBox="1"/>
           <p:nvPr>
             <p:ph idx="2" type="body"/>
@@ -3831,7 +6492,7 @@
         </p:nvSpPr>
         <p:spPr>
           <a:xfrm>
-            <a:off x="4939500" y="724075"/>
+            <a:off x="4939500" y="724200"/>
             <a:ext cx="3837000" cy="3695100"/>
           </a:xfrm>
           <a:prstGeom prst="rect">
@@ -3850,9 +6511,16 @@
               <a:spcAft>
                 <a:spcPts val="0"/>
               </a:spcAft>
+              <a:buClr>
+                <a:schemeClr val="lt1"/>
+              </a:buClr>
               <a:buSzPts val="1800"/>
               <a:buChar char="●"/>
-              <a:defRPr/>
+              <a:defRPr>
+                <a:solidFill>
+                  <a:schemeClr val="lt1"/>
+                </a:solidFill>
+              </a:defRPr>
             </a:lvl1pPr>
             <a:lvl2pPr indent="-317500" lvl="1" marL="914400">
               <a:spcBef>
@@ -3861,9 +6529,16 @@
               <a:spcAft>
                 <a:spcPts val="0"/>
               </a:spcAft>
+              <a:buClr>
+                <a:schemeClr val="lt1"/>
+              </a:buClr>
               <a:buSzPts val="1400"/>
               <a:buChar char="○"/>
-              <a:defRPr/>
+              <a:defRPr>
+                <a:solidFill>
+                  <a:schemeClr val="lt1"/>
+                </a:solidFill>
+              </a:defRPr>
             </a:lvl2pPr>
             <a:lvl3pPr indent="-317500" lvl="2" marL="1371600">
               <a:spcBef>
@@ -3872,9 +6547,16 @@
               <a:spcAft>
                 <a:spcPts val="0"/>
               </a:spcAft>
+              <a:buClr>
+                <a:schemeClr val="lt1"/>
+              </a:buClr>
               <a:buSzPts val="1400"/>
               <a:buChar char="■"/>
-              <a:defRPr/>
+              <a:defRPr>
+                <a:solidFill>
+                  <a:schemeClr val="lt1"/>
+                </a:solidFill>
+              </a:defRPr>
             </a:lvl3pPr>
             <a:lvl4pPr indent="-317500" lvl="3" marL="1828800">
               <a:spcBef>
@@ -3883,9 +6565,16 @@
               <a:spcAft>
                 <a:spcPts val="0"/>
               </a:spcAft>
+              <a:buClr>
+                <a:schemeClr val="lt1"/>
+              </a:buClr>
               <a:buSzPts val="1400"/>
               <a:buChar char="●"/>
-              <a:defRPr/>
+              <a:defRPr>
+                <a:solidFill>
+                  <a:schemeClr val="lt1"/>
+                </a:solidFill>
+              </a:defRPr>
             </a:lvl4pPr>
             <a:lvl5pPr indent="-317500" lvl="4" marL="2286000">
               <a:spcBef>
@@ -3894,9 +6583,16 @@
               <a:spcAft>
                 <a:spcPts val="0"/>
               </a:spcAft>
+              <a:buClr>
+                <a:schemeClr val="lt1"/>
+              </a:buClr>
               <a:buSzPts val="1400"/>
               <a:buChar char="○"/>
-              <a:defRPr/>
+              <a:defRPr>
+                <a:solidFill>
+                  <a:schemeClr val="lt1"/>
+                </a:solidFill>
+              </a:defRPr>
             </a:lvl5pPr>
             <a:lvl6pPr indent="-317500" lvl="5" marL="2743200">
               <a:spcBef>
@@ -3905,9 +6601,16 @@
               <a:spcAft>
                 <a:spcPts val="0"/>
               </a:spcAft>
+              <a:buClr>
+                <a:schemeClr val="lt1"/>
+              </a:buClr>
               <a:buSzPts val="1400"/>
               <a:buChar char="■"/>
-              <a:defRPr/>
+              <a:defRPr>
+                <a:solidFill>
+                  <a:schemeClr val="lt1"/>
+                </a:solidFill>
+              </a:defRPr>
             </a:lvl6pPr>
             <a:lvl7pPr indent="-317500" lvl="6" marL="3200400">
               <a:spcBef>
@@ -3916,9 +6619,16 @@
               <a:spcAft>
                 <a:spcPts val="0"/>
               </a:spcAft>
+              <a:buClr>
+                <a:schemeClr val="lt1"/>
+              </a:buClr>
               <a:buSzPts val="1400"/>
               <a:buChar char="●"/>
-              <a:defRPr/>
+              <a:defRPr>
+                <a:solidFill>
+                  <a:schemeClr val="lt1"/>
+                </a:solidFill>
+              </a:defRPr>
             </a:lvl7pPr>
             <a:lvl8pPr indent="-317500" lvl="7" marL="3657600">
               <a:spcBef>
@@ -3927,9 +6637,16 @@
               <a:spcAft>
                 <a:spcPts val="0"/>
               </a:spcAft>
+              <a:buClr>
+                <a:schemeClr val="lt1"/>
+              </a:buClr>
               <a:buSzPts val="1400"/>
               <a:buChar char="○"/>
-              <a:defRPr/>
+              <a:defRPr>
+                <a:solidFill>
+                  <a:schemeClr val="lt1"/>
+                </a:solidFill>
+              </a:defRPr>
             </a:lvl8pPr>
             <a:lvl9pPr indent="-317500" lvl="8" marL="4114800">
               <a:spcBef>
@@ -3938,9 +6655,16 @@
               <a:spcAft>
                 <a:spcPts val="0"/>
               </a:spcAft>
+              <a:buClr>
+                <a:schemeClr val="lt1"/>
+              </a:buClr>
               <a:buSzPts val="1400"/>
               <a:buChar char="■"/>
-              <a:defRPr/>
+              <a:defRPr>
+                <a:solidFill>
+                  <a:schemeClr val="lt1"/>
+                </a:solidFill>
+              </a:defRPr>
             </a:lvl9pPr>
           </a:lstStyle>
           <a:p/>
@@ -3948,7 +6672,7 @@
       </p:sp>
       <p:sp>
         <p:nvSpPr>
-          <p:cNvPr id="40" name="Google Shape;40;p9"/>
+          <p:cNvPr id="65" name="Google Shape;65;p9"/>
           <p:cNvSpPr txBox="1"/>
           <p:nvPr>
             <p:ph idx="12" type="sldNum"/>
@@ -3956,7 +6680,7 @@
         </p:nvSpPr>
         <p:spPr>
           <a:xfrm>
-            <a:off x="8472458" y="4663217"/>
+            <a:off x="8460431" y="4651190"/>
             <a:ext cx="548700" cy="393600"/>
           </a:xfrm>
           <a:prstGeom prst="rect">
@@ -4036,7 +6760,7 @@
   <p:cSld name="CAPTION_ONLY">
     <p:spTree>
       <p:nvGrpSpPr>
-        <p:cNvPr id="41" name="Shape 41"/>
+        <p:cNvPr id="66" name="Shape 66"/>
         <p:cNvGrpSpPr/>
         <p:nvPr/>
       </p:nvGrpSpPr>
@@ -4050,7 +6774,7 @@
       </p:grpSpPr>
       <p:sp>
         <p:nvSpPr>
-          <p:cNvPr id="42" name="Google Shape;42;p10"/>
+          <p:cNvPr id="67" name="Google Shape;67;p10"/>
           <p:cNvSpPr txBox="1"/>
           <p:nvPr>
             <p:ph idx="1" type="body"/>
@@ -4058,8 +6782,8 @@
         </p:nvSpPr>
         <p:spPr>
           <a:xfrm>
-            <a:off x="311700" y="4230575"/>
-            <a:ext cx="5998800" cy="605100"/>
+            <a:off x="319500" y="4230575"/>
+            <a:ext cx="5998800" cy="598800"/>
           </a:xfrm>
           <a:prstGeom prst="rect">
             <a:avLst/>
@@ -4090,7 +6814,7 @@
       </p:sp>
       <p:sp>
         <p:nvSpPr>
-          <p:cNvPr id="43" name="Google Shape;43;p10"/>
+          <p:cNvPr id="68" name="Google Shape;68;p10"/>
           <p:cNvSpPr txBox="1"/>
           <p:nvPr>
             <p:ph idx="12" type="sldNum"/>
@@ -4098,7 +6822,7 @@
         </p:nvSpPr>
         <p:spPr>
           <a:xfrm>
-            <a:off x="8472458" y="4663217"/>
+            <a:off x="8460431" y="4651190"/>
             <a:ext cx="548700" cy="393600"/>
           </a:xfrm>
           <a:prstGeom prst="rect">
@@ -4112,39 +6836,75 @@
           <a:lstStyle>
             <a:lvl1pPr lvl="0">
               <a:buNone/>
-              <a:defRPr/>
+              <a:defRPr>
+                <a:solidFill>
+                  <a:schemeClr val="dk2"/>
+                </a:solidFill>
+              </a:defRPr>
             </a:lvl1pPr>
             <a:lvl2pPr lvl="1">
               <a:buNone/>
-              <a:defRPr/>
+              <a:defRPr>
+                <a:solidFill>
+                  <a:schemeClr val="dk2"/>
+                </a:solidFill>
+              </a:defRPr>
             </a:lvl2pPr>
             <a:lvl3pPr lvl="2">
               <a:buNone/>
-              <a:defRPr/>
+              <a:defRPr>
+                <a:solidFill>
+                  <a:schemeClr val="dk2"/>
+                </a:solidFill>
+              </a:defRPr>
             </a:lvl3pPr>
             <a:lvl4pPr lvl="3">
               <a:buNone/>
-              <a:defRPr/>
+              <a:defRPr>
+                <a:solidFill>
+                  <a:schemeClr val="dk2"/>
+                </a:solidFill>
+              </a:defRPr>
             </a:lvl4pPr>
             <a:lvl5pPr lvl="4">
               <a:buNone/>
-              <a:defRPr/>
+              <a:defRPr>
+                <a:solidFill>
+                  <a:schemeClr val="dk2"/>
+                </a:solidFill>
+              </a:defRPr>
             </a:lvl5pPr>
             <a:lvl6pPr lvl="5">
               <a:buNone/>
-              <a:defRPr/>
+              <a:defRPr>
+                <a:solidFill>
+                  <a:schemeClr val="dk2"/>
+                </a:solidFill>
+              </a:defRPr>
             </a:lvl6pPr>
             <a:lvl7pPr lvl="6">
               <a:buNone/>
-              <a:defRPr/>
+              <a:defRPr>
+                <a:solidFill>
+                  <a:schemeClr val="dk2"/>
+                </a:solidFill>
+              </a:defRPr>
             </a:lvl7pPr>
             <a:lvl8pPr lvl="7">
               <a:buNone/>
-              <a:defRPr/>
+              <a:defRPr>
+                <a:solidFill>
+                  <a:schemeClr val="dk2"/>
+                </a:solidFill>
+              </a:defRPr>
             </a:lvl8pPr>
             <a:lvl9pPr lvl="8">
               <a:buNone/>
-              <a:defRPr/>
+              <a:defRPr>
+                <a:solidFill>
+                  <a:schemeClr val="dk2"/>
+                </a:solidFill>
+              </a:defRPr>
             </a:lvl9pPr>
           </a:lstStyle>
           <a:p>
@@ -4175,7 +6935,7 @@
 
 <file path=ppt/slideMasters/slideMaster1.xml><?xml version="1.0" encoding="utf-8"?>
 <p:sldMaster xmlns:a="http://schemas.openxmlformats.org/drawingml/2006/main" xmlns:r="http://schemas.openxmlformats.org/officeDocument/2006/relationships" xmlns:mc="http://schemas.openxmlformats.org/markup-compatibility/2006" xmlns:mv="urn:schemas-microsoft-com:mac:vml" xmlns:p="http://schemas.openxmlformats.org/presentationml/2006/main" xmlns:c="http://schemas.openxmlformats.org/drawingml/2006/chart" xmlns:dgm="http://schemas.openxmlformats.org/drawingml/2006/diagram" xmlns:o="urn:schemas-microsoft-com:office:office" xmlns:v="urn:schemas-microsoft-com:vml" xmlns:pvml="urn:schemas-microsoft-com:office:powerpoint" xmlns:com="http://schemas.openxmlformats.org/drawingml/2006/compatibility" xmlns:p14="http://schemas.microsoft.com/office/powerpoint/2010/main" xmlns:p15="http://schemas.microsoft.com/office/powerpoint/2012/main" xmlns:ahyp="http://schemas.microsoft.com/office/drawing/2018/hyperlinkcolor">
-  <p:cSld name="simple-light-2">
+  <p:cSld name="geometric">
     <p:bg>
       <p:bgPr>
         <a:solidFill>
@@ -4207,8 +6967,8 @@
         </p:nvSpPr>
         <p:spPr>
           <a:xfrm>
-            <a:off x="311700" y="445025"/>
-            <a:ext cx="8520600" cy="572700"/>
+            <a:off x="311700" y="410000"/>
+            <a:ext cx="8520600" cy="607800"/>
           </a:xfrm>
           <a:prstGeom prst="rect">
             <a:avLst/>
@@ -4233,12 +6993,17 @@
               <a:buClr>
                 <a:schemeClr val="dk1"/>
               </a:buClr>
-              <a:buSzPts val="2800"/>
-              <a:buNone/>
-              <a:defRPr sz="2800">
+              <a:buSzPts val="3000"/>
+              <a:buFont typeface="Roboto"/>
+              <a:buNone/>
+              <a:defRPr sz="3000">
                 <a:solidFill>
                   <a:schemeClr val="dk1"/>
                 </a:solidFill>
+                <a:latin typeface="Roboto"/>
+                <a:ea typeface="Roboto"/>
+                <a:cs typeface="Roboto"/>
+                <a:sym typeface="Roboto"/>
               </a:defRPr>
             </a:lvl1pPr>
             <a:lvl2pPr lvl="1">
@@ -4251,12 +7016,17 @@
               <a:buClr>
                 <a:schemeClr val="dk1"/>
               </a:buClr>
-              <a:buSzPts val="2800"/>
-              <a:buNone/>
-              <a:defRPr sz="2800">
+              <a:buSzPts val="3000"/>
+              <a:buFont typeface="Roboto"/>
+              <a:buNone/>
+              <a:defRPr sz="3000">
                 <a:solidFill>
                   <a:schemeClr val="dk1"/>
                 </a:solidFill>
+                <a:latin typeface="Roboto"/>
+                <a:ea typeface="Roboto"/>
+                <a:cs typeface="Roboto"/>
+                <a:sym typeface="Roboto"/>
               </a:defRPr>
             </a:lvl2pPr>
             <a:lvl3pPr lvl="2">
@@ -4269,12 +7039,17 @@
               <a:buClr>
                 <a:schemeClr val="dk1"/>
               </a:buClr>
-              <a:buSzPts val="2800"/>
-              <a:buNone/>
-              <a:defRPr sz="2800">
+              <a:buSzPts val="3000"/>
+              <a:buFont typeface="Roboto"/>
+              <a:buNone/>
+              <a:defRPr sz="3000">
                 <a:solidFill>
                   <a:schemeClr val="dk1"/>
                 </a:solidFill>
+                <a:latin typeface="Roboto"/>
+                <a:ea typeface="Roboto"/>
+                <a:cs typeface="Roboto"/>
+                <a:sym typeface="Roboto"/>
               </a:defRPr>
             </a:lvl3pPr>
             <a:lvl4pPr lvl="3">
@@ -4287,12 +7062,17 @@
               <a:buClr>
                 <a:schemeClr val="dk1"/>
               </a:buClr>
-              <a:buSzPts val="2800"/>
-              <a:buNone/>
-              <a:defRPr sz="2800">
+              <a:buSzPts val="3000"/>
+              <a:buFont typeface="Roboto"/>
+              <a:buNone/>
+              <a:defRPr sz="3000">
                 <a:solidFill>
                   <a:schemeClr val="dk1"/>
                 </a:solidFill>
+                <a:latin typeface="Roboto"/>
+                <a:ea typeface="Roboto"/>
+                <a:cs typeface="Roboto"/>
+                <a:sym typeface="Roboto"/>
               </a:defRPr>
             </a:lvl4pPr>
             <a:lvl5pPr lvl="4">
@@ -4305,12 +7085,17 @@
               <a:buClr>
                 <a:schemeClr val="dk1"/>
               </a:buClr>
-              <a:buSzPts val="2800"/>
-              <a:buNone/>
-              <a:defRPr sz="2800">
+              <a:buSzPts val="3000"/>
+              <a:buFont typeface="Roboto"/>
+              <a:buNone/>
+              <a:defRPr sz="3000">
                 <a:solidFill>
                   <a:schemeClr val="dk1"/>
                 </a:solidFill>
+                <a:latin typeface="Roboto"/>
+                <a:ea typeface="Roboto"/>
+                <a:cs typeface="Roboto"/>
+                <a:sym typeface="Roboto"/>
               </a:defRPr>
             </a:lvl5pPr>
             <a:lvl6pPr lvl="5">
@@ -4323,12 +7108,17 @@
               <a:buClr>
                 <a:schemeClr val="dk1"/>
               </a:buClr>
-              <a:buSzPts val="2800"/>
-              <a:buNone/>
-              <a:defRPr sz="2800">
+              <a:buSzPts val="3000"/>
+              <a:buFont typeface="Roboto"/>
+              <a:buNone/>
+              <a:defRPr sz="3000">
                 <a:solidFill>
                   <a:schemeClr val="dk1"/>
                 </a:solidFill>
+                <a:latin typeface="Roboto"/>
+                <a:ea typeface="Roboto"/>
+                <a:cs typeface="Roboto"/>
+                <a:sym typeface="Roboto"/>
               </a:defRPr>
             </a:lvl6pPr>
             <a:lvl7pPr lvl="6">
@@ -4341,12 +7131,17 @@
               <a:buClr>
                 <a:schemeClr val="dk1"/>
               </a:buClr>
-              <a:buSzPts val="2800"/>
-              <a:buNone/>
-              <a:defRPr sz="2800">
+              <a:buSzPts val="3000"/>
+              <a:buFont typeface="Roboto"/>
+              <a:buNone/>
+              <a:defRPr sz="3000">
                 <a:solidFill>
                   <a:schemeClr val="dk1"/>
                 </a:solidFill>
+                <a:latin typeface="Roboto"/>
+                <a:ea typeface="Roboto"/>
+                <a:cs typeface="Roboto"/>
+                <a:sym typeface="Roboto"/>
               </a:defRPr>
             </a:lvl7pPr>
             <a:lvl8pPr lvl="7">
@@ -4359,12 +7154,17 @@
               <a:buClr>
                 <a:schemeClr val="dk1"/>
               </a:buClr>
-              <a:buSzPts val="2800"/>
-              <a:buNone/>
-              <a:defRPr sz="2800">
+              <a:buSzPts val="3000"/>
+              <a:buFont typeface="Roboto"/>
+              <a:buNone/>
+              <a:defRPr sz="3000">
                 <a:solidFill>
                   <a:schemeClr val="dk1"/>
                 </a:solidFill>
+                <a:latin typeface="Roboto"/>
+                <a:ea typeface="Roboto"/>
+                <a:cs typeface="Roboto"/>
+                <a:sym typeface="Roboto"/>
               </a:defRPr>
             </a:lvl8pPr>
             <a:lvl9pPr lvl="8">
@@ -4377,12 +7177,17 @@
               <a:buClr>
                 <a:schemeClr val="dk1"/>
               </a:buClr>
-              <a:buSzPts val="2800"/>
-              <a:buNone/>
-              <a:defRPr sz="2800">
+              <a:buSzPts val="3000"/>
+              <a:buFont typeface="Roboto"/>
+              <a:buNone/>
+              <a:defRPr sz="3000">
                 <a:solidFill>
                   <a:schemeClr val="dk1"/>
                 </a:solidFill>
+                <a:latin typeface="Roboto"/>
+                <a:ea typeface="Roboto"/>
+                <a:cs typeface="Roboto"/>
+                <a:sym typeface="Roboto"/>
               </a:defRPr>
             </a:lvl9pPr>
           </a:lstStyle>
@@ -4399,8 +7204,8 @@
         </p:nvSpPr>
         <p:spPr>
           <a:xfrm>
-            <a:off x="311700" y="1152475"/>
-            <a:ext cx="8520600" cy="3416400"/>
+            <a:off x="311700" y="1229875"/>
+            <a:ext cx="8520600" cy="3339000"/>
           </a:xfrm>
           <a:prstGeom prst="rect">
             <a:avLst/>
@@ -4429,11 +7234,16 @@
                 <a:schemeClr val="dk2"/>
               </a:buClr>
               <a:buSzPts val="1800"/>
+              <a:buFont typeface="Roboto"/>
               <a:buChar char="●"/>
               <a:defRPr sz="1800">
                 <a:solidFill>
                   <a:schemeClr val="dk2"/>
                 </a:solidFill>
+                <a:latin typeface="Roboto"/>
+                <a:ea typeface="Roboto"/>
+                <a:cs typeface="Roboto"/>
+                <a:sym typeface="Roboto"/>
               </a:defRPr>
             </a:lvl1pPr>
             <a:lvl2pPr indent="-317500" lvl="1" marL="914400">
@@ -4450,11 +7260,16 @@
                 <a:schemeClr val="dk2"/>
               </a:buClr>
               <a:buSzPts val="1400"/>
+              <a:buFont typeface="Roboto"/>
               <a:buChar char="○"/>
               <a:defRPr>
                 <a:solidFill>
                   <a:schemeClr val="dk2"/>
                 </a:solidFill>
+                <a:latin typeface="Roboto"/>
+                <a:ea typeface="Roboto"/>
+                <a:cs typeface="Roboto"/>
+                <a:sym typeface="Roboto"/>
               </a:defRPr>
             </a:lvl2pPr>
             <a:lvl3pPr indent="-317500" lvl="2" marL="1371600">
@@ -4471,11 +7286,16 @@
                 <a:schemeClr val="dk2"/>
               </a:buClr>
               <a:buSzPts val="1400"/>
+              <a:buFont typeface="Roboto"/>
               <a:buChar char="■"/>
               <a:defRPr>
                 <a:solidFill>
                   <a:schemeClr val="dk2"/>
                 </a:solidFill>
+                <a:latin typeface="Roboto"/>
+                <a:ea typeface="Roboto"/>
+                <a:cs typeface="Roboto"/>
+                <a:sym typeface="Roboto"/>
               </a:defRPr>
             </a:lvl3pPr>
             <a:lvl4pPr indent="-317500" lvl="3" marL="1828800">
@@ -4492,11 +7312,16 @@
                 <a:schemeClr val="dk2"/>
               </a:buClr>
               <a:buSzPts val="1400"/>
+              <a:buFont typeface="Roboto"/>
               <a:buChar char="●"/>
               <a:defRPr>
                 <a:solidFill>
                   <a:schemeClr val="dk2"/>
                 </a:solidFill>
+                <a:latin typeface="Roboto"/>
+                <a:ea typeface="Roboto"/>
+                <a:cs typeface="Roboto"/>
+                <a:sym typeface="Roboto"/>
               </a:defRPr>
             </a:lvl4pPr>
             <a:lvl5pPr indent="-317500" lvl="4" marL="2286000">
@@ -4513,11 +7338,16 @@
                 <a:schemeClr val="dk2"/>
               </a:buClr>
               <a:buSzPts val="1400"/>
+              <a:buFont typeface="Roboto"/>
               <a:buChar char="○"/>
               <a:defRPr>
                 <a:solidFill>
                   <a:schemeClr val="dk2"/>
                 </a:solidFill>
+                <a:latin typeface="Roboto"/>
+                <a:ea typeface="Roboto"/>
+                <a:cs typeface="Roboto"/>
+                <a:sym typeface="Roboto"/>
               </a:defRPr>
             </a:lvl5pPr>
             <a:lvl6pPr indent="-317500" lvl="5" marL="2743200">
@@ -4534,11 +7364,16 @@
                 <a:schemeClr val="dk2"/>
               </a:buClr>
               <a:buSzPts val="1400"/>
+              <a:buFont typeface="Roboto"/>
               <a:buChar char="■"/>
               <a:defRPr>
                 <a:solidFill>
                   <a:schemeClr val="dk2"/>
                 </a:solidFill>
+                <a:latin typeface="Roboto"/>
+                <a:ea typeface="Roboto"/>
+                <a:cs typeface="Roboto"/>
+                <a:sym typeface="Roboto"/>
               </a:defRPr>
             </a:lvl6pPr>
             <a:lvl7pPr indent="-317500" lvl="6" marL="3200400">
@@ -4555,11 +7390,16 @@
                 <a:schemeClr val="dk2"/>
               </a:buClr>
               <a:buSzPts val="1400"/>
+              <a:buFont typeface="Roboto"/>
               <a:buChar char="●"/>
               <a:defRPr>
                 <a:solidFill>
                   <a:schemeClr val="dk2"/>
                 </a:solidFill>
+                <a:latin typeface="Roboto"/>
+                <a:ea typeface="Roboto"/>
+                <a:cs typeface="Roboto"/>
+                <a:sym typeface="Roboto"/>
               </a:defRPr>
             </a:lvl7pPr>
             <a:lvl8pPr indent="-317500" lvl="7" marL="3657600">
@@ -4576,11 +7416,16 @@
                 <a:schemeClr val="dk2"/>
               </a:buClr>
               <a:buSzPts val="1400"/>
+              <a:buFont typeface="Roboto"/>
               <a:buChar char="○"/>
               <a:defRPr>
                 <a:solidFill>
                   <a:schemeClr val="dk2"/>
                 </a:solidFill>
+                <a:latin typeface="Roboto"/>
+                <a:ea typeface="Roboto"/>
+                <a:cs typeface="Roboto"/>
+                <a:sym typeface="Roboto"/>
               </a:defRPr>
             </a:lvl8pPr>
             <a:lvl9pPr indent="-317500" lvl="8" marL="4114800">
@@ -4597,11 +7442,16 @@
                 <a:schemeClr val="dk2"/>
               </a:buClr>
               <a:buSzPts val="1400"/>
+              <a:buFont typeface="Roboto"/>
               <a:buChar char="■"/>
               <a:defRPr>
                 <a:solidFill>
                   <a:schemeClr val="dk2"/>
                 </a:solidFill>
+                <a:latin typeface="Roboto"/>
+                <a:ea typeface="Roboto"/>
+                <a:cs typeface="Roboto"/>
+                <a:sym typeface="Roboto"/>
               </a:defRPr>
             </a:lvl9pPr>
           </a:lstStyle>
@@ -4618,7 +7468,7 @@
         </p:nvSpPr>
         <p:spPr>
           <a:xfrm>
-            <a:off x="8472458" y="4663217"/>
+            <a:off x="8460431" y="4651190"/>
             <a:ext cx="548700" cy="393600"/>
           </a:xfrm>
           <a:prstGeom prst="rect">
@@ -4638,72 +7488,108 @@
               <a:buNone/>
               <a:defRPr sz="1000">
                 <a:solidFill>
-                  <a:schemeClr val="dk2"/>
-                </a:solidFill>
+                  <a:schemeClr val="lt1"/>
+                </a:solidFill>
+                <a:latin typeface="Roboto"/>
+                <a:ea typeface="Roboto"/>
+                <a:cs typeface="Roboto"/>
+                <a:sym typeface="Roboto"/>
               </a:defRPr>
             </a:lvl1pPr>
             <a:lvl2pPr lvl="1" algn="r">
               <a:buNone/>
               <a:defRPr sz="1000">
                 <a:solidFill>
-                  <a:schemeClr val="dk2"/>
-                </a:solidFill>
+                  <a:schemeClr val="lt1"/>
+                </a:solidFill>
+                <a:latin typeface="Roboto"/>
+                <a:ea typeface="Roboto"/>
+                <a:cs typeface="Roboto"/>
+                <a:sym typeface="Roboto"/>
               </a:defRPr>
             </a:lvl2pPr>
             <a:lvl3pPr lvl="2" algn="r">
               <a:buNone/>
               <a:defRPr sz="1000">
                 <a:solidFill>
-                  <a:schemeClr val="dk2"/>
-                </a:solidFill>
+                  <a:schemeClr val="lt1"/>
+                </a:solidFill>
+                <a:latin typeface="Roboto"/>
+                <a:ea typeface="Roboto"/>
+                <a:cs typeface="Roboto"/>
+                <a:sym typeface="Roboto"/>
               </a:defRPr>
             </a:lvl3pPr>
             <a:lvl4pPr lvl="3" algn="r">
               <a:buNone/>
               <a:defRPr sz="1000">
                 <a:solidFill>
-                  <a:schemeClr val="dk2"/>
-                </a:solidFill>
+                  <a:schemeClr val="lt1"/>
+                </a:solidFill>
+                <a:latin typeface="Roboto"/>
+                <a:ea typeface="Roboto"/>
+                <a:cs typeface="Roboto"/>
+                <a:sym typeface="Roboto"/>
               </a:defRPr>
             </a:lvl4pPr>
             <a:lvl5pPr lvl="4" algn="r">
               <a:buNone/>
               <a:defRPr sz="1000">
                 <a:solidFill>
-                  <a:schemeClr val="dk2"/>
-                </a:solidFill>
+                  <a:schemeClr val="lt1"/>
+                </a:solidFill>
+                <a:latin typeface="Roboto"/>
+                <a:ea typeface="Roboto"/>
+                <a:cs typeface="Roboto"/>
+                <a:sym typeface="Roboto"/>
               </a:defRPr>
             </a:lvl5pPr>
             <a:lvl6pPr lvl="5" algn="r">
               <a:buNone/>
               <a:defRPr sz="1000">
                 <a:solidFill>
-                  <a:schemeClr val="dk2"/>
-                </a:solidFill>
+                  <a:schemeClr val="lt1"/>
+                </a:solidFill>
+                <a:latin typeface="Roboto"/>
+                <a:ea typeface="Roboto"/>
+                <a:cs typeface="Roboto"/>
+                <a:sym typeface="Roboto"/>
               </a:defRPr>
             </a:lvl6pPr>
             <a:lvl7pPr lvl="6" algn="r">
               <a:buNone/>
               <a:defRPr sz="1000">
                 <a:solidFill>
-                  <a:schemeClr val="dk2"/>
-                </a:solidFill>
+                  <a:schemeClr val="lt1"/>
+                </a:solidFill>
+                <a:latin typeface="Roboto"/>
+                <a:ea typeface="Roboto"/>
+                <a:cs typeface="Roboto"/>
+                <a:sym typeface="Roboto"/>
               </a:defRPr>
             </a:lvl7pPr>
             <a:lvl8pPr lvl="7" algn="r">
               <a:buNone/>
               <a:defRPr sz="1000">
                 <a:solidFill>
-                  <a:schemeClr val="dk2"/>
-                </a:solidFill>
+                  <a:schemeClr val="lt1"/>
+                </a:solidFill>
+                <a:latin typeface="Roboto"/>
+                <a:ea typeface="Roboto"/>
+                <a:cs typeface="Roboto"/>
+                <a:sym typeface="Roboto"/>
               </a:defRPr>
             </a:lvl8pPr>
             <a:lvl9pPr lvl="8" algn="r">
               <a:buNone/>
               <a:defRPr sz="1000">
                 <a:solidFill>
-                  <a:schemeClr val="dk2"/>
-                </a:solidFill>
+                  <a:schemeClr val="lt1"/>
+                </a:solidFill>
+                <a:latin typeface="Roboto"/>
+                <a:ea typeface="Roboto"/>
+                <a:cs typeface="Roboto"/>
+                <a:sym typeface="Roboto"/>
               </a:defRPr>
             </a:lvl9pPr>
           </a:lstStyle>
@@ -5439,7 +8325,7 @@
   <p:cSld>
     <p:spTree>
       <p:nvGrpSpPr>
-        <p:cNvPr id="53" name="Shape 53"/>
+        <p:cNvPr id="84" name="Shape 84"/>
         <p:cNvGrpSpPr/>
         <p:nvPr/>
       </p:nvGrpSpPr>
@@ -5453,7 +8339,7 @@
       </p:grpSpPr>
       <p:sp>
         <p:nvSpPr>
-          <p:cNvPr id="54" name="Google Shape;54;p13"/>
+          <p:cNvPr id="85" name="Google Shape;85;p13"/>
           <p:cNvSpPr txBox="1"/>
           <p:nvPr>
             <p:ph type="ctrTitle"/>
@@ -5461,8 +8347,8 @@
         </p:nvSpPr>
         <p:spPr>
           <a:xfrm>
-            <a:off x="311708" y="744575"/>
-            <a:ext cx="8520600" cy="2052600"/>
+            <a:off x="598100" y="1775222"/>
+            <a:ext cx="8222100" cy="838800"/>
           </a:xfrm>
           <a:prstGeom prst="rect">
             <a:avLst/>
@@ -5470,11 +8356,11 @@
         </p:spPr>
         <p:txBody>
           <a:bodyPr anchorCtr="0" anchor="b" bIns="91425" lIns="91425" spcFirstLastPara="1" rIns="91425" wrap="square" tIns="91425">
-            <a:normAutofit/>
+            <a:normAutofit fontScale="90000"/>
           </a:bodyPr>
           <a:lstStyle/>
           <a:p>
-            <a:pPr indent="0" lvl="0" marL="0" rtl="0" algn="ctr">
+            <a:pPr indent="0" lvl="0" marL="0" rtl="0" algn="l">
               <a:spcBef>
                 <a:spcPts val="0"/>
               </a:spcBef>
@@ -5484,7 +8370,8 @@
               <a:buNone/>
             </a:pPr>
             <a:r>
-              <a:t/>
+              <a:rPr lang="es"/>
+              <a:t>MediTriage – Plataforma de Citas Médicas con Triage IA</a:t>
             </a:r>
             <a:endParaRPr/>
           </a:p>
@@ -5492,7 +8379,7 @@
       </p:sp>
       <p:sp>
         <p:nvSpPr>
-          <p:cNvPr id="55" name="Google Shape;55;p13"/>
+          <p:cNvPr id="86" name="Google Shape;86;p13"/>
           <p:cNvSpPr txBox="1"/>
           <p:nvPr>
             <p:ph idx="1" type="subTitle"/>
@@ -5500,8 +8387,551 @@
         </p:nvSpPr>
         <p:spPr>
           <a:xfrm>
-            <a:off x="311700" y="2834125"/>
-            <a:ext cx="8520600" cy="792600"/>
+            <a:off x="598088" y="2715913"/>
+            <a:ext cx="8222100" cy="432900"/>
+          </a:xfrm>
+          <a:prstGeom prst="rect">
+            <a:avLst/>
+          </a:prstGeom>
+        </p:spPr>
+        <p:txBody>
+          <a:bodyPr anchorCtr="0" anchor="t" bIns="91425" lIns="91425" spcFirstLastPara="1" rIns="91425" wrap="square" tIns="91425">
+            <a:normAutofit fontScale="92500" lnSpcReduction="20000"/>
+          </a:bodyPr>
+          <a:lstStyle/>
+          <a:p>
+            <a:pPr indent="0" lvl="0" marL="0" rtl="0" algn="l">
+              <a:spcBef>
+                <a:spcPts val="0"/>
+              </a:spcBef>
+              <a:spcAft>
+                <a:spcPts val="0"/>
+              </a:spcAft>
+              <a:buNone/>
+            </a:pPr>
+            <a:r>
+              <a:rPr lang="es"/>
+              <a:t>Proyecto APT – Fase 1</a:t>
+            </a:r>
+            <a:endParaRPr/>
+          </a:p>
+        </p:txBody>
+      </p:sp>
+      <p:sp>
+        <p:nvSpPr>
+          <p:cNvPr id="87" name="Google Shape;87;p13"/>
+          <p:cNvSpPr txBox="1"/>
+          <p:nvPr/>
+        </p:nvSpPr>
+        <p:spPr>
+          <a:xfrm>
+            <a:off x="598100" y="3199575"/>
+            <a:ext cx="3000000" cy="1154400"/>
+          </a:xfrm>
+          <a:prstGeom prst="rect">
+            <a:avLst/>
+          </a:prstGeom>
+          <a:noFill/>
+          <a:ln>
+            <a:noFill/>
+          </a:ln>
+        </p:spPr>
+        <p:txBody>
+          <a:bodyPr anchorCtr="0" anchor="ctr" bIns="91425" lIns="91425" spcFirstLastPara="1" rIns="91425" wrap="square" tIns="91425">
+            <a:spAutoFit/>
+          </a:bodyPr>
+          <a:lstStyle/>
+          <a:p>
+            <a:pPr indent="0" lvl="0" marL="0" marR="0" rtl="0" algn="l">
+              <a:lnSpc>
+                <a:spcPct val="100000"/>
+              </a:lnSpc>
+              <a:spcBef>
+                <a:spcPts val="0"/>
+              </a:spcBef>
+              <a:spcAft>
+                <a:spcPts val="0"/>
+              </a:spcAft>
+              <a:buNone/>
+            </a:pPr>
+            <a:r>
+              <a:rPr lang="es" sz="2100">
+                <a:solidFill>
+                  <a:schemeClr val="lt1"/>
+                </a:solidFill>
+                <a:latin typeface="Roboto"/>
+                <a:ea typeface="Roboto"/>
+                <a:cs typeface="Roboto"/>
+                <a:sym typeface="Roboto"/>
+              </a:rPr>
+              <a:t>Autores:</a:t>
+            </a:r>
+            <a:endParaRPr sz="2100">
+              <a:solidFill>
+                <a:schemeClr val="lt1"/>
+              </a:solidFill>
+              <a:latin typeface="Roboto"/>
+              <a:ea typeface="Roboto"/>
+              <a:cs typeface="Roboto"/>
+              <a:sym typeface="Roboto"/>
+            </a:endParaRPr>
+          </a:p>
+          <a:p>
+            <a:pPr indent="-361950" lvl="0" marL="457200" marR="0" rtl="0" algn="l">
+              <a:lnSpc>
+                <a:spcPct val="100000"/>
+              </a:lnSpc>
+              <a:spcBef>
+                <a:spcPts val="0"/>
+              </a:spcBef>
+              <a:spcAft>
+                <a:spcPts val="0"/>
+              </a:spcAft>
+              <a:buClr>
+                <a:schemeClr val="lt1"/>
+              </a:buClr>
+              <a:buSzPts val="2100"/>
+              <a:buFont typeface="Roboto"/>
+              <a:buChar char="●"/>
+            </a:pPr>
+            <a:r>
+              <a:rPr lang="es" sz="2100">
+                <a:solidFill>
+                  <a:schemeClr val="lt1"/>
+                </a:solidFill>
+                <a:latin typeface="Roboto"/>
+                <a:ea typeface="Roboto"/>
+                <a:cs typeface="Roboto"/>
+                <a:sym typeface="Roboto"/>
+              </a:rPr>
+              <a:t>Raúl Benavides</a:t>
+            </a:r>
+            <a:endParaRPr sz="2100">
+              <a:solidFill>
+                <a:schemeClr val="lt1"/>
+              </a:solidFill>
+              <a:latin typeface="Roboto"/>
+              <a:ea typeface="Roboto"/>
+              <a:cs typeface="Roboto"/>
+              <a:sym typeface="Roboto"/>
+            </a:endParaRPr>
+          </a:p>
+          <a:p>
+            <a:pPr indent="-361950" lvl="0" marL="457200" marR="0" rtl="0" algn="l">
+              <a:lnSpc>
+                <a:spcPct val="100000"/>
+              </a:lnSpc>
+              <a:spcBef>
+                <a:spcPts val="0"/>
+              </a:spcBef>
+              <a:spcAft>
+                <a:spcPts val="0"/>
+              </a:spcAft>
+              <a:buClr>
+                <a:schemeClr val="lt1"/>
+              </a:buClr>
+              <a:buSzPts val="2100"/>
+              <a:buFont typeface="Roboto"/>
+              <a:buChar char="●"/>
+            </a:pPr>
+            <a:r>
+              <a:rPr lang="es" sz="2100">
+                <a:solidFill>
+                  <a:schemeClr val="lt1"/>
+                </a:solidFill>
+                <a:latin typeface="Roboto"/>
+                <a:ea typeface="Roboto"/>
+                <a:cs typeface="Roboto"/>
+                <a:sym typeface="Roboto"/>
+              </a:rPr>
+              <a:t>Matias Cuevas</a:t>
+            </a:r>
+            <a:endParaRPr sz="2100">
+              <a:solidFill>
+                <a:schemeClr val="lt1"/>
+              </a:solidFill>
+              <a:latin typeface="Roboto"/>
+              <a:ea typeface="Roboto"/>
+              <a:cs typeface="Roboto"/>
+              <a:sym typeface="Roboto"/>
+            </a:endParaRPr>
+          </a:p>
+        </p:txBody>
+      </p:sp>
+      <p:pic>
+        <p:nvPicPr>
+          <p:cNvPr id="88" name="Google Shape;88;p13"/>
+          <p:cNvPicPr preferRelativeResize="0"/>
+          <p:nvPr/>
+        </p:nvPicPr>
+        <p:blipFill>
+          <a:blip r:embed="rId3">
+            <a:alphaModFix/>
+          </a:blip>
+          <a:stretch>
+            <a:fillRect/>
+          </a:stretch>
+        </p:blipFill>
+        <p:spPr>
+          <a:xfrm>
+            <a:off x="4453118" y="3989101"/>
+            <a:ext cx="4690883" cy="1154399"/>
+          </a:xfrm>
+          <a:prstGeom prst="rect">
+            <a:avLst/>
+          </a:prstGeom>
+          <a:noFill/>
+          <a:ln>
+            <a:noFill/>
+          </a:ln>
+        </p:spPr>
+      </p:pic>
+      <p:pic>
+        <p:nvPicPr>
+          <p:cNvPr id="89" name="Google Shape;89;p13"/>
+          <p:cNvPicPr preferRelativeResize="0"/>
+          <p:nvPr/>
+        </p:nvPicPr>
+        <p:blipFill>
+          <a:blip r:embed="rId4">
+            <a:alphaModFix/>
+          </a:blip>
+          <a:stretch>
+            <a:fillRect/>
+          </a:stretch>
+        </p:blipFill>
+        <p:spPr>
+          <a:xfrm>
+            <a:off x="4638725" y="1519925"/>
+            <a:ext cx="4237350" cy="2824900"/>
+          </a:xfrm>
+          <a:prstGeom prst="rect">
+            <a:avLst/>
+          </a:prstGeom>
+          <a:noFill/>
+          <a:ln>
+            <a:noFill/>
+          </a:ln>
+        </p:spPr>
+      </p:pic>
+    </p:spTree>
+  </p:cSld>
+  <p:clrMapOvr>
+    <a:masterClrMapping/>
+  </p:clrMapOvr>
+</p:sld>
+</file>
+
+<file path=ppt/slides/slide10.xml><?xml version="1.0" encoding="utf-8"?>
+<p:sld xmlns:a="http://schemas.openxmlformats.org/drawingml/2006/main" xmlns:r="http://schemas.openxmlformats.org/officeDocument/2006/relationships" xmlns:mc="http://schemas.openxmlformats.org/markup-compatibility/2006" xmlns:mv="urn:schemas-microsoft-com:mac:vml" xmlns:p="http://schemas.openxmlformats.org/presentationml/2006/main" xmlns:c="http://schemas.openxmlformats.org/drawingml/2006/chart" xmlns:dgm="http://schemas.openxmlformats.org/drawingml/2006/diagram" xmlns:o="urn:schemas-microsoft-com:office:office" xmlns:v="urn:schemas-microsoft-com:vml" xmlns:pvml="urn:schemas-microsoft-com:office:powerpoint" xmlns:com="http://schemas.openxmlformats.org/drawingml/2006/compatibility" xmlns:p14="http://schemas.microsoft.com/office/powerpoint/2010/main" xmlns:p15="http://schemas.microsoft.com/office/powerpoint/2012/main" xmlns:ahyp="http://schemas.microsoft.com/office/drawing/2018/hyperlinkcolor">
+  <p:cSld>
+    <p:spTree>
+      <p:nvGrpSpPr>
+        <p:cNvPr id="148" name="Shape 148"/>
+        <p:cNvGrpSpPr/>
+        <p:nvPr/>
+      </p:nvGrpSpPr>
+      <p:grpSpPr>
+        <a:xfrm>
+          <a:off x="0" y="0"/>
+          <a:ext cx="0" cy="0"/>
+          <a:chOff x="0" y="0"/>
+          <a:chExt cx="0" cy="0"/>
+        </a:xfrm>
+      </p:grpSpPr>
+      <p:sp>
+        <p:nvSpPr>
+          <p:cNvPr id="149" name="Google Shape;149;p22"/>
+          <p:cNvSpPr txBox="1"/>
+          <p:nvPr>
+            <p:ph type="title"/>
+          </p:nvPr>
+        </p:nvSpPr>
+        <p:spPr>
+          <a:xfrm>
+            <a:off x="490250" y="526350"/>
+            <a:ext cx="5618700" cy="4090800"/>
+          </a:xfrm>
+          <a:prstGeom prst="rect">
+            <a:avLst/>
+          </a:prstGeom>
+        </p:spPr>
+        <p:txBody>
+          <a:bodyPr anchorCtr="0" anchor="ctr" bIns="91425" lIns="91425" spcFirstLastPara="1" rIns="91425" wrap="square" tIns="91425">
+            <a:normAutofit/>
+          </a:bodyPr>
+          <a:lstStyle/>
+          <a:p>
+            <a:pPr indent="0" lvl="0" marL="0" rtl="0" algn="l">
+              <a:spcBef>
+                <a:spcPts val="0"/>
+              </a:spcBef>
+              <a:spcAft>
+                <a:spcPts val="0"/>
+              </a:spcAft>
+              <a:buNone/>
+            </a:pPr>
+            <a:r>
+              <a:rPr lang="es"/>
+              <a:t>¿</a:t>
+            </a:r>
+            <a:r>
+              <a:rPr lang="es"/>
+              <a:t>Preguntas?</a:t>
+            </a:r>
+            <a:endParaRPr/>
+          </a:p>
+        </p:txBody>
+      </p:sp>
+      <p:sp>
+        <p:nvSpPr>
+          <p:cNvPr id="150" name="Google Shape;150;p22"/>
+          <p:cNvSpPr txBox="1"/>
+          <p:nvPr>
+            <p:ph idx="4294967295" type="body"/>
+          </p:nvPr>
+        </p:nvSpPr>
+        <p:spPr>
+          <a:xfrm>
+            <a:off x="319500" y="4230575"/>
+            <a:ext cx="5998800" cy="598800"/>
+          </a:xfrm>
+          <a:prstGeom prst="rect">
+            <a:avLst/>
+          </a:prstGeom>
+        </p:spPr>
+        <p:txBody>
+          <a:bodyPr anchorCtr="0" anchor="t" bIns="91425" lIns="91425" spcFirstLastPara="1" rIns="91425" wrap="square" tIns="91425">
+            <a:normAutofit fontScale="25000" lnSpcReduction="20000"/>
+          </a:bodyPr>
+          <a:lstStyle/>
+          <a:p>
+            <a:pPr indent="0" lvl="0" marL="0" rtl="0" algn="l">
+              <a:spcBef>
+                <a:spcPts val="0"/>
+              </a:spcBef>
+              <a:spcAft>
+                <a:spcPts val="0"/>
+              </a:spcAft>
+              <a:buNone/>
+            </a:pPr>
+            <a:r>
+              <a:t/>
+            </a:r>
+            <a:endParaRPr/>
+          </a:p>
+          <a:p>
+            <a:pPr indent="0" lvl="0" marL="0" rtl="0" algn="l">
+              <a:spcBef>
+                <a:spcPts val="1200"/>
+              </a:spcBef>
+              <a:spcAft>
+                <a:spcPts val="0"/>
+              </a:spcAft>
+              <a:buNone/>
+            </a:pPr>
+            <a:r>
+              <a:t/>
+            </a:r>
+            <a:endParaRPr/>
+          </a:p>
+          <a:p>
+            <a:pPr indent="0" lvl="0" marL="0" rtl="0" algn="l">
+              <a:spcBef>
+                <a:spcPts val="1200"/>
+              </a:spcBef>
+              <a:spcAft>
+                <a:spcPts val="0"/>
+              </a:spcAft>
+              <a:buNone/>
+            </a:pPr>
+            <a:r>
+              <a:t/>
+            </a:r>
+            <a:endParaRPr/>
+          </a:p>
+          <a:p>
+            <a:pPr indent="0" lvl="0" marL="0" rtl="0" algn="l">
+              <a:spcBef>
+                <a:spcPts val="1200"/>
+              </a:spcBef>
+              <a:spcAft>
+                <a:spcPts val="0"/>
+              </a:spcAft>
+              <a:buNone/>
+            </a:pPr>
+            <a:r>
+              <a:t/>
+            </a:r>
+            <a:endParaRPr/>
+          </a:p>
+          <a:p>
+            <a:pPr indent="0" lvl="0" marL="0" rtl="0" algn="l">
+              <a:spcBef>
+                <a:spcPts val="1200"/>
+              </a:spcBef>
+              <a:spcAft>
+                <a:spcPts val="0"/>
+              </a:spcAft>
+              <a:buNone/>
+            </a:pPr>
+            <a:r>
+              <a:rPr lang="es"/>
+              <a:t>Raul Benavides</a:t>
+            </a:r>
+            <a:endParaRPr/>
+          </a:p>
+          <a:p>
+            <a:pPr indent="0" lvl="0" marL="0" rtl="0" algn="l">
+              <a:spcBef>
+                <a:spcPts val="1200"/>
+              </a:spcBef>
+              <a:spcAft>
+                <a:spcPts val="1200"/>
+              </a:spcAft>
+              <a:buNone/>
+            </a:pPr>
+            <a:r>
+              <a:rPr lang="es"/>
+              <a:t>Matias Cuevas</a:t>
+            </a:r>
+            <a:endParaRPr/>
+          </a:p>
+        </p:txBody>
+      </p:sp>
+      <p:pic>
+        <p:nvPicPr>
+          <p:cNvPr id="151" name="Google Shape;151;p22"/>
+          <p:cNvPicPr preferRelativeResize="0"/>
+          <p:nvPr/>
+        </p:nvPicPr>
+        <p:blipFill>
+          <a:blip r:embed="rId3">
+            <a:alphaModFix/>
+          </a:blip>
+          <a:stretch>
+            <a:fillRect/>
+          </a:stretch>
+        </p:blipFill>
+        <p:spPr>
+          <a:xfrm>
+            <a:off x="3143775" y="3387322"/>
+            <a:ext cx="5944474" cy="1462900"/>
+          </a:xfrm>
+          <a:prstGeom prst="rect">
+            <a:avLst/>
+          </a:prstGeom>
+          <a:noFill/>
+          <a:ln>
+            <a:noFill/>
+          </a:ln>
+        </p:spPr>
+      </p:pic>
+      <p:pic>
+        <p:nvPicPr>
+          <p:cNvPr id="152" name="Google Shape;152;p22"/>
+          <p:cNvPicPr preferRelativeResize="0"/>
+          <p:nvPr/>
+        </p:nvPicPr>
+        <p:blipFill>
+          <a:blip r:embed="rId4">
+            <a:alphaModFix/>
+          </a:blip>
+          <a:stretch>
+            <a:fillRect/>
+          </a:stretch>
+        </p:blipFill>
+        <p:spPr>
+          <a:xfrm>
+            <a:off x="6261350" y="152400"/>
+            <a:ext cx="2730250" cy="1784824"/>
+          </a:xfrm>
+          <a:prstGeom prst="rect">
+            <a:avLst/>
+          </a:prstGeom>
+          <a:noFill/>
+          <a:ln>
+            <a:noFill/>
+          </a:ln>
+        </p:spPr>
+      </p:pic>
+    </p:spTree>
+  </p:cSld>
+  <p:clrMapOvr>
+    <a:masterClrMapping/>
+  </p:clrMapOvr>
+</p:sld>
+</file>
+
+<file path=ppt/slides/slide2.xml><?xml version="1.0" encoding="utf-8"?>
+<p:sld xmlns:a="http://schemas.openxmlformats.org/drawingml/2006/main" xmlns:r="http://schemas.openxmlformats.org/officeDocument/2006/relationships" xmlns:mc="http://schemas.openxmlformats.org/markup-compatibility/2006" xmlns:mv="urn:schemas-microsoft-com:mac:vml" xmlns:p="http://schemas.openxmlformats.org/presentationml/2006/main" xmlns:c="http://schemas.openxmlformats.org/drawingml/2006/chart" xmlns:dgm="http://schemas.openxmlformats.org/drawingml/2006/diagram" xmlns:o="urn:schemas-microsoft-com:office:office" xmlns:v="urn:schemas-microsoft-com:vml" xmlns:pvml="urn:schemas-microsoft-com:office:powerpoint" xmlns:com="http://schemas.openxmlformats.org/drawingml/2006/compatibility" xmlns:p14="http://schemas.microsoft.com/office/powerpoint/2010/main" xmlns:p15="http://schemas.microsoft.com/office/powerpoint/2012/main" xmlns:ahyp="http://schemas.microsoft.com/office/drawing/2018/hyperlinkcolor">
+  <p:cSld>
+    <p:spTree>
+      <p:nvGrpSpPr>
+        <p:cNvPr id="93" name="Shape 93"/>
+        <p:cNvGrpSpPr/>
+        <p:nvPr/>
+      </p:nvGrpSpPr>
+      <p:grpSpPr>
+        <a:xfrm>
+          <a:off x="0" y="0"/>
+          <a:ext cx="0" cy="0"/>
+          <a:chOff x="0" y="0"/>
+          <a:chExt cx="0" cy="0"/>
+        </a:xfrm>
+      </p:grpSpPr>
+      <p:sp>
+        <p:nvSpPr>
+          <p:cNvPr id="94" name="Google Shape;94;p14"/>
+          <p:cNvSpPr txBox="1"/>
+          <p:nvPr>
+            <p:ph type="title"/>
+          </p:nvPr>
+        </p:nvSpPr>
+        <p:spPr>
+          <a:xfrm>
+            <a:off x="311700" y="410000"/>
+            <a:ext cx="8520600" cy="607800"/>
+          </a:xfrm>
+          <a:prstGeom prst="rect">
+            <a:avLst/>
+          </a:prstGeom>
+        </p:spPr>
+        <p:txBody>
+          <a:bodyPr anchorCtr="0" anchor="t" bIns="91425" lIns="91425" spcFirstLastPara="1" rIns="91425" wrap="square" tIns="91425">
+            <a:normAutofit fontScale="90000"/>
+          </a:bodyPr>
+          <a:lstStyle/>
+          <a:p>
+            <a:pPr indent="0" lvl="0" marL="0" rtl="0" algn="l">
+              <a:spcBef>
+                <a:spcPts val="0"/>
+              </a:spcBef>
+              <a:spcAft>
+                <a:spcPts val="0"/>
+              </a:spcAft>
+              <a:buNone/>
+            </a:pPr>
+            <a:r>
+              <a:rPr lang="es"/>
+              <a:t>Contexto y Problema</a:t>
+            </a:r>
+            <a:endParaRPr/>
+          </a:p>
+        </p:txBody>
+      </p:sp>
+      <p:sp>
+        <p:nvSpPr>
+          <p:cNvPr id="95" name="Google Shape;95;p14"/>
+          <p:cNvSpPr txBox="1"/>
+          <p:nvPr>
+            <p:ph idx="1" type="body"/>
+          </p:nvPr>
+        </p:nvSpPr>
+        <p:spPr>
+          <a:xfrm>
+            <a:off x="311700" y="1229875"/>
+            <a:ext cx="8520600" cy="3339000"/>
           </a:xfrm>
           <a:prstGeom prst="rect">
             <a:avLst/>
@@ -5513,12 +8943,66 @@
           </a:bodyPr>
           <a:lstStyle/>
           <a:p>
-            <a:pPr indent="0" lvl="0" marL="0" rtl="0" algn="ctr">
-              <a:spcBef>
-                <a:spcPts val="0"/>
-              </a:spcBef>
-              <a:spcAft>
-                <a:spcPts val="0"/>
+            <a:pPr indent="0" lvl="0" marL="0" rtl="0" algn="l">
+              <a:spcBef>
+                <a:spcPts val="0"/>
+              </a:spcBef>
+              <a:spcAft>
+                <a:spcPts val="0"/>
+              </a:spcAft>
+              <a:buNone/>
+            </a:pPr>
+            <a:r>
+              <a:rPr lang="es"/>
+              <a:t>Sobrecarga y mala orientación en agendas médicas.</a:t>
+            </a:r>
+            <a:br>
+              <a:rPr lang="es"/>
+            </a:br>
+            <a:endParaRPr/>
+          </a:p>
+          <a:p>
+            <a:pPr indent="0" lvl="0" marL="0" rtl="0" algn="l">
+              <a:spcBef>
+                <a:spcPts val="1200"/>
+              </a:spcBef>
+              <a:spcAft>
+                <a:spcPts val="0"/>
+              </a:spcAft>
+              <a:buNone/>
+            </a:pPr>
+            <a:r>
+              <a:rPr lang="es"/>
+              <a:t>Pacientes reservan citas en especialidades incorrectas.</a:t>
+            </a:r>
+            <a:br>
+              <a:rPr lang="es"/>
+            </a:br>
+            <a:endParaRPr/>
+          </a:p>
+          <a:p>
+            <a:pPr indent="0" lvl="0" marL="0" rtl="0" algn="l">
+              <a:spcBef>
+                <a:spcPts val="1200"/>
+              </a:spcBef>
+              <a:spcAft>
+                <a:spcPts val="0"/>
+              </a:spcAft>
+              <a:buNone/>
+            </a:pPr>
+            <a:r>
+              <a:rPr lang="es"/>
+              <a:t>Ineficiencia en la gestión de recursos médicos.</a:t>
+            </a:r>
+            <a:endParaRPr/>
+          </a:p>
+          <a:p>
+            <a:pPr indent="0" lvl="0" marL="0" rtl="0" algn="l">
+              <a:spcBef>
+                <a:spcPts val="1200"/>
+              </a:spcBef>
+              <a:spcAft>
+                <a:spcPts val="1200"/>
               </a:spcAft>
               <a:buNone/>
             </a:pPr>
@@ -5529,6 +9013,2846 @@
           </a:p>
         </p:txBody>
       </p:sp>
+      <p:pic>
+        <p:nvPicPr>
+          <p:cNvPr id="96" name="Google Shape;96;p14"/>
+          <p:cNvPicPr preferRelativeResize="0"/>
+          <p:nvPr/>
+        </p:nvPicPr>
+        <p:blipFill>
+          <a:blip r:embed="rId3">
+            <a:alphaModFix/>
+          </a:blip>
+          <a:stretch>
+            <a:fillRect/>
+          </a:stretch>
+        </p:blipFill>
+        <p:spPr>
+          <a:xfrm>
+            <a:off x="5871700" y="0"/>
+            <a:ext cx="3201425" cy="3201425"/>
+          </a:xfrm>
+          <a:prstGeom prst="rect">
+            <a:avLst/>
+          </a:prstGeom>
+          <a:noFill/>
+          <a:ln>
+            <a:noFill/>
+          </a:ln>
+        </p:spPr>
+      </p:pic>
+    </p:spTree>
+  </p:cSld>
+  <p:clrMapOvr>
+    <a:masterClrMapping/>
+  </p:clrMapOvr>
+</p:sld>
+</file>
+
+<file path=ppt/slides/slide3.xml><?xml version="1.0" encoding="utf-8"?>
+<p:sld xmlns:a="http://schemas.openxmlformats.org/drawingml/2006/main" xmlns:r="http://schemas.openxmlformats.org/officeDocument/2006/relationships" xmlns:mc="http://schemas.openxmlformats.org/markup-compatibility/2006" xmlns:mv="urn:schemas-microsoft-com:mac:vml" xmlns:p="http://schemas.openxmlformats.org/presentationml/2006/main" xmlns:c="http://schemas.openxmlformats.org/drawingml/2006/chart" xmlns:dgm="http://schemas.openxmlformats.org/drawingml/2006/diagram" xmlns:o="urn:schemas-microsoft-com:office:office" xmlns:v="urn:schemas-microsoft-com:vml" xmlns:pvml="urn:schemas-microsoft-com:office:powerpoint" xmlns:com="http://schemas.openxmlformats.org/drawingml/2006/compatibility" xmlns:p14="http://schemas.microsoft.com/office/powerpoint/2010/main" xmlns:p15="http://schemas.microsoft.com/office/powerpoint/2012/main" xmlns:ahyp="http://schemas.microsoft.com/office/drawing/2018/hyperlinkcolor">
+  <p:cSld>
+    <p:spTree>
+      <p:nvGrpSpPr>
+        <p:cNvPr id="100" name="Shape 100"/>
+        <p:cNvGrpSpPr/>
+        <p:nvPr/>
+      </p:nvGrpSpPr>
+      <p:grpSpPr>
+        <a:xfrm>
+          <a:off x="0" y="0"/>
+          <a:ext cx="0" cy="0"/>
+          <a:chOff x="0" y="0"/>
+          <a:chExt cx="0" cy="0"/>
+        </a:xfrm>
+      </p:grpSpPr>
+      <p:sp>
+        <p:nvSpPr>
+          <p:cNvPr id="101" name="Google Shape;101;p15"/>
+          <p:cNvSpPr txBox="1"/>
+          <p:nvPr>
+            <p:ph type="title"/>
+          </p:nvPr>
+        </p:nvSpPr>
+        <p:spPr>
+          <a:xfrm>
+            <a:off x="311700" y="410000"/>
+            <a:ext cx="8520600" cy="607800"/>
+          </a:xfrm>
+          <a:prstGeom prst="rect">
+            <a:avLst/>
+          </a:prstGeom>
+        </p:spPr>
+        <p:txBody>
+          <a:bodyPr anchorCtr="0" anchor="t" bIns="91425" lIns="91425" spcFirstLastPara="1" rIns="91425" wrap="square" tIns="91425">
+            <a:normAutofit fontScale="90000"/>
+          </a:bodyPr>
+          <a:lstStyle/>
+          <a:p>
+            <a:pPr indent="0" lvl="0" marL="0" rtl="0" algn="l">
+              <a:spcBef>
+                <a:spcPts val="0"/>
+              </a:spcBef>
+              <a:spcAft>
+                <a:spcPts val="0"/>
+              </a:spcAft>
+              <a:buNone/>
+            </a:pPr>
+            <a:r>
+              <a:rPr lang="es"/>
+              <a:t>Relevancia del Proyecto</a:t>
+            </a:r>
+            <a:endParaRPr/>
+          </a:p>
+        </p:txBody>
+      </p:sp>
+      <p:sp>
+        <p:nvSpPr>
+          <p:cNvPr id="102" name="Google Shape;102;p15"/>
+          <p:cNvSpPr txBox="1"/>
+          <p:nvPr>
+            <p:ph idx="1" type="body"/>
+          </p:nvPr>
+        </p:nvSpPr>
+        <p:spPr>
+          <a:xfrm>
+            <a:off x="311700" y="1229875"/>
+            <a:ext cx="8520600" cy="3339000"/>
+          </a:xfrm>
+          <a:prstGeom prst="rect">
+            <a:avLst/>
+          </a:prstGeom>
+        </p:spPr>
+        <p:txBody>
+          <a:bodyPr anchorCtr="0" anchor="t" bIns="91425" lIns="91425" spcFirstLastPara="1" rIns="91425" wrap="square" tIns="91425">
+            <a:normAutofit/>
+          </a:bodyPr>
+          <a:lstStyle/>
+          <a:p>
+            <a:pPr indent="0" lvl="0" marL="0" rtl="0" algn="l">
+              <a:spcBef>
+                <a:spcPts val="0"/>
+              </a:spcBef>
+              <a:spcAft>
+                <a:spcPts val="0"/>
+              </a:spcAft>
+              <a:buNone/>
+            </a:pPr>
+            <a:r>
+              <a:rPr lang="es"/>
+              <a:t>Optimiza la asignación de citas médicas.</a:t>
+            </a:r>
+            <a:endParaRPr/>
+          </a:p>
+          <a:p>
+            <a:pPr indent="0" lvl="0" marL="0" rtl="0" algn="l">
+              <a:spcBef>
+                <a:spcPts val="1200"/>
+              </a:spcBef>
+              <a:spcAft>
+                <a:spcPts val="0"/>
+              </a:spcAft>
+              <a:buNone/>
+            </a:pPr>
+            <a:r>
+              <a:t/>
+            </a:r>
+            <a:endParaRPr/>
+          </a:p>
+          <a:p>
+            <a:pPr indent="0" lvl="0" marL="0" rtl="0" algn="l">
+              <a:spcBef>
+                <a:spcPts val="1200"/>
+              </a:spcBef>
+              <a:spcAft>
+                <a:spcPts val="0"/>
+              </a:spcAft>
+              <a:buNone/>
+            </a:pPr>
+            <a:r>
+              <a:rPr lang="es"/>
+              <a:t>Mejora la experiencia del paciente.</a:t>
+            </a:r>
+            <a:endParaRPr/>
+          </a:p>
+          <a:p>
+            <a:pPr indent="0" lvl="0" marL="0" rtl="0" algn="l">
+              <a:spcBef>
+                <a:spcPts val="1200"/>
+              </a:spcBef>
+              <a:spcAft>
+                <a:spcPts val="0"/>
+              </a:spcAft>
+              <a:buNone/>
+            </a:pPr>
+            <a:r>
+              <a:t/>
+            </a:r>
+            <a:endParaRPr/>
+          </a:p>
+          <a:p>
+            <a:pPr indent="0" lvl="0" marL="0" rtl="0" algn="l">
+              <a:spcBef>
+                <a:spcPts val="1200"/>
+              </a:spcBef>
+              <a:spcAft>
+                <a:spcPts val="1200"/>
+              </a:spcAft>
+              <a:buNone/>
+            </a:pPr>
+            <a:r>
+              <a:rPr lang="es"/>
+              <a:t>Aporta valor al campo de la informática aplicando IA en un entorno crítico como la salud.</a:t>
+            </a:r>
+            <a:endParaRPr/>
+          </a:p>
+        </p:txBody>
+      </p:sp>
+      <p:pic>
+        <p:nvPicPr>
+          <p:cNvPr id="103" name="Google Shape;103;p15"/>
+          <p:cNvPicPr preferRelativeResize="0"/>
+          <p:nvPr/>
+        </p:nvPicPr>
+        <p:blipFill>
+          <a:blip r:embed="rId3">
+            <a:alphaModFix/>
+          </a:blip>
+          <a:stretch>
+            <a:fillRect/>
+          </a:stretch>
+        </p:blipFill>
+        <p:spPr>
+          <a:xfrm>
+            <a:off x="4986150" y="410000"/>
+            <a:ext cx="3783025" cy="2174150"/>
+          </a:xfrm>
+          <a:prstGeom prst="rect">
+            <a:avLst/>
+          </a:prstGeom>
+          <a:noFill/>
+          <a:ln>
+            <a:noFill/>
+          </a:ln>
+        </p:spPr>
+      </p:pic>
+    </p:spTree>
+  </p:cSld>
+  <p:clrMapOvr>
+    <a:masterClrMapping/>
+  </p:clrMapOvr>
+</p:sld>
+</file>
+
+<file path=ppt/slides/slide4.xml><?xml version="1.0" encoding="utf-8"?>
+<p:sld xmlns:a="http://schemas.openxmlformats.org/drawingml/2006/main" xmlns:r="http://schemas.openxmlformats.org/officeDocument/2006/relationships" xmlns:mc="http://schemas.openxmlformats.org/markup-compatibility/2006" xmlns:mv="urn:schemas-microsoft-com:mac:vml" xmlns:p="http://schemas.openxmlformats.org/presentationml/2006/main" xmlns:c="http://schemas.openxmlformats.org/drawingml/2006/chart" xmlns:dgm="http://schemas.openxmlformats.org/drawingml/2006/diagram" xmlns:o="urn:schemas-microsoft-com:office:office" xmlns:v="urn:schemas-microsoft-com:vml" xmlns:pvml="urn:schemas-microsoft-com:office:powerpoint" xmlns:com="http://schemas.openxmlformats.org/drawingml/2006/compatibility" xmlns:p14="http://schemas.microsoft.com/office/powerpoint/2010/main" xmlns:p15="http://schemas.microsoft.com/office/powerpoint/2012/main" xmlns:ahyp="http://schemas.microsoft.com/office/drawing/2018/hyperlinkcolor">
+  <p:cSld>
+    <p:spTree>
+      <p:nvGrpSpPr>
+        <p:cNvPr id="107" name="Shape 107"/>
+        <p:cNvGrpSpPr/>
+        <p:nvPr/>
+      </p:nvGrpSpPr>
+      <p:grpSpPr>
+        <a:xfrm>
+          <a:off x="0" y="0"/>
+          <a:ext cx="0" cy="0"/>
+          <a:chOff x="0" y="0"/>
+          <a:chExt cx="0" cy="0"/>
+        </a:xfrm>
+      </p:grpSpPr>
+      <p:sp>
+        <p:nvSpPr>
+          <p:cNvPr id="108" name="Google Shape;108;p16"/>
+          <p:cNvSpPr txBox="1"/>
+          <p:nvPr>
+            <p:ph type="title"/>
+          </p:nvPr>
+        </p:nvSpPr>
+        <p:spPr>
+          <a:xfrm>
+            <a:off x="311700" y="410000"/>
+            <a:ext cx="8520600" cy="607800"/>
+          </a:xfrm>
+          <a:prstGeom prst="rect">
+            <a:avLst/>
+          </a:prstGeom>
+        </p:spPr>
+        <p:txBody>
+          <a:bodyPr anchorCtr="0" anchor="t" bIns="91425" lIns="91425" spcFirstLastPara="1" rIns="91425" wrap="square" tIns="91425">
+            <a:normAutofit fontScale="90000"/>
+          </a:bodyPr>
+          <a:lstStyle/>
+          <a:p>
+            <a:pPr indent="0" lvl="0" marL="0" rtl="0" algn="l">
+              <a:spcBef>
+                <a:spcPts val="0"/>
+              </a:spcBef>
+              <a:spcAft>
+                <a:spcPts val="0"/>
+              </a:spcAft>
+              <a:buNone/>
+            </a:pPr>
+            <a:r>
+              <a:rPr lang="es"/>
+              <a:t>¿Qué es MediTriage?</a:t>
+            </a:r>
+            <a:endParaRPr/>
+          </a:p>
+        </p:txBody>
+      </p:sp>
+      <p:sp>
+        <p:nvSpPr>
+          <p:cNvPr id="109" name="Google Shape;109;p16"/>
+          <p:cNvSpPr txBox="1"/>
+          <p:nvPr>
+            <p:ph idx="1" type="body"/>
+          </p:nvPr>
+        </p:nvSpPr>
+        <p:spPr>
+          <a:xfrm>
+            <a:off x="311700" y="1229875"/>
+            <a:ext cx="8520600" cy="3339000"/>
+          </a:xfrm>
+          <a:prstGeom prst="rect">
+            <a:avLst/>
+          </a:prstGeom>
+        </p:spPr>
+        <p:txBody>
+          <a:bodyPr anchorCtr="0" anchor="t" bIns="91425" lIns="91425" spcFirstLastPara="1" rIns="91425" wrap="square" tIns="91425">
+            <a:normAutofit fontScale="77500" lnSpcReduction="20000"/>
+          </a:bodyPr>
+          <a:lstStyle/>
+          <a:p>
+            <a:pPr indent="0" lvl="0" marL="0" rtl="0" algn="l">
+              <a:spcBef>
+                <a:spcPts val="0"/>
+              </a:spcBef>
+              <a:spcAft>
+                <a:spcPts val="0"/>
+              </a:spcAft>
+              <a:buNone/>
+            </a:pPr>
+            <a:r>
+              <a:rPr lang="es"/>
+              <a:t>Plataforma web para agendamiento de citas médicas.</a:t>
+            </a:r>
+            <a:endParaRPr/>
+          </a:p>
+          <a:p>
+            <a:pPr indent="0" lvl="0" marL="0" rtl="0" algn="l">
+              <a:spcBef>
+                <a:spcPts val="1200"/>
+              </a:spcBef>
+              <a:spcAft>
+                <a:spcPts val="0"/>
+              </a:spcAft>
+              <a:buNone/>
+            </a:pPr>
+            <a:r>
+              <a:t/>
+            </a:r>
+            <a:endParaRPr/>
+          </a:p>
+          <a:p>
+            <a:pPr indent="0" lvl="0" marL="0" rtl="0" algn="l">
+              <a:spcBef>
+                <a:spcPts val="1200"/>
+              </a:spcBef>
+              <a:spcAft>
+                <a:spcPts val="0"/>
+              </a:spcAft>
+              <a:buNone/>
+            </a:pPr>
+            <a:r>
+              <a:rPr lang="es"/>
+              <a:t>Cuestionario dinámico de síntomas.</a:t>
+            </a:r>
+            <a:endParaRPr/>
+          </a:p>
+          <a:p>
+            <a:pPr indent="0" lvl="0" marL="0" rtl="0" algn="l">
+              <a:spcBef>
+                <a:spcPts val="1200"/>
+              </a:spcBef>
+              <a:spcAft>
+                <a:spcPts val="0"/>
+              </a:spcAft>
+              <a:buNone/>
+            </a:pPr>
+            <a:r>
+              <a:t/>
+            </a:r>
+            <a:endParaRPr/>
+          </a:p>
+          <a:p>
+            <a:pPr indent="0" lvl="0" marL="0" rtl="0" algn="l">
+              <a:spcBef>
+                <a:spcPts val="1200"/>
+              </a:spcBef>
+              <a:spcAft>
+                <a:spcPts val="0"/>
+              </a:spcAft>
+              <a:buNone/>
+            </a:pPr>
+            <a:r>
+              <a:rPr lang="es"/>
+              <a:t>Motor de reglas para detectar “banderas rojas”.</a:t>
+            </a:r>
+            <a:endParaRPr/>
+          </a:p>
+          <a:p>
+            <a:pPr indent="0" lvl="0" marL="0" rtl="0" algn="l">
+              <a:spcBef>
+                <a:spcPts val="1200"/>
+              </a:spcBef>
+              <a:spcAft>
+                <a:spcPts val="0"/>
+              </a:spcAft>
+              <a:buNone/>
+            </a:pPr>
+            <a:r>
+              <a:t/>
+            </a:r>
+            <a:endParaRPr/>
+          </a:p>
+          <a:p>
+            <a:pPr indent="0" lvl="0" marL="0" rtl="0" algn="l">
+              <a:spcBef>
+                <a:spcPts val="1200"/>
+              </a:spcBef>
+              <a:spcAft>
+                <a:spcPts val="0"/>
+              </a:spcAft>
+              <a:buNone/>
+            </a:pPr>
+            <a:r>
+              <a:rPr lang="es"/>
+              <a:t>Módulo de IA para orientar nivel de urgencia y especialidad.</a:t>
+            </a:r>
+            <a:endParaRPr/>
+          </a:p>
+          <a:p>
+            <a:pPr indent="0" lvl="0" marL="0" rtl="0" algn="l">
+              <a:spcBef>
+                <a:spcPts val="1200"/>
+              </a:spcBef>
+              <a:spcAft>
+                <a:spcPts val="0"/>
+              </a:spcAft>
+              <a:buNone/>
+            </a:pPr>
+            <a:r>
+              <a:t/>
+            </a:r>
+            <a:endParaRPr/>
+          </a:p>
+          <a:p>
+            <a:pPr indent="0" lvl="0" marL="0" rtl="0" algn="l">
+              <a:spcBef>
+                <a:spcPts val="1200"/>
+              </a:spcBef>
+              <a:spcAft>
+                <a:spcPts val="1200"/>
+              </a:spcAft>
+              <a:buNone/>
+            </a:pPr>
+            <a:r>
+              <a:rPr lang="es"/>
+              <a:t>Panel de médicos para gestionar citas y visualizar triage previo.</a:t>
+            </a:r>
+            <a:endParaRPr/>
+          </a:p>
+        </p:txBody>
+      </p:sp>
+      <p:pic>
+        <p:nvPicPr>
+          <p:cNvPr id="110" name="Google Shape;110;p16"/>
+          <p:cNvPicPr preferRelativeResize="0"/>
+          <p:nvPr/>
+        </p:nvPicPr>
+        <p:blipFill>
+          <a:blip r:embed="rId3">
+            <a:alphaModFix/>
+          </a:blip>
+          <a:stretch>
+            <a:fillRect/>
+          </a:stretch>
+        </p:blipFill>
+        <p:spPr>
+          <a:xfrm>
+            <a:off x="6261350" y="152400"/>
+            <a:ext cx="2730250" cy="1784824"/>
+          </a:xfrm>
+          <a:prstGeom prst="rect">
+            <a:avLst/>
+          </a:prstGeom>
+          <a:noFill/>
+          <a:ln>
+            <a:noFill/>
+          </a:ln>
+        </p:spPr>
+      </p:pic>
+    </p:spTree>
+  </p:cSld>
+  <p:clrMapOvr>
+    <a:masterClrMapping/>
+  </p:clrMapOvr>
+</p:sld>
+</file>
+
+<file path=ppt/slides/slide5.xml><?xml version="1.0" encoding="utf-8"?>
+<p:sld xmlns:a="http://schemas.openxmlformats.org/drawingml/2006/main" xmlns:r="http://schemas.openxmlformats.org/officeDocument/2006/relationships" xmlns:mc="http://schemas.openxmlformats.org/markup-compatibility/2006" xmlns:mv="urn:schemas-microsoft-com:mac:vml" xmlns:p="http://schemas.openxmlformats.org/presentationml/2006/main" xmlns:c="http://schemas.openxmlformats.org/drawingml/2006/chart" xmlns:dgm="http://schemas.openxmlformats.org/drawingml/2006/diagram" xmlns:o="urn:schemas-microsoft-com:office:office" xmlns:v="urn:schemas-microsoft-com:vml" xmlns:pvml="urn:schemas-microsoft-com:office:powerpoint" xmlns:com="http://schemas.openxmlformats.org/drawingml/2006/compatibility" xmlns:p14="http://schemas.microsoft.com/office/powerpoint/2010/main" xmlns:p15="http://schemas.microsoft.com/office/powerpoint/2012/main" xmlns:ahyp="http://schemas.microsoft.com/office/drawing/2018/hyperlinkcolor">
+  <p:cSld>
+    <p:spTree>
+      <p:nvGrpSpPr>
+        <p:cNvPr id="114" name="Shape 114"/>
+        <p:cNvGrpSpPr/>
+        <p:nvPr/>
+      </p:nvGrpSpPr>
+      <p:grpSpPr>
+        <a:xfrm>
+          <a:off x="0" y="0"/>
+          <a:ext cx="0" cy="0"/>
+          <a:chOff x="0" y="0"/>
+          <a:chExt cx="0" cy="0"/>
+        </a:xfrm>
+      </p:grpSpPr>
+      <p:sp>
+        <p:nvSpPr>
+          <p:cNvPr id="115" name="Google Shape;115;p17"/>
+          <p:cNvSpPr txBox="1"/>
+          <p:nvPr>
+            <p:ph type="title"/>
+          </p:nvPr>
+        </p:nvSpPr>
+        <p:spPr>
+          <a:xfrm>
+            <a:off x="311700" y="410000"/>
+            <a:ext cx="8520600" cy="607800"/>
+          </a:xfrm>
+          <a:prstGeom prst="rect">
+            <a:avLst/>
+          </a:prstGeom>
+        </p:spPr>
+        <p:txBody>
+          <a:bodyPr anchorCtr="0" anchor="t" bIns="91425" lIns="91425" spcFirstLastPara="1" rIns="91425" wrap="square" tIns="91425">
+            <a:normAutofit fontScale="90000"/>
+          </a:bodyPr>
+          <a:lstStyle/>
+          <a:p>
+            <a:pPr indent="0" lvl="0" marL="0" rtl="0" algn="l">
+              <a:spcBef>
+                <a:spcPts val="0"/>
+              </a:spcBef>
+              <a:spcAft>
+                <a:spcPts val="0"/>
+              </a:spcAft>
+              <a:buNone/>
+            </a:pPr>
+            <a:r>
+              <a:rPr lang="es"/>
+              <a:t>Objetivos del Proyecto</a:t>
+            </a:r>
+            <a:endParaRPr/>
+          </a:p>
+        </p:txBody>
+      </p:sp>
+      <p:sp>
+        <p:nvSpPr>
+          <p:cNvPr id="116" name="Google Shape;116;p17"/>
+          <p:cNvSpPr txBox="1"/>
+          <p:nvPr>
+            <p:ph idx="1" type="body"/>
+          </p:nvPr>
+        </p:nvSpPr>
+        <p:spPr>
+          <a:xfrm>
+            <a:off x="311700" y="1229875"/>
+            <a:ext cx="8520600" cy="3339000"/>
+          </a:xfrm>
+          <a:prstGeom prst="rect">
+            <a:avLst/>
+          </a:prstGeom>
+        </p:spPr>
+        <p:txBody>
+          <a:bodyPr anchorCtr="0" anchor="t" bIns="91425" lIns="91425" spcFirstLastPara="1" rIns="91425" wrap="square" tIns="91425">
+            <a:normAutofit lnSpcReduction="10000"/>
+          </a:bodyPr>
+          <a:lstStyle/>
+          <a:p>
+            <a:pPr indent="0" lvl="0" marL="0" rtl="0" algn="l">
+              <a:spcBef>
+                <a:spcPts val="0"/>
+              </a:spcBef>
+              <a:spcAft>
+                <a:spcPts val="0"/>
+              </a:spcAft>
+              <a:buNone/>
+            </a:pPr>
+            <a:r>
+              <a:rPr b="1" lang="es" sz="1100">
+                <a:solidFill>
+                  <a:srgbClr val="000000"/>
+                </a:solidFill>
+                <a:latin typeface="Arial"/>
+                <a:ea typeface="Arial"/>
+                <a:cs typeface="Arial"/>
+                <a:sym typeface="Arial"/>
+              </a:rPr>
+              <a:t>Objetivo General:</a:t>
+            </a:r>
+            <a:endParaRPr sz="1100">
+              <a:solidFill>
+                <a:srgbClr val="000000"/>
+              </a:solidFill>
+              <a:latin typeface="Arial"/>
+              <a:ea typeface="Arial"/>
+              <a:cs typeface="Arial"/>
+              <a:sym typeface="Arial"/>
+            </a:endParaRPr>
+          </a:p>
+          <a:p>
+            <a:pPr indent="-298450" lvl="0" marL="457200" rtl="0" algn="l">
+              <a:spcBef>
+                <a:spcPts val="1200"/>
+              </a:spcBef>
+              <a:spcAft>
+                <a:spcPts val="0"/>
+              </a:spcAft>
+              <a:buClr>
+                <a:srgbClr val="000000"/>
+              </a:buClr>
+              <a:buSzPts val="1100"/>
+              <a:buFont typeface="Arial"/>
+              <a:buChar char="●"/>
+            </a:pPr>
+            <a:r>
+              <a:rPr lang="es" sz="1100">
+                <a:solidFill>
+                  <a:srgbClr val="000000"/>
+                </a:solidFill>
+                <a:latin typeface="Arial"/>
+                <a:ea typeface="Arial"/>
+                <a:cs typeface="Arial"/>
+                <a:sym typeface="Arial"/>
+              </a:rPr>
+              <a:t>Desarrollar una plataforma web para gestión de citas médicas con triage IA y motor de reglas.</a:t>
+            </a:r>
+            <a:br>
+              <a:rPr lang="es" sz="1100">
+                <a:solidFill>
+                  <a:srgbClr val="000000"/>
+                </a:solidFill>
+                <a:latin typeface="Arial"/>
+                <a:ea typeface="Arial"/>
+                <a:cs typeface="Arial"/>
+                <a:sym typeface="Arial"/>
+              </a:rPr>
+            </a:br>
+            <a:endParaRPr sz="1100">
+              <a:solidFill>
+                <a:srgbClr val="000000"/>
+              </a:solidFill>
+              <a:latin typeface="Arial"/>
+              <a:ea typeface="Arial"/>
+              <a:cs typeface="Arial"/>
+              <a:sym typeface="Arial"/>
+            </a:endParaRPr>
+          </a:p>
+          <a:p>
+            <a:pPr indent="0" lvl="0" marL="0" rtl="0" algn="l">
+              <a:spcBef>
+                <a:spcPts val="1200"/>
+              </a:spcBef>
+              <a:spcAft>
+                <a:spcPts val="0"/>
+              </a:spcAft>
+              <a:buNone/>
+            </a:pPr>
+            <a:r>
+              <a:rPr b="1" lang="es" sz="1100">
+                <a:solidFill>
+                  <a:srgbClr val="000000"/>
+                </a:solidFill>
+                <a:latin typeface="Arial"/>
+                <a:ea typeface="Arial"/>
+                <a:cs typeface="Arial"/>
+                <a:sym typeface="Arial"/>
+              </a:rPr>
+              <a:t>Objetivos Específicos:</a:t>
+            </a:r>
+            <a:br>
+              <a:rPr b="1" lang="es" sz="1100">
+                <a:solidFill>
+                  <a:srgbClr val="000000"/>
+                </a:solidFill>
+                <a:latin typeface="Arial"/>
+                <a:ea typeface="Arial"/>
+                <a:cs typeface="Arial"/>
+                <a:sym typeface="Arial"/>
+              </a:rPr>
+            </a:br>
+            <a:endParaRPr b="1" sz="1100">
+              <a:solidFill>
+                <a:srgbClr val="000000"/>
+              </a:solidFill>
+              <a:latin typeface="Arial"/>
+              <a:ea typeface="Arial"/>
+              <a:cs typeface="Arial"/>
+              <a:sym typeface="Arial"/>
+            </a:endParaRPr>
+          </a:p>
+          <a:p>
+            <a:pPr indent="-298450" lvl="0" marL="457200" rtl="0" algn="l">
+              <a:spcBef>
+                <a:spcPts val="1200"/>
+              </a:spcBef>
+              <a:spcAft>
+                <a:spcPts val="0"/>
+              </a:spcAft>
+              <a:buClr>
+                <a:srgbClr val="000000"/>
+              </a:buClr>
+              <a:buSzPts val="1100"/>
+              <a:buFont typeface="Arial"/>
+              <a:buChar char="●"/>
+            </a:pPr>
+            <a:r>
+              <a:rPr lang="es" sz="1100">
+                <a:solidFill>
+                  <a:srgbClr val="000000"/>
+                </a:solidFill>
+                <a:latin typeface="Arial"/>
+                <a:ea typeface="Arial"/>
+                <a:cs typeface="Arial"/>
+                <a:sym typeface="Arial"/>
+              </a:rPr>
+              <a:t>Implementar autenticación y gestión de usuarios.</a:t>
+            </a:r>
+            <a:br>
+              <a:rPr lang="es" sz="1100">
+                <a:solidFill>
+                  <a:srgbClr val="000000"/>
+                </a:solidFill>
+                <a:latin typeface="Arial"/>
+                <a:ea typeface="Arial"/>
+                <a:cs typeface="Arial"/>
+                <a:sym typeface="Arial"/>
+              </a:rPr>
+            </a:br>
+            <a:endParaRPr sz="1100">
+              <a:solidFill>
+                <a:srgbClr val="000000"/>
+              </a:solidFill>
+              <a:latin typeface="Arial"/>
+              <a:ea typeface="Arial"/>
+              <a:cs typeface="Arial"/>
+              <a:sym typeface="Arial"/>
+            </a:endParaRPr>
+          </a:p>
+          <a:p>
+            <a:pPr indent="-298450" lvl="0" marL="457200" rtl="0" algn="l">
+              <a:spcBef>
+                <a:spcPts val="0"/>
+              </a:spcBef>
+              <a:spcAft>
+                <a:spcPts val="0"/>
+              </a:spcAft>
+              <a:buClr>
+                <a:srgbClr val="000000"/>
+              </a:buClr>
+              <a:buSzPts val="1100"/>
+              <a:buFont typeface="Arial"/>
+              <a:buChar char="●"/>
+            </a:pPr>
+            <a:r>
+              <a:rPr lang="es" sz="1100">
+                <a:solidFill>
+                  <a:srgbClr val="000000"/>
+                </a:solidFill>
+                <a:latin typeface="Arial"/>
+                <a:ea typeface="Arial"/>
+                <a:cs typeface="Arial"/>
+                <a:sym typeface="Arial"/>
+              </a:rPr>
+              <a:t>Diseñar modelo de datos para agenda y citas.</a:t>
+            </a:r>
+            <a:br>
+              <a:rPr lang="es" sz="1100">
+                <a:solidFill>
+                  <a:srgbClr val="000000"/>
+                </a:solidFill>
+                <a:latin typeface="Arial"/>
+                <a:ea typeface="Arial"/>
+                <a:cs typeface="Arial"/>
+                <a:sym typeface="Arial"/>
+              </a:rPr>
+            </a:br>
+            <a:endParaRPr sz="1100">
+              <a:solidFill>
+                <a:srgbClr val="000000"/>
+              </a:solidFill>
+              <a:latin typeface="Arial"/>
+              <a:ea typeface="Arial"/>
+              <a:cs typeface="Arial"/>
+              <a:sym typeface="Arial"/>
+            </a:endParaRPr>
+          </a:p>
+          <a:p>
+            <a:pPr indent="-298450" lvl="0" marL="457200" rtl="0" algn="l">
+              <a:spcBef>
+                <a:spcPts val="0"/>
+              </a:spcBef>
+              <a:spcAft>
+                <a:spcPts val="0"/>
+              </a:spcAft>
+              <a:buClr>
+                <a:srgbClr val="000000"/>
+              </a:buClr>
+              <a:buSzPts val="1100"/>
+              <a:buFont typeface="Arial"/>
+              <a:buChar char="●"/>
+            </a:pPr>
+            <a:r>
+              <a:rPr lang="es" sz="1100">
+                <a:solidFill>
+                  <a:srgbClr val="000000"/>
+                </a:solidFill>
+                <a:latin typeface="Arial"/>
+                <a:ea typeface="Arial"/>
+                <a:cs typeface="Arial"/>
+                <a:sym typeface="Arial"/>
+              </a:rPr>
+              <a:t>Integrar un servicio de IA para orientar urgencia y especialidad.</a:t>
+            </a:r>
+            <a:br>
+              <a:rPr lang="es" sz="1100">
+                <a:solidFill>
+                  <a:srgbClr val="000000"/>
+                </a:solidFill>
+                <a:latin typeface="Arial"/>
+                <a:ea typeface="Arial"/>
+                <a:cs typeface="Arial"/>
+                <a:sym typeface="Arial"/>
+              </a:rPr>
+            </a:br>
+            <a:endParaRPr sz="1100">
+              <a:solidFill>
+                <a:srgbClr val="000000"/>
+              </a:solidFill>
+              <a:latin typeface="Arial"/>
+              <a:ea typeface="Arial"/>
+              <a:cs typeface="Arial"/>
+              <a:sym typeface="Arial"/>
+            </a:endParaRPr>
+          </a:p>
+          <a:p>
+            <a:pPr indent="-298450" lvl="0" marL="457200" rtl="0" algn="l">
+              <a:spcBef>
+                <a:spcPts val="0"/>
+              </a:spcBef>
+              <a:spcAft>
+                <a:spcPts val="0"/>
+              </a:spcAft>
+              <a:buClr>
+                <a:srgbClr val="000000"/>
+              </a:buClr>
+              <a:buSzPts val="1100"/>
+              <a:buFont typeface="Arial"/>
+              <a:buChar char="●"/>
+            </a:pPr>
+            <a:r>
+              <a:rPr lang="es" sz="1100">
+                <a:solidFill>
+                  <a:srgbClr val="000000"/>
+                </a:solidFill>
+                <a:latin typeface="Arial"/>
+                <a:ea typeface="Arial"/>
+                <a:cs typeface="Arial"/>
+                <a:sym typeface="Arial"/>
+              </a:rPr>
+              <a:t>Crear reportes básicos y panel de médicos.</a:t>
+            </a:r>
+            <a:endParaRPr sz="1100">
+              <a:solidFill>
+                <a:srgbClr val="000000"/>
+              </a:solidFill>
+              <a:latin typeface="Arial"/>
+              <a:ea typeface="Arial"/>
+              <a:cs typeface="Arial"/>
+              <a:sym typeface="Arial"/>
+            </a:endParaRPr>
+          </a:p>
+          <a:p>
+            <a:pPr indent="0" lvl="0" marL="0" rtl="0" algn="l">
+              <a:spcBef>
+                <a:spcPts val="1200"/>
+              </a:spcBef>
+              <a:spcAft>
+                <a:spcPts val="1200"/>
+              </a:spcAft>
+              <a:buNone/>
+            </a:pPr>
+            <a:r>
+              <a:t/>
+            </a:r>
+            <a:endParaRPr/>
+          </a:p>
+        </p:txBody>
+      </p:sp>
+      <p:pic>
+        <p:nvPicPr>
+          <p:cNvPr id="117" name="Google Shape;117;p17"/>
+          <p:cNvPicPr preferRelativeResize="0"/>
+          <p:nvPr/>
+        </p:nvPicPr>
+        <p:blipFill>
+          <a:blip r:embed="rId3">
+            <a:alphaModFix/>
+          </a:blip>
+          <a:stretch>
+            <a:fillRect/>
+          </a:stretch>
+        </p:blipFill>
+        <p:spPr>
+          <a:xfrm>
+            <a:off x="6438350" y="0"/>
+            <a:ext cx="2705650" cy="2705650"/>
+          </a:xfrm>
+          <a:prstGeom prst="rect">
+            <a:avLst/>
+          </a:prstGeom>
+          <a:noFill/>
+          <a:ln>
+            <a:noFill/>
+          </a:ln>
+        </p:spPr>
+      </p:pic>
+    </p:spTree>
+  </p:cSld>
+  <p:clrMapOvr>
+    <a:masterClrMapping/>
+  </p:clrMapOvr>
+</p:sld>
+</file>
+
+<file path=ppt/slides/slide6.xml><?xml version="1.0" encoding="utf-8"?>
+<p:sld xmlns:a="http://schemas.openxmlformats.org/drawingml/2006/main" xmlns:r="http://schemas.openxmlformats.org/officeDocument/2006/relationships" xmlns:mc="http://schemas.openxmlformats.org/markup-compatibility/2006" xmlns:mv="urn:schemas-microsoft-com:mac:vml" xmlns:p="http://schemas.openxmlformats.org/presentationml/2006/main" xmlns:c="http://schemas.openxmlformats.org/drawingml/2006/chart" xmlns:dgm="http://schemas.openxmlformats.org/drawingml/2006/diagram" xmlns:o="urn:schemas-microsoft-com:office:office" xmlns:v="urn:schemas-microsoft-com:vml" xmlns:pvml="urn:schemas-microsoft-com:office:powerpoint" xmlns:com="http://schemas.openxmlformats.org/drawingml/2006/compatibility" xmlns:p14="http://schemas.microsoft.com/office/powerpoint/2010/main" xmlns:p15="http://schemas.microsoft.com/office/powerpoint/2012/main" xmlns:ahyp="http://schemas.microsoft.com/office/drawing/2018/hyperlinkcolor">
+  <p:cSld>
+    <p:spTree>
+      <p:nvGrpSpPr>
+        <p:cNvPr id="121" name="Shape 121"/>
+        <p:cNvGrpSpPr/>
+        <p:nvPr/>
+      </p:nvGrpSpPr>
+      <p:grpSpPr>
+        <a:xfrm>
+          <a:off x="0" y="0"/>
+          <a:ext cx="0" cy="0"/>
+          <a:chOff x="0" y="0"/>
+          <a:chExt cx="0" cy="0"/>
+        </a:xfrm>
+      </p:grpSpPr>
+      <p:sp>
+        <p:nvSpPr>
+          <p:cNvPr id="122" name="Google Shape;122;p18"/>
+          <p:cNvSpPr txBox="1"/>
+          <p:nvPr>
+            <p:ph type="title"/>
+          </p:nvPr>
+        </p:nvSpPr>
+        <p:spPr>
+          <a:xfrm>
+            <a:off x="311700" y="410000"/>
+            <a:ext cx="8520600" cy="607800"/>
+          </a:xfrm>
+          <a:prstGeom prst="rect">
+            <a:avLst/>
+          </a:prstGeom>
+        </p:spPr>
+        <p:txBody>
+          <a:bodyPr anchorCtr="0" anchor="t" bIns="91425" lIns="91425" spcFirstLastPara="1" rIns="91425" wrap="square" tIns="91425">
+            <a:normAutofit fontScale="90000"/>
+          </a:bodyPr>
+          <a:lstStyle/>
+          <a:p>
+            <a:pPr indent="0" lvl="0" marL="0" rtl="0" algn="l">
+              <a:spcBef>
+                <a:spcPts val="0"/>
+              </a:spcBef>
+              <a:spcAft>
+                <a:spcPts val="0"/>
+              </a:spcAft>
+              <a:buNone/>
+            </a:pPr>
+            <a:r>
+              <a:rPr lang="es"/>
+              <a:t>Metodología de Trabajo</a:t>
+            </a:r>
+            <a:endParaRPr/>
+          </a:p>
+        </p:txBody>
+      </p:sp>
+      <p:sp>
+        <p:nvSpPr>
+          <p:cNvPr id="123" name="Google Shape;123;p18"/>
+          <p:cNvSpPr txBox="1"/>
+          <p:nvPr>
+            <p:ph idx="1" type="body"/>
+          </p:nvPr>
+        </p:nvSpPr>
+        <p:spPr>
+          <a:xfrm>
+            <a:off x="311700" y="1229875"/>
+            <a:ext cx="8520600" cy="3339000"/>
+          </a:xfrm>
+          <a:prstGeom prst="rect">
+            <a:avLst/>
+          </a:prstGeom>
+        </p:spPr>
+        <p:txBody>
+          <a:bodyPr anchorCtr="0" anchor="t" bIns="91425" lIns="91425" spcFirstLastPara="1" rIns="91425" wrap="square" tIns="91425">
+            <a:normAutofit fontScale="70000" lnSpcReduction="20000"/>
+          </a:bodyPr>
+          <a:lstStyle/>
+          <a:p>
+            <a:pPr indent="0" lvl="0" marL="0" rtl="0" algn="l">
+              <a:spcBef>
+                <a:spcPts val="0"/>
+              </a:spcBef>
+              <a:spcAft>
+                <a:spcPts val="0"/>
+              </a:spcAft>
+              <a:buNone/>
+            </a:pPr>
+            <a:r>
+              <a:rPr b="1" lang="es" sz="2228"/>
+              <a:t>Enfoque ágil (Scrum)</a:t>
+            </a:r>
+            <a:br>
+              <a:rPr lang="es"/>
+            </a:br>
+            <a:endParaRPr/>
+          </a:p>
+          <a:p>
+            <a:pPr indent="0" lvl="0" marL="0" rtl="0" algn="l">
+              <a:spcBef>
+                <a:spcPts val="1200"/>
+              </a:spcBef>
+              <a:spcAft>
+                <a:spcPts val="0"/>
+              </a:spcAft>
+              <a:buNone/>
+            </a:pPr>
+            <a:r>
+              <a:rPr lang="es"/>
+              <a:t>Sprints de dos semanas.</a:t>
+            </a:r>
+            <a:br>
+              <a:rPr lang="es"/>
+            </a:br>
+            <a:endParaRPr/>
+          </a:p>
+          <a:p>
+            <a:pPr indent="0" lvl="0" marL="0" rtl="0" algn="l">
+              <a:spcBef>
+                <a:spcPts val="1200"/>
+              </a:spcBef>
+              <a:spcAft>
+                <a:spcPts val="0"/>
+              </a:spcAft>
+              <a:buNone/>
+            </a:pPr>
+            <a:r>
+              <a:rPr lang="es"/>
+              <a:t>Etapas: planificación, diseño, desarrollo, pruebas, documentación, presentación.</a:t>
+            </a:r>
+            <a:br>
+              <a:rPr lang="es"/>
+            </a:br>
+            <a:endParaRPr/>
+          </a:p>
+          <a:p>
+            <a:pPr indent="0" lvl="0" marL="0" rtl="0" algn="l">
+              <a:spcBef>
+                <a:spcPts val="1200"/>
+              </a:spcBef>
+              <a:spcAft>
+                <a:spcPts val="0"/>
+              </a:spcAft>
+              <a:buNone/>
+            </a:pPr>
+            <a:r>
+              <a:rPr b="1" lang="es" sz="2228"/>
+              <a:t>Roles del equipo:</a:t>
+            </a:r>
+            <a:br>
+              <a:rPr lang="es"/>
+            </a:br>
+            <a:endParaRPr/>
+          </a:p>
+          <a:p>
+            <a:pPr indent="-277495" lvl="0" marL="457200" rtl="0" algn="l">
+              <a:spcBef>
+                <a:spcPts val="1200"/>
+              </a:spcBef>
+              <a:spcAft>
+                <a:spcPts val="0"/>
+              </a:spcAft>
+              <a:buClr>
+                <a:srgbClr val="000000"/>
+              </a:buClr>
+              <a:buSzPct val="61111"/>
+              <a:buFont typeface="Arial"/>
+              <a:buChar char="●"/>
+            </a:pPr>
+            <a:r>
+              <a:rPr lang="es"/>
+              <a:t>Matías: líder técnico, backend, documentación.</a:t>
+            </a:r>
+            <a:br>
+              <a:rPr lang="es"/>
+            </a:br>
+            <a:endParaRPr/>
+          </a:p>
+          <a:p>
+            <a:pPr indent="-277495" lvl="0" marL="457200" rtl="0" algn="l">
+              <a:spcBef>
+                <a:spcPts val="0"/>
+              </a:spcBef>
+              <a:spcAft>
+                <a:spcPts val="0"/>
+              </a:spcAft>
+              <a:buClr>
+                <a:srgbClr val="000000"/>
+              </a:buClr>
+              <a:buSzPct val="61111"/>
+              <a:buFont typeface="Arial"/>
+              <a:buChar char="●"/>
+            </a:pPr>
+            <a:r>
+              <a:rPr lang="es"/>
+              <a:t>Raúl: frontend, pruebas de calidad, interfaz.</a:t>
+            </a:r>
+            <a:endParaRPr/>
+          </a:p>
+          <a:p>
+            <a:pPr indent="0" lvl="0" marL="0" rtl="0" algn="l">
+              <a:spcBef>
+                <a:spcPts val="1200"/>
+              </a:spcBef>
+              <a:spcAft>
+                <a:spcPts val="1200"/>
+              </a:spcAft>
+              <a:buNone/>
+            </a:pPr>
+            <a:r>
+              <a:t/>
+            </a:r>
+            <a:endParaRPr/>
+          </a:p>
+        </p:txBody>
+      </p:sp>
+      <p:pic>
+        <p:nvPicPr>
+          <p:cNvPr id="124" name="Google Shape;124;p18"/>
+          <p:cNvPicPr preferRelativeResize="0"/>
+          <p:nvPr/>
+        </p:nvPicPr>
+        <p:blipFill>
+          <a:blip r:embed="rId3">
+            <a:alphaModFix/>
+          </a:blip>
+          <a:stretch>
+            <a:fillRect/>
+          </a:stretch>
+        </p:blipFill>
+        <p:spPr>
+          <a:xfrm>
+            <a:off x="6346950" y="0"/>
+            <a:ext cx="2797050" cy="2797050"/>
+          </a:xfrm>
+          <a:prstGeom prst="rect">
+            <a:avLst/>
+          </a:prstGeom>
+          <a:noFill/>
+          <a:ln>
+            <a:noFill/>
+          </a:ln>
+        </p:spPr>
+      </p:pic>
+    </p:spTree>
+  </p:cSld>
+  <p:clrMapOvr>
+    <a:masterClrMapping/>
+  </p:clrMapOvr>
+</p:sld>
+</file>
+
+<file path=ppt/slides/slide7.xml><?xml version="1.0" encoding="utf-8"?>
+<p:sld xmlns:a="http://schemas.openxmlformats.org/drawingml/2006/main" xmlns:r="http://schemas.openxmlformats.org/officeDocument/2006/relationships" xmlns:mc="http://schemas.openxmlformats.org/markup-compatibility/2006" xmlns:mv="urn:schemas-microsoft-com:mac:vml" xmlns:p="http://schemas.openxmlformats.org/presentationml/2006/main" xmlns:c="http://schemas.openxmlformats.org/drawingml/2006/chart" xmlns:dgm="http://schemas.openxmlformats.org/drawingml/2006/diagram" xmlns:o="urn:schemas-microsoft-com:office:office" xmlns:v="urn:schemas-microsoft-com:vml" xmlns:pvml="urn:schemas-microsoft-com:office:powerpoint" xmlns:com="http://schemas.openxmlformats.org/drawingml/2006/compatibility" xmlns:p14="http://schemas.microsoft.com/office/powerpoint/2010/main" xmlns:p15="http://schemas.microsoft.com/office/powerpoint/2012/main" xmlns:ahyp="http://schemas.microsoft.com/office/drawing/2018/hyperlinkcolor">
+  <p:cSld>
+    <p:spTree>
+      <p:nvGrpSpPr>
+        <p:cNvPr id="128" name="Shape 128"/>
+        <p:cNvGrpSpPr/>
+        <p:nvPr/>
+      </p:nvGrpSpPr>
+      <p:grpSpPr>
+        <a:xfrm>
+          <a:off x="0" y="0"/>
+          <a:ext cx="0" cy="0"/>
+          <a:chOff x="0" y="0"/>
+          <a:chExt cx="0" cy="0"/>
+        </a:xfrm>
+      </p:grpSpPr>
+      <p:sp>
+        <p:nvSpPr>
+          <p:cNvPr id="129" name="Google Shape;129;p19"/>
+          <p:cNvSpPr txBox="1"/>
+          <p:nvPr>
+            <p:ph type="title"/>
+          </p:nvPr>
+        </p:nvSpPr>
+        <p:spPr>
+          <a:xfrm>
+            <a:off x="311700" y="410000"/>
+            <a:ext cx="8520600" cy="607800"/>
+          </a:xfrm>
+          <a:prstGeom prst="rect">
+            <a:avLst/>
+          </a:prstGeom>
+        </p:spPr>
+        <p:txBody>
+          <a:bodyPr anchorCtr="0" anchor="t" bIns="91425" lIns="91425" spcFirstLastPara="1" rIns="91425" wrap="square" tIns="91425">
+            <a:normAutofit fontScale="90000"/>
+          </a:bodyPr>
+          <a:lstStyle/>
+          <a:p>
+            <a:pPr indent="0" lvl="0" marL="0" rtl="0" algn="l">
+              <a:spcBef>
+                <a:spcPts val="0"/>
+              </a:spcBef>
+              <a:spcAft>
+                <a:spcPts val="0"/>
+              </a:spcAft>
+              <a:buNone/>
+            </a:pPr>
+            <a:r>
+              <a:rPr lang="es"/>
+              <a:t>Plan de Trabajo</a:t>
+            </a:r>
+            <a:endParaRPr/>
+          </a:p>
+        </p:txBody>
+      </p:sp>
+      <p:graphicFrame>
+        <p:nvGraphicFramePr>
+          <p:cNvPr id="130" name="Google Shape;130;p19"/>
+          <p:cNvGraphicFramePr/>
+          <p:nvPr/>
+        </p:nvGraphicFramePr>
+        <p:xfrm>
+          <a:off x="311700" y="1017800"/>
+          <a:ext cx="3000000" cy="3000000"/>
+        </p:xfrm>
+        <a:graphic>
+          <a:graphicData uri="http://schemas.openxmlformats.org/drawingml/2006/table">
+            <a:tbl>
+              <a:tblPr>
+                <a:noFill/>
+                <a:tableStyleId>{DC3FF107-3BDE-4E74-B89A-231300D61445}</a:tableStyleId>
+              </a:tblPr>
+              <a:tblGrid>
+                <a:gridCol w="8421900"/>
+              </a:tblGrid>
+              <a:tr h="284175">
+                <a:tc>
+                  <a:txBody>
+                    <a:bodyPr/>
+                    <a:lstStyle/>
+                    <a:p>
+                      <a:pPr indent="0" lvl="0" marL="0" rtl="0" algn="l">
+                        <a:lnSpc>
+                          <a:spcPct val="115000"/>
+                        </a:lnSpc>
+                        <a:spcBef>
+                          <a:spcPts val="0"/>
+                        </a:spcBef>
+                        <a:spcAft>
+                          <a:spcPts val="0"/>
+                        </a:spcAft>
+                        <a:buNone/>
+                      </a:pPr>
+                      <a:r>
+                        <a:rPr b="1" lang="es" sz="800">
+                          <a:latin typeface="Calibri"/>
+                          <a:ea typeface="Calibri"/>
+                          <a:cs typeface="Calibri"/>
+                          <a:sym typeface="Calibri"/>
+                        </a:rPr>
+                        <a:t>Actividad</a:t>
+                      </a:r>
+                      <a:endParaRPr b="1" sz="800">
+                        <a:latin typeface="Calibri"/>
+                        <a:ea typeface="Calibri"/>
+                        <a:cs typeface="Calibri"/>
+                        <a:sym typeface="Calibri"/>
+                      </a:endParaRPr>
+                    </a:p>
+                  </a:txBody>
+                  <a:tcPr marT="91425" marB="91425" marR="28575" marL="28575" anchor="ctr">
+                    <a:lnL cap="flat" cmpd="sng" w="9525">
+                      <a:solidFill>
+                        <a:srgbClr val="284E3F"/>
+                      </a:solidFill>
+                      <a:prstDash val="solid"/>
+                      <a:round/>
+                      <a:headEnd len="sm" w="sm" type="none"/>
+                      <a:tailEnd len="sm" w="sm" type="none"/>
+                    </a:lnL>
+                    <a:lnR cap="flat" cmpd="sng" w="9525">
+                      <a:solidFill>
+                        <a:srgbClr val="356854"/>
+                      </a:solidFill>
+                      <a:prstDash val="solid"/>
+                      <a:round/>
+                      <a:headEnd len="sm" w="sm" type="none"/>
+                      <a:tailEnd len="sm" w="sm" type="none"/>
+                    </a:lnR>
+                    <a:lnT cap="flat" cmpd="sng" w="9525">
+                      <a:solidFill>
+                        <a:srgbClr val="284E3F"/>
+                      </a:solidFill>
+                      <a:prstDash val="solid"/>
+                      <a:round/>
+                      <a:headEnd len="sm" w="sm" type="none"/>
+                      <a:tailEnd len="sm" w="sm" type="none"/>
+                    </a:lnT>
+                    <a:lnB cap="flat" cmpd="sng" w="9525">
+                      <a:solidFill>
+                        <a:srgbClr val="284E3F"/>
+                      </a:solidFill>
+                      <a:prstDash val="solid"/>
+                      <a:round/>
+                      <a:headEnd len="sm" w="sm" type="none"/>
+                      <a:tailEnd len="sm" w="sm" type="none"/>
+                    </a:lnB>
+                    <a:solidFill>
+                      <a:srgbClr val="356854"/>
+                    </a:solidFill>
+                  </a:tcPr>
+                </a:tc>
+              </a:tr>
+              <a:tr h="284175">
+                <a:tc>
+                  <a:txBody>
+                    <a:bodyPr/>
+                    <a:lstStyle/>
+                    <a:p>
+                      <a:pPr indent="0" lvl="0" marL="0" rtl="0" algn="l">
+                        <a:lnSpc>
+                          <a:spcPct val="115000"/>
+                        </a:lnSpc>
+                        <a:spcBef>
+                          <a:spcPts val="0"/>
+                        </a:spcBef>
+                        <a:spcAft>
+                          <a:spcPts val="0"/>
+                        </a:spcAft>
+                        <a:buNone/>
+                      </a:pPr>
+                      <a:r>
+                        <a:rPr lang="es" sz="800">
+                          <a:latin typeface="Calibri"/>
+                          <a:ea typeface="Calibri"/>
+                          <a:cs typeface="Calibri"/>
+                          <a:sym typeface="Calibri"/>
+                        </a:rPr>
+                        <a:t>Levantamiento de requerimientos</a:t>
+                      </a:r>
+                      <a:endParaRPr sz="800">
+                        <a:latin typeface="Calibri"/>
+                        <a:ea typeface="Calibri"/>
+                        <a:cs typeface="Calibri"/>
+                        <a:sym typeface="Calibri"/>
+                      </a:endParaRPr>
+                    </a:p>
+                  </a:txBody>
+                  <a:tcPr marT="91425" marB="91425" marR="28575" marL="28575" anchor="ctr">
+                    <a:lnL cap="flat" cmpd="sng" w="9525">
+                      <a:solidFill>
+                        <a:srgbClr val="284E3F"/>
+                      </a:solidFill>
+                      <a:prstDash val="solid"/>
+                      <a:round/>
+                      <a:headEnd len="sm" w="sm" type="none"/>
+                      <a:tailEnd len="sm" w="sm" type="none"/>
+                    </a:lnL>
+                    <a:lnR cap="flat" cmpd="sng" w="9525">
+                      <a:solidFill>
+                        <a:srgbClr val="FFFFFF"/>
+                      </a:solidFill>
+                      <a:prstDash val="solid"/>
+                      <a:round/>
+                      <a:headEnd len="sm" w="sm" type="none"/>
+                      <a:tailEnd len="sm" w="sm" type="none"/>
+                    </a:lnR>
+                    <a:lnT cap="flat" cmpd="sng" w="9525">
+                      <a:solidFill>
+                        <a:srgbClr val="284E3F"/>
+                      </a:solidFill>
+                      <a:prstDash val="solid"/>
+                      <a:round/>
+                      <a:headEnd len="sm" w="sm" type="none"/>
+                      <a:tailEnd len="sm" w="sm" type="none"/>
+                    </a:lnT>
+                    <a:lnB cap="flat" cmpd="sng" w="9525">
+                      <a:solidFill>
+                        <a:srgbClr val="F6F8F9"/>
+                      </a:solidFill>
+                      <a:prstDash val="solid"/>
+                      <a:round/>
+                      <a:headEnd len="sm" w="sm" type="none"/>
+                      <a:tailEnd len="sm" w="sm" type="none"/>
+                    </a:lnB>
+                    <a:solidFill>
+                      <a:srgbClr val="FFFFFF"/>
+                    </a:solidFill>
+                  </a:tcPr>
+                </a:tc>
+              </a:tr>
+              <a:tr h="284175">
+                <a:tc>
+                  <a:txBody>
+                    <a:bodyPr/>
+                    <a:lstStyle/>
+                    <a:p>
+                      <a:pPr indent="0" lvl="0" marL="0" rtl="0" algn="l">
+                        <a:lnSpc>
+                          <a:spcPct val="115000"/>
+                        </a:lnSpc>
+                        <a:spcBef>
+                          <a:spcPts val="0"/>
+                        </a:spcBef>
+                        <a:spcAft>
+                          <a:spcPts val="0"/>
+                        </a:spcAft>
+                        <a:buNone/>
+                      </a:pPr>
+                      <a:r>
+                        <a:rPr lang="es" sz="800">
+                          <a:latin typeface="Calibri"/>
+                          <a:ea typeface="Calibri"/>
+                          <a:cs typeface="Calibri"/>
+                          <a:sym typeface="Calibri"/>
+                        </a:rPr>
+                        <a:t>Análisis de factibilidad</a:t>
+                      </a:r>
+                      <a:endParaRPr sz="800">
+                        <a:latin typeface="Calibri"/>
+                        <a:ea typeface="Calibri"/>
+                        <a:cs typeface="Calibri"/>
+                        <a:sym typeface="Calibri"/>
+                      </a:endParaRPr>
+                    </a:p>
+                  </a:txBody>
+                  <a:tcPr marT="91425" marB="91425" marR="28575" marL="28575" anchor="ctr">
+                    <a:lnL cap="flat" cmpd="sng" w="9525">
+                      <a:solidFill>
+                        <a:srgbClr val="284E3F"/>
+                      </a:solidFill>
+                      <a:prstDash val="solid"/>
+                      <a:round/>
+                      <a:headEnd len="sm" w="sm" type="none"/>
+                      <a:tailEnd len="sm" w="sm" type="none"/>
+                    </a:lnL>
+                    <a:lnR cap="flat" cmpd="sng" w="9525">
+                      <a:solidFill>
+                        <a:srgbClr val="F6F8F9"/>
+                      </a:solidFill>
+                      <a:prstDash val="solid"/>
+                      <a:round/>
+                      <a:headEnd len="sm" w="sm" type="none"/>
+                      <a:tailEnd len="sm" w="sm" type="none"/>
+                    </a:lnR>
+                    <a:lnT cap="flat" cmpd="sng" w="9525">
+                      <a:solidFill>
+                        <a:srgbClr val="F6F8F9"/>
+                      </a:solidFill>
+                      <a:prstDash val="solid"/>
+                      <a:round/>
+                      <a:headEnd len="sm" w="sm" type="none"/>
+                      <a:tailEnd len="sm" w="sm" type="none"/>
+                    </a:lnT>
+                    <a:lnB cap="flat" cmpd="sng" w="9525">
+                      <a:solidFill>
+                        <a:srgbClr val="F6F8F9"/>
+                      </a:solidFill>
+                      <a:prstDash val="solid"/>
+                      <a:round/>
+                      <a:headEnd len="sm" w="sm" type="none"/>
+                      <a:tailEnd len="sm" w="sm" type="none"/>
+                    </a:lnB>
+                    <a:solidFill>
+                      <a:srgbClr val="F6F8F9"/>
+                    </a:solidFill>
+                  </a:tcPr>
+                </a:tc>
+              </a:tr>
+              <a:tr h="284175">
+                <a:tc>
+                  <a:txBody>
+                    <a:bodyPr/>
+                    <a:lstStyle/>
+                    <a:p>
+                      <a:pPr indent="0" lvl="0" marL="0" rtl="0" algn="l">
+                        <a:lnSpc>
+                          <a:spcPct val="115000"/>
+                        </a:lnSpc>
+                        <a:spcBef>
+                          <a:spcPts val="0"/>
+                        </a:spcBef>
+                        <a:spcAft>
+                          <a:spcPts val="0"/>
+                        </a:spcAft>
+                        <a:buNone/>
+                      </a:pPr>
+                      <a:r>
+                        <a:rPr lang="es" sz="800">
+                          <a:latin typeface="Calibri"/>
+                          <a:ea typeface="Calibri"/>
+                          <a:cs typeface="Calibri"/>
+                          <a:sym typeface="Calibri"/>
+                        </a:rPr>
+                        <a:t>Diseño base de datos</a:t>
+                      </a:r>
+                      <a:endParaRPr sz="800">
+                        <a:latin typeface="Calibri"/>
+                        <a:ea typeface="Calibri"/>
+                        <a:cs typeface="Calibri"/>
+                        <a:sym typeface="Calibri"/>
+                      </a:endParaRPr>
+                    </a:p>
+                  </a:txBody>
+                  <a:tcPr marT="91425" marB="91425" marR="28575" marL="28575" anchor="ctr">
+                    <a:lnL cap="flat" cmpd="sng" w="9525">
+                      <a:solidFill>
+                        <a:srgbClr val="284E3F"/>
+                      </a:solidFill>
+                      <a:prstDash val="solid"/>
+                      <a:round/>
+                      <a:headEnd len="sm" w="sm" type="none"/>
+                      <a:tailEnd len="sm" w="sm" type="none"/>
+                    </a:lnL>
+                    <a:lnR cap="flat" cmpd="sng" w="9525">
+                      <a:solidFill>
+                        <a:srgbClr val="FFFFFF"/>
+                      </a:solidFill>
+                      <a:prstDash val="solid"/>
+                      <a:round/>
+                      <a:headEnd len="sm" w="sm" type="none"/>
+                      <a:tailEnd len="sm" w="sm" type="none"/>
+                    </a:lnR>
+                    <a:lnT cap="flat" cmpd="sng" w="9525">
+                      <a:solidFill>
+                        <a:srgbClr val="F6F8F9"/>
+                      </a:solidFill>
+                      <a:prstDash val="solid"/>
+                      <a:round/>
+                      <a:headEnd len="sm" w="sm" type="none"/>
+                      <a:tailEnd len="sm" w="sm" type="none"/>
+                    </a:lnT>
+                    <a:lnB cap="flat" cmpd="sng" w="9525">
+                      <a:solidFill>
+                        <a:srgbClr val="F6F8F9"/>
+                      </a:solidFill>
+                      <a:prstDash val="solid"/>
+                      <a:round/>
+                      <a:headEnd len="sm" w="sm" type="none"/>
+                      <a:tailEnd len="sm" w="sm" type="none"/>
+                    </a:lnB>
+                    <a:solidFill>
+                      <a:srgbClr val="FFFFFF"/>
+                    </a:solidFill>
+                  </a:tcPr>
+                </a:tc>
+              </a:tr>
+              <a:tr h="284175">
+                <a:tc>
+                  <a:txBody>
+                    <a:bodyPr/>
+                    <a:lstStyle/>
+                    <a:p>
+                      <a:pPr indent="0" lvl="0" marL="0" rtl="0" algn="l">
+                        <a:lnSpc>
+                          <a:spcPct val="115000"/>
+                        </a:lnSpc>
+                        <a:spcBef>
+                          <a:spcPts val="0"/>
+                        </a:spcBef>
+                        <a:spcAft>
+                          <a:spcPts val="0"/>
+                        </a:spcAft>
+                        <a:buNone/>
+                      </a:pPr>
+                      <a:r>
+                        <a:rPr lang="es" sz="800">
+                          <a:latin typeface="Calibri"/>
+                          <a:ea typeface="Calibri"/>
+                          <a:cs typeface="Calibri"/>
+                          <a:sym typeface="Calibri"/>
+                        </a:rPr>
+                        <a:t>Diseño de arquitectura</a:t>
+                      </a:r>
+                      <a:endParaRPr sz="800">
+                        <a:latin typeface="Calibri"/>
+                        <a:ea typeface="Calibri"/>
+                        <a:cs typeface="Calibri"/>
+                        <a:sym typeface="Calibri"/>
+                      </a:endParaRPr>
+                    </a:p>
+                  </a:txBody>
+                  <a:tcPr marT="91425" marB="91425" marR="28575" marL="28575" anchor="ctr">
+                    <a:lnL cap="flat" cmpd="sng" w="9525">
+                      <a:solidFill>
+                        <a:srgbClr val="284E3F"/>
+                      </a:solidFill>
+                      <a:prstDash val="solid"/>
+                      <a:round/>
+                      <a:headEnd len="sm" w="sm" type="none"/>
+                      <a:tailEnd len="sm" w="sm" type="none"/>
+                    </a:lnL>
+                    <a:lnR cap="flat" cmpd="sng" w="9525">
+                      <a:solidFill>
+                        <a:srgbClr val="F6F8F9"/>
+                      </a:solidFill>
+                      <a:prstDash val="solid"/>
+                      <a:round/>
+                      <a:headEnd len="sm" w="sm" type="none"/>
+                      <a:tailEnd len="sm" w="sm" type="none"/>
+                    </a:lnR>
+                    <a:lnT cap="flat" cmpd="sng" w="9525">
+                      <a:solidFill>
+                        <a:srgbClr val="F6F8F9"/>
+                      </a:solidFill>
+                      <a:prstDash val="solid"/>
+                      <a:round/>
+                      <a:headEnd len="sm" w="sm" type="none"/>
+                      <a:tailEnd len="sm" w="sm" type="none"/>
+                    </a:lnT>
+                    <a:lnB cap="flat" cmpd="sng" w="9525">
+                      <a:solidFill>
+                        <a:srgbClr val="F6F8F9"/>
+                      </a:solidFill>
+                      <a:prstDash val="solid"/>
+                      <a:round/>
+                      <a:headEnd len="sm" w="sm" type="none"/>
+                      <a:tailEnd len="sm" w="sm" type="none"/>
+                    </a:lnB>
+                    <a:solidFill>
+                      <a:srgbClr val="F6F8F9"/>
+                    </a:solidFill>
+                  </a:tcPr>
+                </a:tc>
+              </a:tr>
+              <a:tr h="284175">
+                <a:tc>
+                  <a:txBody>
+                    <a:bodyPr/>
+                    <a:lstStyle/>
+                    <a:p>
+                      <a:pPr indent="0" lvl="0" marL="0" rtl="0" algn="l">
+                        <a:lnSpc>
+                          <a:spcPct val="115000"/>
+                        </a:lnSpc>
+                        <a:spcBef>
+                          <a:spcPts val="0"/>
+                        </a:spcBef>
+                        <a:spcAft>
+                          <a:spcPts val="0"/>
+                        </a:spcAft>
+                        <a:buNone/>
+                      </a:pPr>
+                      <a:r>
+                        <a:rPr lang="es" sz="800">
+                          <a:latin typeface="Calibri"/>
+                          <a:ea typeface="Calibri"/>
+                          <a:cs typeface="Calibri"/>
+                          <a:sym typeface="Calibri"/>
+                        </a:rPr>
+                        <a:t>Desarrollo backend (API REST .NET)</a:t>
+                      </a:r>
+                      <a:endParaRPr sz="800">
+                        <a:latin typeface="Calibri"/>
+                        <a:ea typeface="Calibri"/>
+                        <a:cs typeface="Calibri"/>
+                        <a:sym typeface="Calibri"/>
+                      </a:endParaRPr>
+                    </a:p>
+                  </a:txBody>
+                  <a:tcPr marT="91425" marB="91425" marR="28575" marL="28575" anchor="ctr">
+                    <a:lnL cap="flat" cmpd="sng" w="9525">
+                      <a:solidFill>
+                        <a:srgbClr val="284E3F"/>
+                      </a:solidFill>
+                      <a:prstDash val="solid"/>
+                      <a:round/>
+                      <a:headEnd len="sm" w="sm" type="none"/>
+                      <a:tailEnd len="sm" w="sm" type="none"/>
+                    </a:lnL>
+                    <a:lnR cap="flat" cmpd="sng" w="9525">
+                      <a:solidFill>
+                        <a:srgbClr val="FFFFFF"/>
+                      </a:solidFill>
+                      <a:prstDash val="solid"/>
+                      <a:round/>
+                      <a:headEnd len="sm" w="sm" type="none"/>
+                      <a:tailEnd len="sm" w="sm" type="none"/>
+                    </a:lnR>
+                    <a:lnT cap="flat" cmpd="sng" w="9525">
+                      <a:solidFill>
+                        <a:srgbClr val="F6F8F9"/>
+                      </a:solidFill>
+                      <a:prstDash val="solid"/>
+                      <a:round/>
+                      <a:headEnd len="sm" w="sm" type="none"/>
+                      <a:tailEnd len="sm" w="sm" type="none"/>
+                    </a:lnT>
+                    <a:lnB cap="flat" cmpd="sng" w="9525">
+                      <a:solidFill>
+                        <a:srgbClr val="F6F8F9"/>
+                      </a:solidFill>
+                      <a:prstDash val="solid"/>
+                      <a:round/>
+                      <a:headEnd len="sm" w="sm" type="none"/>
+                      <a:tailEnd len="sm" w="sm" type="none"/>
+                    </a:lnB>
+                    <a:solidFill>
+                      <a:srgbClr val="FFFFFF"/>
+                    </a:solidFill>
+                  </a:tcPr>
+                </a:tc>
+              </a:tr>
+              <a:tr h="284175">
+                <a:tc>
+                  <a:txBody>
+                    <a:bodyPr/>
+                    <a:lstStyle/>
+                    <a:p>
+                      <a:pPr indent="0" lvl="0" marL="0" rtl="0" algn="l">
+                        <a:lnSpc>
+                          <a:spcPct val="115000"/>
+                        </a:lnSpc>
+                        <a:spcBef>
+                          <a:spcPts val="0"/>
+                        </a:spcBef>
+                        <a:spcAft>
+                          <a:spcPts val="0"/>
+                        </a:spcAft>
+                        <a:buNone/>
+                      </a:pPr>
+                      <a:r>
+                        <a:rPr lang="es" sz="800">
+                          <a:latin typeface="Calibri"/>
+                          <a:ea typeface="Calibri"/>
+                          <a:cs typeface="Calibri"/>
+                          <a:sym typeface="Calibri"/>
+                        </a:rPr>
+                        <a:t>Desarrollo frontend (UI prototipo)</a:t>
+                      </a:r>
+                      <a:endParaRPr sz="800">
+                        <a:latin typeface="Calibri"/>
+                        <a:ea typeface="Calibri"/>
+                        <a:cs typeface="Calibri"/>
+                        <a:sym typeface="Calibri"/>
+                      </a:endParaRPr>
+                    </a:p>
+                  </a:txBody>
+                  <a:tcPr marT="91425" marB="91425" marR="28575" marL="28575" anchor="ctr">
+                    <a:lnL cap="flat" cmpd="sng" w="9525">
+                      <a:solidFill>
+                        <a:srgbClr val="284E3F"/>
+                      </a:solidFill>
+                      <a:prstDash val="solid"/>
+                      <a:round/>
+                      <a:headEnd len="sm" w="sm" type="none"/>
+                      <a:tailEnd len="sm" w="sm" type="none"/>
+                    </a:lnL>
+                    <a:lnR cap="flat" cmpd="sng" w="9525">
+                      <a:solidFill>
+                        <a:srgbClr val="F6F8F9"/>
+                      </a:solidFill>
+                      <a:prstDash val="solid"/>
+                      <a:round/>
+                      <a:headEnd len="sm" w="sm" type="none"/>
+                      <a:tailEnd len="sm" w="sm" type="none"/>
+                    </a:lnR>
+                    <a:lnT cap="flat" cmpd="sng" w="9525">
+                      <a:solidFill>
+                        <a:srgbClr val="F6F8F9"/>
+                      </a:solidFill>
+                      <a:prstDash val="solid"/>
+                      <a:round/>
+                      <a:headEnd len="sm" w="sm" type="none"/>
+                      <a:tailEnd len="sm" w="sm" type="none"/>
+                    </a:lnT>
+                    <a:lnB cap="flat" cmpd="sng" w="9525">
+                      <a:solidFill>
+                        <a:srgbClr val="F6F8F9"/>
+                      </a:solidFill>
+                      <a:prstDash val="solid"/>
+                      <a:round/>
+                      <a:headEnd len="sm" w="sm" type="none"/>
+                      <a:tailEnd len="sm" w="sm" type="none"/>
+                    </a:lnB>
+                    <a:solidFill>
+                      <a:srgbClr val="F6F8F9"/>
+                    </a:solidFill>
+                  </a:tcPr>
+                </a:tc>
+              </a:tr>
+              <a:tr h="284175">
+                <a:tc>
+                  <a:txBody>
+                    <a:bodyPr/>
+                    <a:lstStyle/>
+                    <a:p>
+                      <a:pPr indent="0" lvl="0" marL="0" rtl="0" algn="l">
+                        <a:lnSpc>
+                          <a:spcPct val="115000"/>
+                        </a:lnSpc>
+                        <a:spcBef>
+                          <a:spcPts val="0"/>
+                        </a:spcBef>
+                        <a:spcAft>
+                          <a:spcPts val="0"/>
+                        </a:spcAft>
+                        <a:buNone/>
+                      </a:pPr>
+                      <a:r>
+                        <a:rPr lang="es" sz="800">
+                          <a:latin typeface="Calibri"/>
+                          <a:ea typeface="Calibri"/>
+                          <a:cs typeface="Calibri"/>
+                          <a:sym typeface="Calibri"/>
+                        </a:rPr>
+                        <a:t>Integración frontend-backend</a:t>
+                      </a:r>
+                      <a:endParaRPr sz="800">
+                        <a:latin typeface="Calibri"/>
+                        <a:ea typeface="Calibri"/>
+                        <a:cs typeface="Calibri"/>
+                        <a:sym typeface="Calibri"/>
+                      </a:endParaRPr>
+                    </a:p>
+                  </a:txBody>
+                  <a:tcPr marT="91425" marB="91425" marR="28575" marL="28575" anchor="ctr">
+                    <a:lnL cap="flat" cmpd="sng" w="9525">
+                      <a:solidFill>
+                        <a:srgbClr val="284E3F"/>
+                      </a:solidFill>
+                      <a:prstDash val="solid"/>
+                      <a:round/>
+                      <a:headEnd len="sm" w="sm" type="none"/>
+                      <a:tailEnd len="sm" w="sm" type="none"/>
+                    </a:lnL>
+                    <a:lnR cap="flat" cmpd="sng" w="9525">
+                      <a:solidFill>
+                        <a:srgbClr val="FFFFFF"/>
+                      </a:solidFill>
+                      <a:prstDash val="solid"/>
+                      <a:round/>
+                      <a:headEnd len="sm" w="sm" type="none"/>
+                      <a:tailEnd len="sm" w="sm" type="none"/>
+                    </a:lnR>
+                    <a:lnT cap="flat" cmpd="sng" w="9525">
+                      <a:solidFill>
+                        <a:srgbClr val="F6F8F9"/>
+                      </a:solidFill>
+                      <a:prstDash val="solid"/>
+                      <a:round/>
+                      <a:headEnd len="sm" w="sm" type="none"/>
+                      <a:tailEnd len="sm" w="sm" type="none"/>
+                    </a:lnT>
+                    <a:lnB cap="flat" cmpd="sng" w="9525">
+                      <a:solidFill>
+                        <a:srgbClr val="F6F8F9"/>
+                      </a:solidFill>
+                      <a:prstDash val="solid"/>
+                      <a:round/>
+                      <a:headEnd len="sm" w="sm" type="none"/>
+                      <a:tailEnd len="sm" w="sm" type="none"/>
+                    </a:lnB>
+                    <a:solidFill>
+                      <a:srgbClr val="FFFFFF"/>
+                    </a:solidFill>
+                  </a:tcPr>
+                </a:tc>
+              </a:tr>
+              <a:tr h="284175">
+                <a:tc>
+                  <a:txBody>
+                    <a:bodyPr/>
+                    <a:lstStyle/>
+                    <a:p>
+                      <a:pPr indent="0" lvl="0" marL="0" rtl="0" algn="l">
+                        <a:lnSpc>
+                          <a:spcPct val="115000"/>
+                        </a:lnSpc>
+                        <a:spcBef>
+                          <a:spcPts val="0"/>
+                        </a:spcBef>
+                        <a:spcAft>
+                          <a:spcPts val="0"/>
+                        </a:spcAft>
+                        <a:buNone/>
+                      </a:pPr>
+                      <a:r>
+                        <a:rPr lang="es" sz="800">
+                          <a:latin typeface="Calibri"/>
+                          <a:ea typeface="Calibri"/>
+                          <a:cs typeface="Calibri"/>
+                          <a:sym typeface="Calibri"/>
+                        </a:rPr>
+                        <a:t>Pruebas unitarias</a:t>
+                      </a:r>
+                      <a:endParaRPr sz="800">
+                        <a:latin typeface="Calibri"/>
+                        <a:ea typeface="Calibri"/>
+                        <a:cs typeface="Calibri"/>
+                        <a:sym typeface="Calibri"/>
+                      </a:endParaRPr>
+                    </a:p>
+                  </a:txBody>
+                  <a:tcPr marT="91425" marB="91425" marR="28575" marL="28575" anchor="ctr">
+                    <a:lnL cap="flat" cmpd="sng" w="9525">
+                      <a:solidFill>
+                        <a:srgbClr val="284E3F"/>
+                      </a:solidFill>
+                      <a:prstDash val="solid"/>
+                      <a:round/>
+                      <a:headEnd len="sm" w="sm" type="none"/>
+                      <a:tailEnd len="sm" w="sm" type="none"/>
+                    </a:lnL>
+                    <a:lnR cap="flat" cmpd="sng" w="9525">
+                      <a:solidFill>
+                        <a:srgbClr val="F6F8F9"/>
+                      </a:solidFill>
+                      <a:prstDash val="solid"/>
+                      <a:round/>
+                      <a:headEnd len="sm" w="sm" type="none"/>
+                      <a:tailEnd len="sm" w="sm" type="none"/>
+                    </a:lnR>
+                    <a:lnT cap="flat" cmpd="sng" w="9525">
+                      <a:solidFill>
+                        <a:srgbClr val="F6F8F9"/>
+                      </a:solidFill>
+                      <a:prstDash val="solid"/>
+                      <a:round/>
+                      <a:headEnd len="sm" w="sm" type="none"/>
+                      <a:tailEnd len="sm" w="sm" type="none"/>
+                    </a:lnT>
+                    <a:lnB cap="flat" cmpd="sng" w="9525">
+                      <a:solidFill>
+                        <a:srgbClr val="F6F8F9"/>
+                      </a:solidFill>
+                      <a:prstDash val="solid"/>
+                      <a:round/>
+                      <a:headEnd len="sm" w="sm" type="none"/>
+                      <a:tailEnd len="sm" w="sm" type="none"/>
+                    </a:lnB>
+                    <a:solidFill>
+                      <a:srgbClr val="F6F8F9"/>
+                    </a:solidFill>
+                  </a:tcPr>
+                </a:tc>
+              </a:tr>
+              <a:tr h="284175">
+                <a:tc>
+                  <a:txBody>
+                    <a:bodyPr/>
+                    <a:lstStyle/>
+                    <a:p>
+                      <a:pPr indent="0" lvl="0" marL="0" rtl="0" algn="l">
+                        <a:lnSpc>
+                          <a:spcPct val="115000"/>
+                        </a:lnSpc>
+                        <a:spcBef>
+                          <a:spcPts val="0"/>
+                        </a:spcBef>
+                        <a:spcAft>
+                          <a:spcPts val="0"/>
+                        </a:spcAft>
+                        <a:buNone/>
+                      </a:pPr>
+                      <a:r>
+                        <a:rPr lang="es" sz="800">
+                          <a:latin typeface="Calibri"/>
+                          <a:ea typeface="Calibri"/>
+                          <a:cs typeface="Calibri"/>
+                          <a:sym typeface="Calibri"/>
+                        </a:rPr>
+                        <a:t>Pruebas de integración (E2E)</a:t>
+                      </a:r>
+                      <a:endParaRPr sz="800">
+                        <a:latin typeface="Calibri"/>
+                        <a:ea typeface="Calibri"/>
+                        <a:cs typeface="Calibri"/>
+                        <a:sym typeface="Calibri"/>
+                      </a:endParaRPr>
+                    </a:p>
+                  </a:txBody>
+                  <a:tcPr marT="91425" marB="91425" marR="28575" marL="28575" anchor="ctr">
+                    <a:lnL cap="flat" cmpd="sng" w="9525">
+                      <a:solidFill>
+                        <a:srgbClr val="284E3F"/>
+                      </a:solidFill>
+                      <a:prstDash val="solid"/>
+                      <a:round/>
+                      <a:headEnd len="sm" w="sm" type="none"/>
+                      <a:tailEnd len="sm" w="sm" type="none"/>
+                    </a:lnL>
+                    <a:lnR cap="flat" cmpd="sng" w="9525">
+                      <a:solidFill>
+                        <a:srgbClr val="FFFFFF"/>
+                      </a:solidFill>
+                      <a:prstDash val="solid"/>
+                      <a:round/>
+                      <a:headEnd len="sm" w="sm" type="none"/>
+                      <a:tailEnd len="sm" w="sm" type="none"/>
+                    </a:lnR>
+                    <a:lnT cap="flat" cmpd="sng" w="9525">
+                      <a:solidFill>
+                        <a:srgbClr val="F6F8F9"/>
+                      </a:solidFill>
+                      <a:prstDash val="solid"/>
+                      <a:round/>
+                      <a:headEnd len="sm" w="sm" type="none"/>
+                      <a:tailEnd len="sm" w="sm" type="none"/>
+                    </a:lnT>
+                    <a:lnB cap="flat" cmpd="sng" w="9525">
+                      <a:solidFill>
+                        <a:srgbClr val="F6F8F9"/>
+                      </a:solidFill>
+                      <a:prstDash val="solid"/>
+                      <a:round/>
+                      <a:headEnd len="sm" w="sm" type="none"/>
+                      <a:tailEnd len="sm" w="sm" type="none"/>
+                    </a:lnB>
+                    <a:solidFill>
+                      <a:srgbClr val="FFFFFF"/>
+                    </a:solidFill>
+                  </a:tcPr>
+                </a:tc>
+              </a:tr>
+              <a:tr h="284175">
+                <a:tc>
+                  <a:txBody>
+                    <a:bodyPr/>
+                    <a:lstStyle/>
+                    <a:p>
+                      <a:pPr indent="0" lvl="0" marL="0" rtl="0" algn="l">
+                        <a:lnSpc>
+                          <a:spcPct val="115000"/>
+                        </a:lnSpc>
+                        <a:spcBef>
+                          <a:spcPts val="0"/>
+                        </a:spcBef>
+                        <a:spcAft>
+                          <a:spcPts val="0"/>
+                        </a:spcAft>
+                        <a:buNone/>
+                      </a:pPr>
+                      <a:r>
+                        <a:rPr lang="es" sz="800">
+                          <a:latin typeface="Calibri"/>
+                          <a:ea typeface="Calibri"/>
+                          <a:cs typeface="Calibri"/>
+                          <a:sym typeface="Calibri"/>
+                        </a:rPr>
+                        <a:t>Ajustes y correcciones</a:t>
+                      </a:r>
+                      <a:endParaRPr sz="800">
+                        <a:latin typeface="Calibri"/>
+                        <a:ea typeface="Calibri"/>
+                        <a:cs typeface="Calibri"/>
+                        <a:sym typeface="Calibri"/>
+                      </a:endParaRPr>
+                    </a:p>
+                  </a:txBody>
+                  <a:tcPr marT="91425" marB="91425" marR="28575" marL="28575" anchor="ctr">
+                    <a:lnL cap="flat" cmpd="sng" w="9525">
+                      <a:solidFill>
+                        <a:srgbClr val="284E3F"/>
+                      </a:solidFill>
+                      <a:prstDash val="solid"/>
+                      <a:round/>
+                      <a:headEnd len="sm" w="sm" type="none"/>
+                      <a:tailEnd len="sm" w="sm" type="none"/>
+                    </a:lnL>
+                    <a:lnR cap="flat" cmpd="sng" w="9525">
+                      <a:solidFill>
+                        <a:srgbClr val="F6F8F9"/>
+                      </a:solidFill>
+                      <a:prstDash val="solid"/>
+                      <a:round/>
+                      <a:headEnd len="sm" w="sm" type="none"/>
+                      <a:tailEnd len="sm" w="sm" type="none"/>
+                    </a:lnR>
+                    <a:lnT cap="flat" cmpd="sng" w="9525">
+                      <a:solidFill>
+                        <a:srgbClr val="F6F8F9"/>
+                      </a:solidFill>
+                      <a:prstDash val="solid"/>
+                      <a:round/>
+                      <a:headEnd len="sm" w="sm" type="none"/>
+                      <a:tailEnd len="sm" w="sm" type="none"/>
+                    </a:lnT>
+                    <a:lnB cap="flat" cmpd="sng" w="9525">
+                      <a:solidFill>
+                        <a:srgbClr val="F6F8F9"/>
+                      </a:solidFill>
+                      <a:prstDash val="solid"/>
+                      <a:round/>
+                      <a:headEnd len="sm" w="sm" type="none"/>
+                      <a:tailEnd len="sm" w="sm" type="none"/>
+                    </a:lnB>
+                    <a:solidFill>
+                      <a:srgbClr val="F6F8F9"/>
+                    </a:solidFill>
+                  </a:tcPr>
+                </a:tc>
+              </a:tr>
+              <a:tr h="284175">
+                <a:tc>
+                  <a:txBody>
+                    <a:bodyPr/>
+                    <a:lstStyle/>
+                    <a:p>
+                      <a:pPr indent="0" lvl="0" marL="0" rtl="0" algn="l">
+                        <a:lnSpc>
+                          <a:spcPct val="115000"/>
+                        </a:lnSpc>
+                        <a:spcBef>
+                          <a:spcPts val="0"/>
+                        </a:spcBef>
+                        <a:spcAft>
+                          <a:spcPts val="0"/>
+                        </a:spcAft>
+                        <a:buNone/>
+                      </a:pPr>
+                      <a:r>
+                        <a:rPr lang="es" sz="800">
+                          <a:latin typeface="Calibri"/>
+                          <a:ea typeface="Calibri"/>
+                          <a:cs typeface="Calibri"/>
+                          <a:sym typeface="Calibri"/>
+                        </a:rPr>
+                        <a:t>Pruebas finales + despliegue simulado</a:t>
+                      </a:r>
+                      <a:endParaRPr sz="800">
+                        <a:latin typeface="Calibri"/>
+                        <a:ea typeface="Calibri"/>
+                        <a:cs typeface="Calibri"/>
+                        <a:sym typeface="Calibri"/>
+                      </a:endParaRPr>
+                    </a:p>
+                  </a:txBody>
+                  <a:tcPr marT="91425" marB="91425" marR="28575" marL="28575" anchor="ctr">
+                    <a:lnL cap="flat" cmpd="sng" w="9525">
+                      <a:solidFill>
+                        <a:srgbClr val="284E3F"/>
+                      </a:solidFill>
+                      <a:prstDash val="solid"/>
+                      <a:round/>
+                      <a:headEnd len="sm" w="sm" type="none"/>
+                      <a:tailEnd len="sm" w="sm" type="none"/>
+                    </a:lnL>
+                    <a:lnR cap="flat" cmpd="sng" w="9525">
+                      <a:solidFill>
+                        <a:srgbClr val="FFFFFF"/>
+                      </a:solidFill>
+                      <a:prstDash val="solid"/>
+                      <a:round/>
+                      <a:headEnd len="sm" w="sm" type="none"/>
+                      <a:tailEnd len="sm" w="sm" type="none"/>
+                    </a:lnR>
+                    <a:lnT cap="flat" cmpd="sng" w="9525">
+                      <a:solidFill>
+                        <a:srgbClr val="F6F8F9"/>
+                      </a:solidFill>
+                      <a:prstDash val="solid"/>
+                      <a:round/>
+                      <a:headEnd len="sm" w="sm" type="none"/>
+                      <a:tailEnd len="sm" w="sm" type="none"/>
+                    </a:lnT>
+                    <a:lnB cap="flat" cmpd="sng" w="9525">
+                      <a:solidFill>
+                        <a:srgbClr val="F6F8F9"/>
+                      </a:solidFill>
+                      <a:prstDash val="solid"/>
+                      <a:round/>
+                      <a:headEnd len="sm" w="sm" type="none"/>
+                      <a:tailEnd len="sm" w="sm" type="none"/>
+                    </a:lnB>
+                    <a:solidFill>
+                      <a:srgbClr val="FFFFFF"/>
+                    </a:solidFill>
+                  </a:tcPr>
+                </a:tc>
+              </a:tr>
+              <a:tr h="284175">
+                <a:tc>
+                  <a:txBody>
+                    <a:bodyPr/>
+                    <a:lstStyle/>
+                    <a:p>
+                      <a:pPr indent="0" lvl="0" marL="0" rtl="0" algn="l">
+                        <a:lnSpc>
+                          <a:spcPct val="115000"/>
+                        </a:lnSpc>
+                        <a:spcBef>
+                          <a:spcPts val="0"/>
+                        </a:spcBef>
+                        <a:spcAft>
+                          <a:spcPts val="0"/>
+                        </a:spcAft>
+                        <a:buNone/>
+                      </a:pPr>
+                      <a:r>
+                        <a:rPr lang="es" sz="800">
+                          <a:latin typeface="Calibri"/>
+                          <a:ea typeface="Calibri"/>
+                          <a:cs typeface="Calibri"/>
+                          <a:sym typeface="Calibri"/>
+                        </a:rPr>
+                        <a:t>Preparación presentación final</a:t>
+                      </a:r>
+                      <a:endParaRPr sz="800">
+                        <a:latin typeface="Calibri"/>
+                        <a:ea typeface="Calibri"/>
+                        <a:cs typeface="Calibri"/>
+                        <a:sym typeface="Calibri"/>
+                      </a:endParaRPr>
+                    </a:p>
+                  </a:txBody>
+                  <a:tcPr marT="91425" marB="91425" marR="28575" marL="28575" anchor="ctr">
+                    <a:lnL cap="flat" cmpd="sng" w="9525">
+                      <a:solidFill>
+                        <a:srgbClr val="284E3F"/>
+                      </a:solidFill>
+                      <a:prstDash val="solid"/>
+                      <a:round/>
+                      <a:headEnd len="sm" w="sm" type="none"/>
+                      <a:tailEnd len="sm" w="sm" type="none"/>
+                    </a:lnL>
+                    <a:lnR cap="flat" cmpd="sng" w="9525">
+                      <a:solidFill>
+                        <a:srgbClr val="F6F8F9"/>
+                      </a:solidFill>
+                      <a:prstDash val="solid"/>
+                      <a:round/>
+                      <a:headEnd len="sm" w="sm" type="none"/>
+                      <a:tailEnd len="sm" w="sm" type="none"/>
+                    </a:lnR>
+                    <a:lnT cap="flat" cmpd="sng" w="9525">
+                      <a:solidFill>
+                        <a:srgbClr val="F6F8F9"/>
+                      </a:solidFill>
+                      <a:prstDash val="solid"/>
+                      <a:round/>
+                      <a:headEnd len="sm" w="sm" type="none"/>
+                      <a:tailEnd len="sm" w="sm" type="none"/>
+                    </a:lnT>
+                    <a:lnB cap="flat" cmpd="sng" w="9525">
+                      <a:solidFill>
+                        <a:srgbClr val="F6F8F9"/>
+                      </a:solidFill>
+                      <a:prstDash val="solid"/>
+                      <a:round/>
+                      <a:headEnd len="sm" w="sm" type="none"/>
+                      <a:tailEnd len="sm" w="sm" type="none"/>
+                    </a:lnB>
+                    <a:solidFill>
+                      <a:srgbClr val="F6F8F9"/>
+                    </a:solidFill>
+                  </a:tcPr>
+                </a:tc>
+              </a:tr>
+              <a:tr h="284175">
+                <a:tc>
+                  <a:txBody>
+                    <a:bodyPr/>
+                    <a:lstStyle/>
+                    <a:p>
+                      <a:pPr indent="0" lvl="0" marL="0" rtl="0" algn="l">
+                        <a:lnSpc>
+                          <a:spcPct val="115000"/>
+                        </a:lnSpc>
+                        <a:spcBef>
+                          <a:spcPts val="0"/>
+                        </a:spcBef>
+                        <a:spcAft>
+                          <a:spcPts val="0"/>
+                        </a:spcAft>
+                        <a:buNone/>
+                      </a:pPr>
+                      <a:r>
+                        <a:rPr lang="es" sz="800">
+                          <a:latin typeface="Calibri"/>
+                          <a:ea typeface="Calibri"/>
+                          <a:cs typeface="Calibri"/>
+                          <a:sym typeface="Calibri"/>
+                        </a:rPr>
+                        <a:t>Entrega final + exposición</a:t>
+                      </a:r>
+                      <a:endParaRPr sz="800">
+                        <a:latin typeface="Calibri"/>
+                        <a:ea typeface="Calibri"/>
+                        <a:cs typeface="Calibri"/>
+                        <a:sym typeface="Calibri"/>
+                      </a:endParaRPr>
+                    </a:p>
+                  </a:txBody>
+                  <a:tcPr marT="91425" marB="91425" marR="28575" marL="28575" anchor="ctr">
+                    <a:lnL cap="flat" cmpd="sng" w="9525">
+                      <a:solidFill>
+                        <a:srgbClr val="284E3F"/>
+                      </a:solidFill>
+                      <a:prstDash val="solid"/>
+                      <a:round/>
+                      <a:headEnd len="sm" w="sm" type="none"/>
+                      <a:tailEnd len="sm" w="sm" type="none"/>
+                    </a:lnL>
+                    <a:lnR cap="flat" cmpd="sng" w="9525">
+                      <a:solidFill>
+                        <a:srgbClr val="FFFFFF"/>
+                      </a:solidFill>
+                      <a:prstDash val="solid"/>
+                      <a:round/>
+                      <a:headEnd len="sm" w="sm" type="none"/>
+                      <a:tailEnd len="sm" w="sm" type="none"/>
+                    </a:lnR>
+                    <a:lnT cap="flat" cmpd="sng" w="9525">
+                      <a:solidFill>
+                        <a:srgbClr val="F6F8F9"/>
+                      </a:solidFill>
+                      <a:prstDash val="solid"/>
+                      <a:round/>
+                      <a:headEnd len="sm" w="sm" type="none"/>
+                      <a:tailEnd len="sm" w="sm" type="none"/>
+                    </a:lnT>
+                    <a:lnB cap="flat" cmpd="sng" w="9525">
+                      <a:solidFill>
+                        <a:srgbClr val="F6F8F9"/>
+                      </a:solidFill>
+                      <a:prstDash val="solid"/>
+                      <a:round/>
+                      <a:headEnd len="sm" w="sm" type="none"/>
+                      <a:tailEnd len="sm" w="sm" type="none"/>
+                    </a:lnB>
+                    <a:solidFill>
+                      <a:srgbClr val="FFFFFF"/>
+                    </a:solidFill>
+                  </a:tcPr>
+                </a:tc>
+              </a:tr>
+              <a:tr h="284175">
+                <a:tc>
+                  <a:txBody>
+                    <a:bodyPr/>
+                    <a:lstStyle/>
+                    <a:p>
+                      <a:pPr indent="0" lvl="0" marL="0" rtl="0" algn="l">
+                        <a:lnSpc>
+                          <a:spcPct val="115000"/>
+                        </a:lnSpc>
+                        <a:spcBef>
+                          <a:spcPts val="0"/>
+                        </a:spcBef>
+                        <a:spcAft>
+                          <a:spcPts val="0"/>
+                        </a:spcAft>
+                        <a:buNone/>
+                      </a:pPr>
+                      <a:r>
+                        <a:rPr lang="es" sz="800">
+                          <a:latin typeface="Calibri"/>
+                          <a:ea typeface="Calibri"/>
+                          <a:cs typeface="Calibri"/>
+                          <a:sym typeface="Calibri"/>
+                        </a:rPr>
+                        <a:t>Semanas buffer</a:t>
+                      </a:r>
+                      <a:endParaRPr sz="800">
+                        <a:latin typeface="Calibri"/>
+                        <a:ea typeface="Calibri"/>
+                        <a:cs typeface="Calibri"/>
+                        <a:sym typeface="Calibri"/>
+                      </a:endParaRPr>
+                    </a:p>
+                  </a:txBody>
+                  <a:tcPr marT="91425" marB="91425" marR="28575" marL="28575" anchor="ctr">
+                    <a:lnL cap="flat" cmpd="sng" w="9525">
+                      <a:solidFill>
+                        <a:srgbClr val="284E3F"/>
+                      </a:solidFill>
+                      <a:prstDash val="solid"/>
+                      <a:round/>
+                      <a:headEnd len="sm" w="sm" type="none"/>
+                      <a:tailEnd len="sm" w="sm" type="none"/>
+                    </a:lnL>
+                    <a:lnR cap="flat" cmpd="sng" w="9525">
+                      <a:solidFill>
+                        <a:srgbClr val="F6F8F9"/>
+                      </a:solidFill>
+                      <a:prstDash val="solid"/>
+                      <a:round/>
+                      <a:headEnd len="sm" w="sm" type="none"/>
+                      <a:tailEnd len="sm" w="sm" type="none"/>
+                    </a:lnR>
+                    <a:lnT cap="flat" cmpd="sng" w="9525">
+                      <a:solidFill>
+                        <a:srgbClr val="F6F8F9"/>
+                      </a:solidFill>
+                      <a:prstDash val="solid"/>
+                      <a:round/>
+                      <a:headEnd len="sm" w="sm" type="none"/>
+                      <a:tailEnd len="sm" w="sm" type="none"/>
+                    </a:lnT>
+                    <a:lnB cap="flat" cmpd="sng" w="9525">
+                      <a:solidFill>
+                        <a:srgbClr val="284E3F"/>
+                      </a:solidFill>
+                      <a:prstDash val="solid"/>
+                      <a:round/>
+                      <a:headEnd len="sm" w="sm" type="none"/>
+                      <a:tailEnd len="sm" w="sm" type="none"/>
+                    </a:lnB>
+                    <a:solidFill>
+                      <a:srgbClr val="F6F8F9"/>
+                    </a:solidFill>
+                  </a:tcPr>
+                </a:tc>
+              </a:tr>
+            </a:tbl>
+          </a:graphicData>
+        </a:graphic>
+      </p:graphicFrame>
+    </p:spTree>
+  </p:cSld>
+  <p:clrMapOvr>
+    <a:masterClrMapping/>
+  </p:clrMapOvr>
+</p:sld>
+</file>
+
+<file path=ppt/slides/slide8.xml><?xml version="1.0" encoding="utf-8"?>
+<p:sld xmlns:a="http://schemas.openxmlformats.org/drawingml/2006/main" xmlns:r="http://schemas.openxmlformats.org/officeDocument/2006/relationships" xmlns:mc="http://schemas.openxmlformats.org/markup-compatibility/2006" xmlns:mv="urn:schemas-microsoft-com:mac:vml" xmlns:p="http://schemas.openxmlformats.org/presentationml/2006/main" xmlns:c="http://schemas.openxmlformats.org/drawingml/2006/chart" xmlns:dgm="http://schemas.openxmlformats.org/drawingml/2006/diagram" xmlns:o="urn:schemas-microsoft-com:office:office" xmlns:v="urn:schemas-microsoft-com:vml" xmlns:pvml="urn:schemas-microsoft-com:office:powerpoint" xmlns:com="http://schemas.openxmlformats.org/drawingml/2006/compatibility" xmlns:p14="http://schemas.microsoft.com/office/powerpoint/2010/main" xmlns:p15="http://schemas.microsoft.com/office/powerpoint/2012/main" xmlns:ahyp="http://schemas.microsoft.com/office/drawing/2018/hyperlinkcolor">
+  <p:cSld>
+    <p:spTree>
+      <p:nvGrpSpPr>
+        <p:cNvPr id="134" name="Shape 134"/>
+        <p:cNvGrpSpPr/>
+        <p:nvPr/>
+      </p:nvGrpSpPr>
+      <p:grpSpPr>
+        <a:xfrm>
+          <a:off x="0" y="0"/>
+          <a:ext cx="0" cy="0"/>
+          <a:chOff x="0" y="0"/>
+          <a:chExt cx="0" cy="0"/>
+        </a:xfrm>
+      </p:grpSpPr>
+      <p:sp>
+        <p:nvSpPr>
+          <p:cNvPr id="135" name="Google Shape;135;p20"/>
+          <p:cNvSpPr txBox="1"/>
+          <p:nvPr>
+            <p:ph type="title"/>
+          </p:nvPr>
+        </p:nvSpPr>
+        <p:spPr>
+          <a:xfrm>
+            <a:off x="311700" y="410000"/>
+            <a:ext cx="8520600" cy="607800"/>
+          </a:xfrm>
+          <a:prstGeom prst="rect">
+            <a:avLst/>
+          </a:prstGeom>
+        </p:spPr>
+        <p:txBody>
+          <a:bodyPr anchorCtr="0" anchor="t" bIns="91425" lIns="91425" spcFirstLastPara="1" rIns="91425" wrap="square" tIns="91425">
+            <a:normAutofit fontScale="90000"/>
+          </a:bodyPr>
+          <a:lstStyle/>
+          <a:p>
+            <a:pPr indent="0" lvl="0" marL="0" rtl="0" algn="l">
+              <a:spcBef>
+                <a:spcPts val="0"/>
+              </a:spcBef>
+              <a:spcAft>
+                <a:spcPts val="0"/>
+              </a:spcAft>
+              <a:buNone/>
+            </a:pPr>
+            <a:r>
+              <a:rPr lang="es"/>
+              <a:t>Evidencias a entregar</a:t>
+            </a:r>
+            <a:endParaRPr/>
+          </a:p>
+        </p:txBody>
+      </p:sp>
+      <p:sp>
+        <p:nvSpPr>
+          <p:cNvPr id="136" name="Google Shape;136;p20"/>
+          <p:cNvSpPr txBox="1"/>
+          <p:nvPr>
+            <p:ph idx="1" type="body"/>
+          </p:nvPr>
+        </p:nvSpPr>
+        <p:spPr>
+          <a:xfrm>
+            <a:off x="311700" y="1229875"/>
+            <a:ext cx="8520600" cy="3339000"/>
+          </a:xfrm>
+          <a:prstGeom prst="rect">
+            <a:avLst/>
+          </a:prstGeom>
+        </p:spPr>
+        <p:txBody>
+          <a:bodyPr anchorCtr="0" anchor="t" bIns="91425" lIns="91425" spcFirstLastPara="1" rIns="91425" wrap="square" tIns="91425">
+            <a:normAutofit/>
+          </a:bodyPr>
+          <a:lstStyle/>
+          <a:p>
+            <a:pPr indent="0" lvl="0" marL="0" rtl="0" algn="l">
+              <a:spcBef>
+                <a:spcPts val="0"/>
+              </a:spcBef>
+              <a:spcAft>
+                <a:spcPts val="0"/>
+              </a:spcAft>
+              <a:buNone/>
+            </a:pPr>
+            <a:r>
+              <a:rPr lang="es"/>
+              <a:t>Informe de avance (acta, requerimientos, prototipo inicial).</a:t>
+            </a:r>
+            <a:endParaRPr/>
+          </a:p>
+          <a:p>
+            <a:pPr indent="0" lvl="0" marL="0" rtl="0" algn="l">
+              <a:spcBef>
+                <a:spcPts val="1200"/>
+              </a:spcBef>
+              <a:spcAft>
+                <a:spcPts val="0"/>
+              </a:spcAft>
+              <a:buNone/>
+            </a:pPr>
+            <a:r>
+              <a:t/>
+            </a:r>
+            <a:endParaRPr/>
+          </a:p>
+          <a:p>
+            <a:pPr indent="0" lvl="0" marL="0" rtl="0" algn="l">
+              <a:spcBef>
+                <a:spcPts val="1200"/>
+              </a:spcBef>
+              <a:spcAft>
+                <a:spcPts val="0"/>
+              </a:spcAft>
+              <a:buNone/>
+            </a:pPr>
+            <a:r>
+              <a:rPr lang="es"/>
+              <a:t>MVP funcional (MediTriage).</a:t>
+            </a:r>
+            <a:endParaRPr/>
+          </a:p>
+          <a:p>
+            <a:pPr indent="0" lvl="0" marL="0" rtl="0" algn="l">
+              <a:spcBef>
+                <a:spcPts val="1200"/>
+              </a:spcBef>
+              <a:spcAft>
+                <a:spcPts val="0"/>
+              </a:spcAft>
+              <a:buNone/>
+            </a:pPr>
+            <a:r>
+              <a:t/>
+            </a:r>
+            <a:endParaRPr/>
+          </a:p>
+          <a:p>
+            <a:pPr indent="0" lvl="0" marL="0" rtl="0" algn="l">
+              <a:spcBef>
+                <a:spcPts val="1200"/>
+              </a:spcBef>
+              <a:spcAft>
+                <a:spcPts val="0"/>
+              </a:spcAft>
+              <a:buNone/>
+            </a:pPr>
+            <a:r>
+              <a:rPr lang="es"/>
+              <a:t>Documentación técnica y de usuario.</a:t>
+            </a:r>
+            <a:endParaRPr/>
+          </a:p>
+          <a:p>
+            <a:pPr indent="0" lvl="0" marL="0" rtl="0" algn="l">
+              <a:spcBef>
+                <a:spcPts val="1200"/>
+              </a:spcBef>
+              <a:spcAft>
+                <a:spcPts val="0"/>
+              </a:spcAft>
+              <a:buNone/>
+            </a:pPr>
+            <a:r>
+              <a:t/>
+            </a:r>
+            <a:endParaRPr/>
+          </a:p>
+          <a:p>
+            <a:pPr indent="0" lvl="0" marL="0" rtl="0" algn="l">
+              <a:spcBef>
+                <a:spcPts val="1200"/>
+              </a:spcBef>
+              <a:spcAft>
+                <a:spcPts val="1200"/>
+              </a:spcAft>
+              <a:buNone/>
+            </a:pPr>
+            <a:r>
+              <a:rPr lang="es"/>
+              <a:t>Presentación final y demo.</a:t>
+            </a:r>
+            <a:endParaRPr/>
+          </a:p>
+        </p:txBody>
+      </p:sp>
+      <p:pic>
+        <p:nvPicPr>
+          <p:cNvPr id="137" name="Google Shape;137;p20"/>
+          <p:cNvPicPr preferRelativeResize="0"/>
+          <p:nvPr/>
+        </p:nvPicPr>
+        <p:blipFill>
+          <a:blip r:embed="rId3">
+            <a:alphaModFix/>
+          </a:blip>
+          <a:stretch>
+            <a:fillRect/>
+          </a:stretch>
+        </p:blipFill>
+        <p:spPr>
+          <a:xfrm>
+            <a:off x="6449300" y="737900"/>
+            <a:ext cx="2631250" cy="2631250"/>
+          </a:xfrm>
+          <a:prstGeom prst="rect">
+            <a:avLst/>
+          </a:prstGeom>
+          <a:noFill/>
+          <a:ln>
+            <a:noFill/>
+          </a:ln>
+        </p:spPr>
+      </p:pic>
+    </p:spTree>
+  </p:cSld>
+  <p:clrMapOvr>
+    <a:masterClrMapping/>
+  </p:clrMapOvr>
+</p:sld>
+</file>
+
+<file path=ppt/slides/slide9.xml><?xml version="1.0" encoding="utf-8"?>
+<p:sld xmlns:a="http://schemas.openxmlformats.org/drawingml/2006/main" xmlns:r="http://schemas.openxmlformats.org/officeDocument/2006/relationships" xmlns:mc="http://schemas.openxmlformats.org/markup-compatibility/2006" xmlns:mv="urn:schemas-microsoft-com:mac:vml" xmlns:p="http://schemas.openxmlformats.org/presentationml/2006/main" xmlns:c="http://schemas.openxmlformats.org/drawingml/2006/chart" xmlns:dgm="http://schemas.openxmlformats.org/drawingml/2006/diagram" xmlns:o="urn:schemas-microsoft-com:office:office" xmlns:v="urn:schemas-microsoft-com:vml" xmlns:pvml="urn:schemas-microsoft-com:office:powerpoint" xmlns:com="http://schemas.openxmlformats.org/drawingml/2006/compatibility" xmlns:p14="http://schemas.microsoft.com/office/powerpoint/2010/main" xmlns:p15="http://schemas.microsoft.com/office/powerpoint/2012/main" xmlns:ahyp="http://schemas.microsoft.com/office/drawing/2018/hyperlinkcolor">
+  <p:cSld>
+    <p:spTree>
+      <p:nvGrpSpPr>
+        <p:cNvPr id="141" name="Shape 141"/>
+        <p:cNvGrpSpPr/>
+        <p:nvPr/>
+      </p:nvGrpSpPr>
+      <p:grpSpPr>
+        <a:xfrm>
+          <a:off x="0" y="0"/>
+          <a:ext cx="0" cy="0"/>
+          <a:chOff x="0" y="0"/>
+          <a:chExt cx="0" cy="0"/>
+        </a:xfrm>
+      </p:grpSpPr>
+      <p:sp>
+        <p:nvSpPr>
+          <p:cNvPr id="142" name="Google Shape;142;p21"/>
+          <p:cNvSpPr txBox="1"/>
+          <p:nvPr>
+            <p:ph type="title"/>
+          </p:nvPr>
+        </p:nvSpPr>
+        <p:spPr>
+          <a:xfrm>
+            <a:off x="311700" y="410000"/>
+            <a:ext cx="8520600" cy="607800"/>
+          </a:xfrm>
+          <a:prstGeom prst="rect">
+            <a:avLst/>
+          </a:prstGeom>
+        </p:spPr>
+        <p:txBody>
+          <a:bodyPr anchorCtr="0" anchor="t" bIns="91425" lIns="91425" spcFirstLastPara="1" rIns="91425" wrap="square" tIns="91425">
+            <a:normAutofit fontScale="90000"/>
+          </a:bodyPr>
+          <a:lstStyle/>
+          <a:p>
+            <a:pPr indent="0" lvl="0" marL="0" rtl="0" algn="l">
+              <a:spcBef>
+                <a:spcPts val="0"/>
+              </a:spcBef>
+              <a:spcAft>
+                <a:spcPts val="0"/>
+              </a:spcAft>
+              <a:buNone/>
+            </a:pPr>
+            <a:r>
+              <a:rPr lang="es"/>
+              <a:t>Conclusión</a:t>
+            </a:r>
+            <a:endParaRPr/>
+          </a:p>
+        </p:txBody>
+      </p:sp>
+      <p:sp>
+        <p:nvSpPr>
+          <p:cNvPr id="143" name="Google Shape;143;p21"/>
+          <p:cNvSpPr txBox="1"/>
+          <p:nvPr>
+            <p:ph idx="1" type="body"/>
+          </p:nvPr>
+        </p:nvSpPr>
+        <p:spPr>
+          <a:xfrm>
+            <a:off x="311700" y="1229875"/>
+            <a:ext cx="8520600" cy="3339000"/>
+          </a:xfrm>
+          <a:prstGeom prst="rect">
+            <a:avLst/>
+          </a:prstGeom>
+        </p:spPr>
+        <p:txBody>
+          <a:bodyPr anchorCtr="0" anchor="t" bIns="91425" lIns="91425" spcFirstLastPara="1" rIns="91425" wrap="square" tIns="91425">
+            <a:normAutofit/>
+          </a:bodyPr>
+          <a:lstStyle/>
+          <a:p>
+            <a:pPr indent="0" lvl="0" marL="0" rtl="0" algn="l">
+              <a:spcBef>
+                <a:spcPts val="0"/>
+              </a:spcBef>
+              <a:spcAft>
+                <a:spcPts val="0"/>
+              </a:spcAft>
+              <a:buNone/>
+            </a:pPr>
+            <a:r>
+              <a:rPr lang="es"/>
+              <a:t>MediTriage aborda un problema real del sector salud.</a:t>
+            </a:r>
+            <a:br>
+              <a:rPr lang="es"/>
+            </a:br>
+            <a:endParaRPr/>
+          </a:p>
+          <a:p>
+            <a:pPr indent="0" lvl="0" marL="0" rtl="0" algn="l">
+              <a:spcBef>
+                <a:spcPts val="1200"/>
+              </a:spcBef>
+              <a:spcAft>
+                <a:spcPts val="0"/>
+              </a:spcAft>
+              <a:buNone/>
+            </a:pPr>
+            <a:r>
+              <a:rPr lang="es"/>
+              <a:t>Integra competencias del perfil de egreso (desarrollo, integración, gestión, calidad).</a:t>
+            </a:r>
+            <a:br>
+              <a:rPr lang="es"/>
+            </a:br>
+            <a:endParaRPr/>
+          </a:p>
+          <a:p>
+            <a:pPr indent="0" lvl="0" marL="0" rtl="0" algn="l">
+              <a:spcBef>
+                <a:spcPts val="1200"/>
+              </a:spcBef>
+              <a:spcAft>
+                <a:spcPts val="0"/>
+              </a:spcAft>
+              <a:buNone/>
+            </a:pPr>
+            <a:r>
+              <a:rPr lang="es"/>
+              <a:t>Aporta valor profesional al equipo: consolida experiencia de Matías y fortalece el inicio profesional de Raúl.</a:t>
+            </a:r>
+            <a:endParaRPr/>
+          </a:p>
+          <a:p>
+            <a:pPr indent="0" lvl="0" marL="0" rtl="0" algn="l">
+              <a:spcBef>
+                <a:spcPts val="1200"/>
+              </a:spcBef>
+              <a:spcAft>
+                <a:spcPts val="1200"/>
+              </a:spcAft>
+              <a:buNone/>
+            </a:pPr>
+            <a:r>
+              <a:t/>
+            </a:r>
+            <a:endParaRPr/>
+          </a:p>
+        </p:txBody>
+      </p:sp>
+      <p:pic>
+        <p:nvPicPr>
+          <p:cNvPr id="144" name="Google Shape;144;p21"/>
+          <p:cNvPicPr preferRelativeResize="0"/>
+          <p:nvPr/>
+        </p:nvPicPr>
+        <p:blipFill>
+          <a:blip r:embed="rId3">
+            <a:alphaModFix/>
+          </a:blip>
+          <a:stretch>
+            <a:fillRect/>
+          </a:stretch>
+        </p:blipFill>
+        <p:spPr>
+          <a:xfrm>
+            <a:off x="7458325" y="0"/>
+            <a:ext cx="1685675" cy="1685675"/>
+          </a:xfrm>
+          <a:prstGeom prst="rect">
+            <a:avLst/>
+          </a:prstGeom>
+          <a:noFill/>
+          <a:ln>
+            <a:noFill/>
+          </a:ln>
+        </p:spPr>
+      </p:pic>
     </p:spTree>
   </p:cSld>
   <p:clrMapOvr>
@@ -5538,44 +11862,44 @@
 </file>
 
 <file path=ppt/theme/theme1.xml><?xml version="1.0" encoding="utf-8"?>
-<a:theme xmlns:a="http://schemas.openxmlformats.org/drawingml/2006/main" xmlns:r="http://schemas.openxmlformats.org/officeDocument/2006/relationships" name="Simple Light">
+<a:theme xmlns:a="http://schemas.openxmlformats.org/drawingml/2006/main" xmlns:r="http://schemas.openxmlformats.org/officeDocument/2006/relationships" name="Geometric">
   <a:themeElements>
-    <a:clrScheme name="Simple Light">
+    <a:clrScheme name="Geometric">
       <a:dk1>
-        <a:srgbClr val="000000"/>
+        <a:srgbClr val="2A3990"/>
       </a:dk1>
       <a:lt1>
         <a:srgbClr val="FFFFFF"/>
       </a:lt1>
       <a:dk2>
-        <a:srgbClr val="595959"/>
+        <a:srgbClr val="434343"/>
       </a:dk2>
       <a:lt2>
-        <a:srgbClr val="EEEEEE"/>
+        <a:srgbClr val="999999"/>
       </a:lt2>
       <a:accent1>
-        <a:srgbClr val="4285F4"/>
+        <a:srgbClr val="212D74"/>
       </a:accent1>
       <a:accent2>
-        <a:srgbClr val="212121"/>
+        <a:srgbClr val="3949AB"/>
       </a:accent2>
       <a:accent3>
-        <a:srgbClr val="78909C"/>
+        <a:srgbClr val="9C254D"/>
       </a:accent3>
       <a:accent4>
-        <a:srgbClr val="FFAB40"/>
+        <a:srgbClr val="D23369"/>
       </a:accent4>
       <a:accent5>
-        <a:srgbClr val="0097A7"/>
+        <a:srgbClr val="F06292"/>
       </a:accent5>
       <a:accent6>
-        <a:srgbClr val="EEFF41"/>
+        <a:srgbClr val="7890CD"/>
       </a:accent6>
       <a:hlink>
-        <a:srgbClr val="0097A7"/>
+        <a:srgbClr val="F06292"/>
       </a:hlink>
       <a:folHlink>
-        <a:srgbClr val="0097A7"/>
+        <a:srgbClr val="F06292"/>
       </a:folHlink>
     </a:clrScheme>
     <a:fontScheme name="Office">
